--- a/knox_chatbot_가이드.pptx
+++ b/knox_chatbot_가이드.pptx
@@ -5527,6 +5527,49 @@
             <a:avLst/>
           </a:prstGeom>
           <a:solidFill>
+            <a:srgbClr val="F8F9FC"/>
+          </a:solidFill>
+          <a:ln>
+            <a:noFill/>
+          </a:ln>
+        </p:spPr>
+        <p:style>
+          <a:lnRef idx="1">
+            <a:schemeClr val="accent1"/>
+          </a:lnRef>
+          <a:fillRef idx="3">
+            <a:schemeClr val="accent1"/>
+          </a:fillRef>
+          <a:effectRef idx="2">
+            <a:schemeClr val="accent1"/>
+          </a:effectRef>
+          <a:fontRef idx="minor">
+            <a:schemeClr val="lt1"/>
+          </a:fontRef>
+        </p:style>
+        <p:txBody>
+          <a:bodyPr rtlCol="0" anchor="ctr"/>
+          <a:lstStyle/>
+          <a:p>
+            <a:pPr algn="ctr"/>
+          </a:p>
+        </p:txBody>
+      </p:sp>
+      <p:sp>
+        <p:nvSpPr>
+          <p:cNvPr id="3" name="Rectangle 2"/>
+          <p:cNvSpPr/>
+          <p:nvPr/>
+        </p:nvSpPr>
+        <p:spPr>
+          <a:xfrm>
+            <a:off x="0" y="0"/>
+            <a:ext cx="12188952" cy="91440"/>
+          </a:xfrm>
+          <a:prstGeom prst="rect">
+            <a:avLst/>
+          </a:prstGeom>
+          <a:solidFill>
             <a:srgbClr val="0F172A"/>
           </a:solidFill>
           <a:ln>
@@ -5557,14 +5600,279 @@
       </p:sp>
       <p:sp>
         <p:nvSpPr>
-          <p:cNvPr id="3" name="Rectangle 2"/>
+          <p:cNvPr id="4" name="TextBox 3"/>
+          <p:cNvSpPr txBox="1"/>
+          <p:nvPr/>
+        </p:nvSpPr>
+        <p:spPr>
+          <a:xfrm>
+            <a:off x="457200" y="164592"/>
+            <a:ext cx="2743200" cy="457200"/>
+          </a:xfrm>
+          <a:prstGeom prst="rect">
+            <a:avLst/>
+          </a:prstGeom>
+          <a:noFill/>
+        </p:spPr>
+        <p:txBody>
+          <a:bodyPr wrap="square">
+            <a:spAutoFit/>
+          </a:bodyPr>
+          <a:lstStyle/>
+          <a:p>
+            <a:pPr algn="l"/>
+            <a:r>
+              <a:rPr sz="1200" b="1" i="0">
+                <a:solidFill>
+                  <a:srgbClr val="2D5A9E"/>
+                </a:solidFill>
+              </a:rPr>
+              <a:t>STEP 02</a:t>
+            </a:r>
+          </a:p>
+        </p:txBody>
+      </p:sp>
+      <p:sp>
+        <p:nvSpPr>
+          <p:cNvPr id="5" name="TextBox 4"/>
+          <p:cNvSpPr txBox="1"/>
+          <p:nvPr/>
+        </p:nvSpPr>
+        <p:spPr>
+          <a:xfrm>
+            <a:off x="457200" y="502920"/>
+            <a:ext cx="10972800" cy="640080"/>
+          </a:xfrm>
+          <a:prstGeom prst="rect">
+            <a:avLst/>
+          </a:prstGeom>
+          <a:noFill/>
+        </p:spPr>
+        <p:txBody>
+          <a:bodyPr wrap="square">
+            <a:spAutoFit/>
+          </a:bodyPr>
+          <a:lstStyle/>
+          <a:p>
+            <a:pPr algn="l"/>
+            <a:r>
+              <a:rPr sz="2600" b="1" i="0">
+                <a:solidFill>
+                  <a:srgbClr val="0F172A"/>
+                </a:solidFill>
+              </a:rPr>
+              <a:t>방화벽 연결하기 — 개념도</a:t>
+            </a:r>
+          </a:p>
+        </p:txBody>
+      </p:sp>
+      <p:sp>
+        <p:nvSpPr>
+          <p:cNvPr id="6" name="TextBox 5"/>
+          <p:cNvSpPr txBox="1"/>
+          <p:nvPr/>
+        </p:nvSpPr>
+        <p:spPr>
+          <a:xfrm>
+            <a:off x="457200" y="1078992"/>
+            <a:ext cx="10972800" cy="384048"/>
+          </a:xfrm>
+          <a:prstGeom prst="rect">
+            <a:avLst/>
+          </a:prstGeom>
+          <a:noFill/>
+        </p:spPr>
+        <p:txBody>
+          <a:bodyPr wrap="square">
+            <a:spAutoFit/>
+          </a:bodyPr>
+          <a:lstStyle/>
+          <a:p>
+            <a:pPr algn="l"/>
+            <a:r>
+              <a:rPr sz="1300" b="0" i="1">
+                <a:solidFill>
+                  <a:srgbClr val="475569"/>
+                </a:solidFill>
+              </a:rPr>
+              <a:t>Knox 서버는 수신용(API)과 발신용(Webhook) IP가 다릅니다 — 두 방향 모두 방화벽 정책 등록 필요</a:t>
+            </a:r>
+          </a:p>
+        </p:txBody>
+      </p:sp>
+      <p:sp>
+        <p:nvSpPr>
+          <p:cNvPr id="7" name="Rectangle 6"/>
           <p:cNvSpPr/>
           <p:nvPr/>
         </p:nvSpPr>
         <p:spPr>
           <a:xfrm>
-            <a:off x="0" y="0"/>
-            <a:ext cx="12188952" cy="91440"/>
+            <a:off x="365760" y="1417320"/>
+            <a:ext cx="11457432" cy="19050"/>
+          </a:xfrm>
+          <a:prstGeom prst="rect">
+            <a:avLst/>
+          </a:prstGeom>
+          <a:solidFill>
+            <a:srgbClr val="0F172A"/>
+          </a:solidFill>
+          <a:ln>
+            <a:noFill/>
+          </a:ln>
+        </p:spPr>
+        <p:style>
+          <a:lnRef idx="1">
+            <a:schemeClr val="accent1"/>
+          </a:lnRef>
+          <a:fillRef idx="3">
+            <a:schemeClr val="accent1"/>
+          </a:fillRef>
+          <a:effectRef idx="2">
+            <a:schemeClr val="accent1"/>
+          </a:effectRef>
+          <a:fontRef idx="minor">
+            <a:schemeClr val="lt1"/>
+          </a:fontRef>
+        </p:style>
+        <p:txBody>
+          <a:bodyPr rtlCol="0" anchor="ctr"/>
+          <a:lstStyle/>
+          <a:p>
+            <a:pPr algn="ctr"/>
+          </a:p>
+        </p:txBody>
+      </p:sp>
+      <p:sp>
+        <p:nvSpPr>
+          <p:cNvPr id="8" name="Rectangle 7"/>
+          <p:cNvSpPr/>
+          <p:nvPr/>
+        </p:nvSpPr>
+        <p:spPr>
+          <a:xfrm>
+            <a:off x="1293876" y="1536192"/>
+            <a:ext cx="9601200" cy="274320"/>
+          </a:xfrm>
+          <a:prstGeom prst="rect">
+            <a:avLst/>
+          </a:prstGeom>
+          <a:solidFill>
+            <a:srgbClr val="0F172A"/>
+          </a:solidFill>
+          <a:ln>
+            <a:noFill/>
+          </a:ln>
+        </p:spPr>
+        <p:style>
+          <a:lnRef idx="1">
+            <a:schemeClr val="accent1"/>
+          </a:lnRef>
+          <a:fillRef idx="3">
+            <a:schemeClr val="accent1"/>
+          </a:fillRef>
+          <a:effectRef idx="2">
+            <a:schemeClr val="accent1"/>
+          </a:effectRef>
+          <a:fontRef idx="minor">
+            <a:schemeClr val="lt1"/>
+          </a:fontRef>
+        </p:style>
+        <p:txBody>
+          <a:bodyPr rtlCol="0" anchor="ctr"/>
+          <a:lstStyle/>
+          <a:p>
+            <a:pPr algn="ctr"/>
+          </a:p>
+        </p:txBody>
+      </p:sp>
+      <p:sp>
+        <p:nvSpPr>
+          <p:cNvPr id="9" name="TextBox 8"/>
+          <p:cNvSpPr txBox="1"/>
+          <p:nvPr/>
+        </p:nvSpPr>
+        <p:spPr>
+          <a:xfrm>
+            <a:off x="1293876" y="1536192"/>
+            <a:ext cx="9601200" cy="274320"/>
+          </a:xfrm>
+          <a:prstGeom prst="rect">
+            <a:avLst/>
+          </a:prstGeom>
+          <a:noFill/>
+        </p:spPr>
+        <p:txBody>
+          <a:bodyPr wrap="square">
+            <a:spAutoFit/>
+          </a:bodyPr>
+          <a:lstStyle/>
+          <a:p>
+            <a:pPr algn="l"/>
+            <a:r>
+              <a:rPr sz="1100" b="1" i="0">
+                <a:solidFill>
+                  <a:srgbClr val="FFFFFF"/>
+                </a:solidFill>
+              </a:rPr>
+              <a:t>  ▲  발신 (Outbound) — 내 서버  →  Knox 수신 서버 (API)  |  Port 80, 443</a:t>
+            </a:r>
+          </a:p>
+        </p:txBody>
+      </p:sp>
+      <p:sp>
+        <p:nvSpPr>
+          <p:cNvPr id="10" name="Rectangle 9"/>
+          <p:cNvSpPr/>
+          <p:nvPr/>
+        </p:nvSpPr>
+        <p:spPr>
+          <a:xfrm>
+            <a:off x="1293876" y="1847088"/>
+            <a:ext cx="2651760" cy="1737360"/>
+          </a:xfrm>
+          <a:prstGeom prst="rect">
+            <a:avLst/>
+          </a:prstGeom>
+          <a:solidFill>
+            <a:srgbClr val="0F172A"/>
+          </a:solidFill>
+          <a:ln>
+            <a:noFill/>
+          </a:ln>
+        </p:spPr>
+        <p:style>
+          <a:lnRef idx="1">
+            <a:schemeClr val="accent1"/>
+          </a:lnRef>
+          <a:fillRef idx="3">
+            <a:schemeClr val="accent1"/>
+          </a:fillRef>
+          <a:effectRef idx="2">
+            <a:schemeClr val="accent1"/>
+          </a:effectRef>
+          <a:fontRef idx="minor">
+            <a:schemeClr val="lt1"/>
+          </a:fontRef>
+        </p:style>
+        <p:txBody>
+          <a:bodyPr rtlCol="0" anchor="ctr"/>
+          <a:lstStyle/>
+          <a:p>
+            <a:pPr algn="ctr"/>
+          </a:p>
+        </p:txBody>
+      </p:sp>
+      <p:sp>
+        <p:nvSpPr>
+          <p:cNvPr id="11" name="Rectangle 10"/>
+          <p:cNvSpPr/>
+          <p:nvPr/>
+        </p:nvSpPr>
+        <p:spPr>
+          <a:xfrm>
+            <a:off x="1293876" y="1847088"/>
+            <a:ext cx="2651760" cy="73152"/>
           </a:xfrm>
           <a:prstGeom prst="rect">
             <a:avLst/>
@@ -5600,116 +5908,450 @@
       </p:sp>
       <p:sp>
         <p:nvSpPr>
-          <p:cNvPr id="4" name="TextBox 3"/>
-          <p:cNvSpPr txBox="1"/>
-          <p:nvPr/>
-        </p:nvSpPr>
-        <p:spPr>
-          <a:xfrm>
-            <a:off x="457200" y="164592"/>
-            <a:ext cx="2743200" cy="457200"/>
-          </a:xfrm>
-          <a:prstGeom prst="rect">
-            <a:avLst/>
-          </a:prstGeom>
-          <a:noFill/>
-        </p:spPr>
-        <p:txBody>
-          <a:bodyPr wrap="square">
-            <a:spAutoFit/>
-          </a:bodyPr>
-          <a:lstStyle/>
-          <a:p>
-            <a:pPr algn="l"/>
-            <a:r>
-              <a:rPr sz="1200" b="1" i="0">
-                <a:solidFill>
-                  <a:srgbClr val="38BDF8"/>
-                </a:solidFill>
-              </a:rPr>
-              <a:t>STEP 02</a:t>
-            </a:r>
-          </a:p>
-        </p:txBody>
-      </p:sp>
-      <p:sp>
-        <p:nvSpPr>
-          <p:cNvPr id="5" name="TextBox 4"/>
-          <p:cNvSpPr txBox="1"/>
-          <p:nvPr/>
-        </p:nvSpPr>
-        <p:spPr>
-          <a:xfrm>
-            <a:off x="457200" y="502920"/>
-            <a:ext cx="10972800" cy="685800"/>
-          </a:xfrm>
-          <a:prstGeom prst="rect">
-            <a:avLst/>
-          </a:prstGeom>
-          <a:noFill/>
-        </p:spPr>
-        <p:txBody>
-          <a:bodyPr wrap="square">
-            <a:spAutoFit/>
-          </a:bodyPr>
-          <a:lstStyle/>
-          <a:p>
-            <a:pPr algn="l"/>
-            <a:r>
-              <a:rPr sz="2600" b="1" i="0">
+          <p:cNvPr id="12" name="TextBox 11"/>
+          <p:cNvSpPr txBox="1"/>
+          <p:nvPr/>
+        </p:nvSpPr>
+        <p:spPr>
+          <a:xfrm>
+            <a:off x="1293876" y="1938528"/>
+            <a:ext cx="2651760" cy="594360"/>
+          </a:xfrm>
+          <a:prstGeom prst="rect">
+            <a:avLst/>
+          </a:prstGeom>
+          <a:noFill/>
+        </p:spPr>
+        <p:txBody>
+          <a:bodyPr wrap="square">
+            <a:spAutoFit/>
+          </a:bodyPr>
+          <a:lstStyle/>
+          <a:p>
+            <a:pPr algn="ctr"/>
+            <a:r>
+              <a:rPr sz="2600" b="0" i="0">
                 <a:solidFill>
                   <a:srgbClr val="FFFFFF"/>
                 </a:solidFill>
               </a:rPr>
-              <a:t>방화벽 연결하기 — 개념도</a:t>
-            </a:r>
-          </a:p>
-        </p:txBody>
-      </p:sp>
-      <p:sp>
-        <p:nvSpPr>
-          <p:cNvPr id="6" name="TextBox 5"/>
-          <p:cNvSpPr txBox="1"/>
-          <p:nvPr/>
-        </p:nvSpPr>
-        <p:spPr>
-          <a:xfrm>
-            <a:off x="457200" y="1078992"/>
-            <a:ext cx="10972800" cy="411480"/>
-          </a:xfrm>
-          <a:prstGeom prst="rect">
-            <a:avLst/>
-          </a:prstGeom>
-          <a:noFill/>
-        </p:spPr>
-        <p:txBody>
-          <a:bodyPr wrap="square">
-            <a:spAutoFit/>
-          </a:bodyPr>
-          <a:lstStyle/>
-          <a:p>
-            <a:pPr algn="l"/>
-            <a:r>
-              <a:rPr sz="1300" b="0" i="1">
+              <a:t>🖥️</a:t>
+            </a:r>
+          </a:p>
+        </p:txBody>
+      </p:sp>
+      <p:sp>
+        <p:nvSpPr>
+          <p:cNvPr id="13" name="TextBox 12"/>
+          <p:cNvSpPr txBox="1"/>
+          <p:nvPr/>
+        </p:nvSpPr>
+        <p:spPr>
+          <a:xfrm>
+            <a:off x="1293876" y="2514600"/>
+            <a:ext cx="2651760" cy="365760"/>
+          </a:xfrm>
+          <a:prstGeom prst="rect">
+            <a:avLst/>
+          </a:prstGeom>
+          <a:noFill/>
+        </p:spPr>
+        <p:txBody>
+          <a:bodyPr wrap="square">
+            <a:spAutoFit/>
+          </a:bodyPr>
+          <a:lstStyle/>
+          <a:p>
+            <a:pPr algn="ctr"/>
+            <a:r>
+              <a:rPr sz="1400" b="1" i="0">
+                <a:solidFill>
+                  <a:srgbClr val="FFFFFF"/>
+                </a:solidFill>
+              </a:rPr>
+              <a:t>내 서버</a:t>
+            </a:r>
+          </a:p>
+        </p:txBody>
+      </p:sp>
+      <p:sp>
+        <p:nvSpPr>
+          <p:cNvPr id="14" name="TextBox 13"/>
+          <p:cNvSpPr txBox="1"/>
+          <p:nvPr/>
+        </p:nvSpPr>
+        <p:spPr>
+          <a:xfrm>
+            <a:off x="1293876" y="2926080"/>
+            <a:ext cx="2651760" cy="292608"/>
+          </a:xfrm>
+          <a:prstGeom prst="rect">
+            <a:avLst/>
+          </a:prstGeom>
+          <a:noFill/>
+        </p:spPr>
+        <p:txBody>
+          <a:bodyPr wrap="square">
+            <a:spAutoFit/>
+          </a:bodyPr>
+          <a:lstStyle/>
+          <a:p>
+            <a:pPr algn="ctr"/>
+            <a:r>
+              <a:rPr sz="1000" b="0" i="0">
                 <a:solidFill>
                   <a:srgbClr val="60A5FA"/>
                 </a:solidFill>
               </a:rPr>
-              <a:t>내 서버와 Knox 서버 간 발신(Outbound) / 수신(Inbound) 두 방향 모두 정책 등록이 필요합니다</a:t>
-            </a:r>
-          </a:p>
-        </p:txBody>
-      </p:sp>
-      <p:sp>
-        <p:nvSpPr>
-          <p:cNvPr id="7" name="Rectangle 6"/>
+              <a:t>My Server  Port 80</a:t>
+            </a:r>
+          </a:p>
+        </p:txBody>
+      </p:sp>
+      <p:sp>
+        <p:nvSpPr>
+          <p:cNvPr id="15" name="TextBox 14"/>
+          <p:cNvSpPr txBox="1"/>
+          <p:nvPr/>
+        </p:nvSpPr>
+        <p:spPr>
+          <a:xfrm>
+            <a:off x="3945636" y="1956816"/>
+            <a:ext cx="822960" cy="457200"/>
+          </a:xfrm>
+          <a:prstGeom prst="rect">
+            <a:avLst/>
+          </a:prstGeom>
+          <a:noFill/>
+        </p:spPr>
+        <p:txBody>
+          <a:bodyPr wrap="square">
+            <a:spAutoFit/>
+          </a:bodyPr>
+          <a:lstStyle/>
+          <a:p>
+            <a:pPr algn="ctr"/>
+            <a:r>
+              <a:rPr sz="900" b="0" i="0">
+                <a:solidFill>
+                  <a:srgbClr val="2D5A9E"/>
+                </a:solidFill>
+              </a:rPr>
+              <a:t>Port
+80/443</a:t>
+            </a:r>
+          </a:p>
+        </p:txBody>
+      </p:sp>
+      <p:sp>
+        <p:nvSpPr>
+          <p:cNvPr id="16" name="TextBox 15"/>
+          <p:cNvSpPr txBox="1"/>
+          <p:nvPr/>
+        </p:nvSpPr>
+        <p:spPr>
+          <a:xfrm>
+            <a:off x="3945636" y="2395728"/>
+            <a:ext cx="822960" cy="457200"/>
+          </a:xfrm>
+          <a:prstGeom prst="rect">
+            <a:avLst/>
+          </a:prstGeom>
+          <a:noFill/>
+        </p:spPr>
+        <p:txBody>
+          <a:bodyPr wrap="square">
+            <a:spAutoFit/>
+          </a:bodyPr>
+          <a:lstStyle/>
+          <a:p>
+            <a:pPr algn="ctr"/>
+            <a:r>
+              <a:rPr sz="2000" b="1" i="0">
+                <a:solidFill>
+                  <a:srgbClr val="2D5A9E"/>
+                </a:solidFill>
+              </a:rPr>
+              <a:t>────▶</a:t>
+            </a:r>
+          </a:p>
+        </p:txBody>
+      </p:sp>
+      <p:sp>
+        <p:nvSpPr>
+          <p:cNvPr id="17" name="Rectangle 16"/>
           <p:cNvSpPr/>
           <p:nvPr/>
         </p:nvSpPr>
         <p:spPr>
           <a:xfrm>
-            <a:off x="365760" y="1371600"/>
-            <a:ext cx="11457432" cy="19050"/>
+            <a:off x="4768596" y="1847088"/>
+            <a:ext cx="2651760" cy="1737360"/>
+          </a:xfrm>
+          <a:prstGeom prst="rect">
+            <a:avLst/>
+          </a:prstGeom>
+          <a:solidFill>
+            <a:srgbClr val="475569"/>
+          </a:solidFill>
+          <a:ln>
+            <a:noFill/>
+          </a:ln>
+        </p:spPr>
+        <p:style>
+          <a:lnRef idx="1">
+            <a:schemeClr val="accent1"/>
+          </a:lnRef>
+          <a:fillRef idx="3">
+            <a:schemeClr val="accent1"/>
+          </a:fillRef>
+          <a:effectRef idx="2">
+            <a:schemeClr val="accent1"/>
+          </a:effectRef>
+          <a:fontRef idx="minor">
+            <a:schemeClr val="lt1"/>
+          </a:fontRef>
+        </p:style>
+        <p:txBody>
+          <a:bodyPr rtlCol="0" anchor="ctr"/>
+          <a:lstStyle/>
+          <a:p>
+            <a:pPr algn="ctr"/>
+          </a:p>
+        </p:txBody>
+      </p:sp>
+      <p:sp>
+        <p:nvSpPr>
+          <p:cNvPr id="18" name="Rectangle 17"/>
+          <p:cNvSpPr/>
+          <p:nvPr/>
+        </p:nvSpPr>
+        <p:spPr>
+          <a:xfrm>
+            <a:off x="4768596" y="1847088"/>
+            <a:ext cx="2651760" cy="73152"/>
+          </a:xfrm>
+          <a:prstGeom prst="rect">
+            <a:avLst/>
+          </a:prstGeom>
+          <a:solidFill>
+            <a:srgbClr val="64748B"/>
+          </a:solidFill>
+          <a:ln>
+            <a:noFill/>
+          </a:ln>
+        </p:spPr>
+        <p:style>
+          <a:lnRef idx="1">
+            <a:schemeClr val="accent1"/>
+          </a:lnRef>
+          <a:fillRef idx="3">
+            <a:schemeClr val="accent1"/>
+          </a:fillRef>
+          <a:effectRef idx="2">
+            <a:schemeClr val="accent1"/>
+          </a:effectRef>
+          <a:fontRef idx="minor">
+            <a:schemeClr val="lt1"/>
+          </a:fontRef>
+        </p:style>
+        <p:txBody>
+          <a:bodyPr rtlCol="0" anchor="ctr"/>
+          <a:lstStyle/>
+          <a:p>
+            <a:pPr algn="ctr"/>
+          </a:p>
+        </p:txBody>
+      </p:sp>
+      <p:sp>
+        <p:nvSpPr>
+          <p:cNvPr id="19" name="TextBox 18"/>
+          <p:cNvSpPr txBox="1"/>
+          <p:nvPr/>
+        </p:nvSpPr>
+        <p:spPr>
+          <a:xfrm>
+            <a:off x="4768596" y="1938528"/>
+            <a:ext cx="2651760" cy="594360"/>
+          </a:xfrm>
+          <a:prstGeom prst="rect">
+            <a:avLst/>
+          </a:prstGeom>
+          <a:noFill/>
+        </p:spPr>
+        <p:txBody>
+          <a:bodyPr wrap="square">
+            <a:spAutoFit/>
+          </a:bodyPr>
+          <a:lstStyle/>
+          <a:p>
+            <a:pPr algn="ctr"/>
+            <a:r>
+              <a:rPr sz="2600" b="0" i="0">
+                <a:solidFill>
+                  <a:srgbClr val="FFFFFF"/>
+                </a:solidFill>
+              </a:rPr>
+              <a:t>🛡️</a:t>
+            </a:r>
+          </a:p>
+        </p:txBody>
+      </p:sp>
+      <p:sp>
+        <p:nvSpPr>
+          <p:cNvPr id="20" name="TextBox 19"/>
+          <p:cNvSpPr txBox="1"/>
+          <p:nvPr/>
+        </p:nvSpPr>
+        <p:spPr>
+          <a:xfrm>
+            <a:off x="4768596" y="2514600"/>
+            <a:ext cx="2651760" cy="365760"/>
+          </a:xfrm>
+          <a:prstGeom prst="rect">
+            <a:avLst/>
+          </a:prstGeom>
+          <a:noFill/>
+        </p:spPr>
+        <p:txBody>
+          <a:bodyPr wrap="square">
+            <a:spAutoFit/>
+          </a:bodyPr>
+          <a:lstStyle/>
+          <a:p>
+            <a:pPr algn="ctr"/>
+            <a:r>
+              <a:rPr sz="1400" b="1" i="0">
+                <a:solidFill>
+                  <a:srgbClr val="FFFFFF"/>
+                </a:solidFill>
+              </a:rPr>
+              <a:t>방화벽</a:t>
+            </a:r>
+          </a:p>
+        </p:txBody>
+      </p:sp>
+      <p:sp>
+        <p:nvSpPr>
+          <p:cNvPr id="21" name="TextBox 20"/>
+          <p:cNvSpPr txBox="1"/>
+          <p:nvPr/>
+        </p:nvSpPr>
+        <p:spPr>
+          <a:xfrm>
+            <a:off x="4768596" y="2926080"/>
+            <a:ext cx="2651760" cy="292608"/>
+          </a:xfrm>
+          <a:prstGeom prst="rect">
+            <a:avLst/>
+          </a:prstGeom>
+          <a:noFill/>
+        </p:spPr>
+        <p:txBody>
+          <a:bodyPr wrap="square">
+            <a:spAutoFit/>
+          </a:bodyPr>
+          <a:lstStyle/>
+          <a:p>
+            <a:pPr algn="ctr"/>
+            <a:r>
+              <a:rPr sz="1000" b="0" i="0">
+                <a:solidFill>
+                  <a:srgbClr val="CBD5E1"/>
+                </a:solidFill>
+              </a:rPr>
+              <a:t>Firewall</a:t>
+            </a:r>
+          </a:p>
+        </p:txBody>
+      </p:sp>
+      <p:sp>
+        <p:nvSpPr>
+          <p:cNvPr id="22" name="TextBox 21"/>
+          <p:cNvSpPr txBox="1"/>
+          <p:nvPr/>
+        </p:nvSpPr>
+        <p:spPr>
+          <a:xfrm>
+            <a:off x="7420356" y="2395728"/>
+            <a:ext cx="822960" cy="457200"/>
+          </a:xfrm>
+          <a:prstGeom prst="rect">
+            <a:avLst/>
+          </a:prstGeom>
+          <a:noFill/>
+        </p:spPr>
+        <p:txBody>
+          <a:bodyPr wrap="square">
+            <a:spAutoFit/>
+          </a:bodyPr>
+          <a:lstStyle/>
+          <a:p>
+            <a:pPr algn="ctr"/>
+            <a:r>
+              <a:rPr sz="2000" b="1" i="0">
+                <a:solidFill>
+                  <a:srgbClr val="2D5A9E"/>
+                </a:solidFill>
+              </a:rPr>
+              <a:t>────▶</a:t>
+            </a:r>
+          </a:p>
+        </p:txBody>
+      </p:sp>
+      <p:sp>
+        <p:nvSpPr>
+          <p:cNvPr id="23" name="Rectangle 22"/>
+          <p:cNvSpPr/>
+          <p:nvPr/>
+        </p:nvSpPr>
+        <p:spPr>
+          <a:xfrm>
+            <a:off x="8243316" y="1847088"/>
+            <a:ext cx="2651760" cy="1737360"/>
+          </a:xfrm>
+          <a:prstGeom prst="rect">
+            <a:avLst/>
+          </a:prstGeom>
+          <a:solidFill>
+            <a:srgbClr val="2D5A9E"/>
+          </a:solidFill>
+          <a:ln>
+            <a:noFill/>
+          </a:ln>
+        </p:spPr>
+        <p:style>
+          <a:lnRef idx="1">
+            <a:schemeClr val="accent1"/>
+          </a:lnRef>
+          <a:fillRef idx="3">
+            <a:schemeClr val="accent1"/>
+          </a:fillRef>
+          <a:effectRef idx="2">
+            <a:schemeClr val="accent1"/>
+          </a:effectRef>
+          <a:fontRef idx="minor">
+            <a:schemeClr val="lt1"/>
+          </a:fontRef>
+        </p:style>
+        <p:txBody>
+          <a:bodyPr rtlCol="0" anchor="ctr"/>
+          <a:lstStyle/>
+          <a:p>
+            <a:pPr algn="ctr"/>
+          </a:p>
+        </p:txBody>
+      </p:sp>
+      <p:sp>
+        <p:nvSpPr>
+          <p:cNvPr id="24" name="Rectangle 23"/>
+          <p:cNvSpPr/>
+          <p:nvPr/>
+        </p:nvSpPr>
+        <p:spPr>
+          <a:xfrm>
+            <a:off x="8243316" y="1847088"/>
+            <a:ext cx="2651760" cy="73152"/>
           </a:xfrm>
           <a:prstGeom prst="rect">
             <a:avLst/>
@@ -5745,14 +6387,716 @@
       </p:sp>
       <p:sp>
         <p:nvSpPr>
-          <p:cNvPr id="8" name="Rectangle 7"/>
+          <p:cNvPr id="25" name="TextBox 24"/>
+          <p:cNvSpPr txBox="1"/>
+          <p:nvPr/>
+        </p:nvSpPr>
+        <p:spPr>
+          <a:xfrm>
+            <a:off x="8243316" y="1938528"/>
+            <a:ext cx="2651760" cy="594360"/>
+          </a:xfrm>
+          <a:prstGeom prst="rect">
+            <a:avLst/>
+          </a:prstGeom>
+          <a:noFill/>
+        </p:spPr>
+        <p:txBody>
+          <a:bodyPr wrap="square">
+            <a:spAutoFit/>
+          </a:bodyPr>
+          <a:lstStyle/>
+          <a:p>
+            <a:pPr algn="ctr"/>
+            <a:r>
+              <a:rPr sz="2600" b="0" i="0">
+                <a:solidFill>
+                  <a:srgbClr val="FFFFFF"/>
+                </a:solidFill>
+              </a:rPr>
+              <a:t>📡</a:t>
+            </a:r>
+          </a:p>
+        </p:txBody>
+      </p:sp>
+      <p:sp>
+        <p:nvSpPr>
+          <p:cNvPr id="26" name="TextBox 25"/>
+          <p:cNvSpPr txBox="1"/>
+          <p:nvPr/>
+        </p:nvSpPr>
+        <p:spPr>
+          <a:xfrm>
+            <a:off x="8243316" y="2514600"/>
+            <a:ext cx="2651760" cy="365760"/>
+          </a:xfrm>
+          <a:prstGeom prst="rect">
+            <a:avLst/>
+          </a:prstGeom>
+          <a:noFill/>
+        </p:spPr>
+        <p:txBody>
+          <a:bodyPr wrap="square">
+            <a:spAutoFit/>
+          </a:bodyPr>
+          <a:lstStyle/>
+          <a:p>
+            <a:pPr algn="ctr"/>
+            <a:r>
+              <a:rPr sz="1300" b="1" i="0">
+                <a:solidFill>
+                  <a:srgbClr val="FFFFFF"/>
+                </a:solidFill>
+              </a:rPr>
+              <a:t>Knox 수신 서버</a:t>
+            </a:r>
+          </a:p>
+        </p:txBody>
+      </p:sp>
+      <p:sp>
+        <p:nvSpPr>
+          <p:cNvPr id="27" name="TextBox 26"/>
+          <p:cNvSpPr txBox="1"/>
+          <p:nvPr/>
+        </p:nvSpPr>
+        <p:spPr>
+          <a:xfrm>
+            <a:off x="8243316" y="2926080"/>
+            <a:ext cx="2651760" cy="566928"/>
+          </a:xfrm>
+          <a:prstGeom prst="rect">
+            <a:avLst/>
+          </a:prstGeom>
+          <a:noFill/>
+        </p:spPr>
+        <p:txBody>
+          <a:bodyPr wrap="square">
+            <a:spAutoFit/>
+          </a:bodyPr>
+          <a:lstStyle/>
+          <a:p>
+            <a:pPr algn="ctr"/>
+            <a:r>
+              <a:rPr sz="950" b="0" i="0">
+                <a:solidFill>
+                  <a:srgbClr val="60A5FA"/>
+                </a:solidFill>
+              </a:rPr>
+              <a:t>openapi.samsung.net
+API 요청 수신</a:t>
+            </a:r>
+          </a:p>
+        </p:txBody>
+      </p:sp>
+      <p:sp>
+        <p:nvSpPr>
+          <p:cNvPr id="28" name="Rectangle 27"/>
           <p:cNvSpPr/>
           <p:nvPr/>
         </p:nvSpPr>
         <p:spPr>
           <a:xfrm>
-            <a:off x="516636" y="1572768"/>
-            <a:ext cx="2743200" cy="1828800"/>
+            <a:off x="1293876" y="3904488"/>
+            <a:ext cx="9601200" cy="274320"/>
+          </a:xfrm>
+          <a:prstGeom prst="rect">
+            <a:avLst/>
+          </a:prstGeom>
+          <a:solidFill>
+            <a:srgbClr val="475569"/>
+          </a:solidFill>
+          <a:ln>
+            <a:noFill/>
+          </a:ln>
+        </p:spPr>
+        <p:style>
+          <a:lnRef idx="1">
+            <a:schemeClr val="accent1"/>
+          </a:lnRef>
+          <a:fillRef idx="3">
+            <a:schemeClr val="accent1"/>
+          </a:fillRef>
+          <a:effectRef idx="2">
+            <a:schemeClr val="accent1"/>
+          </a:effectRef>
+          <a:fontRef idx="minor">
+            <a:schemeClr val="lt1"/>
+          </a:fontRef>
+        </p:style>
+        <p:txBody>
+          <a:bodyPr rtlCol="0" anchor="ctr"/>
+          <a:lstStyle/>
+          <a:p>
+            <a:pPr algn="ctr"/>
+          </a:p>
+        </p:txBody>
+      </p:sp>
+      <p:sp>
+        <p:nvSpPr>
+          <p:cNvPr id="29" name="TextBox 28"/>
+          <p:cNvSpPr txBox="1"/>
+          <p:nvPr/>
+        </p:nvSpPr>
+        <p:spPr>
+          <a:xfrm>
+            <a:off x="1293876" y="3904488"/>
+            <a:ext cx="9601200" cy="274320"/>
+          </a:xfrm>
+          <a:prstGeom prst="rect">
+            <a:avLst/>
+          </a:prstGeom>
+          <a:noFill/>
+        </p:spPr>
+        <p:txBody>
+          <a:bodyPr wrap="square">
+            <a:spAutoFit/>
+          </a:bodyPr>
+          <a:lstStyle/>
+          <a:p>
+            <a:pPr algn="l"/>
+            <a:r>
+              <a:rPr sz="1100" b="1" i="0">
+                <a:solidFill>
+                  <a:srgbClr val="FFFFFF"/>
+                </a:solidFill>
+              </a:rPr>
+              <a:t>  ▼  수신 (Inbound) — Knox 발신 서버 (Webhook)  →  내 서버  |  Port 80  ⚠ 반드시 허용</a:t>
+            </a:r>
+          </a:p>
+        </p:txBody>
+      </p:sp>
+      <p:sp>
+        <p:nvSpPr>
+          <p:cNvPr id="30" name="Rectangle 29"/>
+          <p:cNvSpPr/>
+          <p:nvPr/>
+        </p:nvSpPr>
+        <p:spPr>
+          <a:xfrm>
+            <a:off x="1293876" y="4215384"/>
+            <a:ext cx="2651760" cy="1737360"/>
+          </a:xfrm>
+          <a:prstGeom prst="rect">
+            <a:avLst/>
+          </a:prstGeom>
+          <a:solidFill>
+            <a:srgbClr val="0F172A"/>
+          </a:solidFill>
+          <a:ln>
+            <a:noFill/>
+          </a:ln>
+        </p:spPr>
+        <p:style>
+          <a:lnRef idx="1">
+            <a:schemeClr val="accent1"/>
+          </a:lnRef>
+          <a:fillRef idx="3">
+            <a:schemeClr val="accent1"/>
+          </a:fillRef>
+          <a:effectRef idx="2">
+            <a:schemeClr val="accent1"/>
+          </a:effectRef>
+          <a:fontRef idx="minor">
+            <a:schemeClr val="lt1"/>
+          </a:fontRef>
+        </p:style>
+        <p:txBody>
+          <a:bodyPr rtlCol="0" anchor="ctr"/>
+          <a:lstStyle/>
+          <a:p>
+            <a:pPr algn="ctr"/>
+          </a:p>
+        </p:txBody>
+      </p:sp>
+      <p:sp>
+        <p:nvSpPr>
+          <p:cNvPr id="31" name="Rectangle 30"/>
+          <p:cNvSpPr/>
+          <p:nvPr/>
+        </p:nvSpPr>
+        <p:spPr>
+          <a:xfrm>
+            <a:off x="1293876" y="4215384"/>
+            <a:ext cx="2651760" cy="73152"/>
+          </a:xfrm>
+          <a:prstGeom prst="rect">
+            <a:avLst/>
+          </a:prstGeom>
+          <a:solidFill>
+            <a:srgbClr val="38BDF8"/>
+          </a:solidFill>
+          <a:ln>
+            <a:noFill/>
+          </a:ln>
+        </p:spPr>
+        <p:style>
+          <a:lnRef idx="1">
+            <a:schemeClr val="accent1"/>
+          </a:lnRef>
+          <a:fillRef idx="3">
+            <a:schemeClr val="accent1"/>
+          </a:fillRef>
+          <a:effectRef idx="2">
+            <a:schemeClr val="accent1"/>
+          </a:effectRef>
+          <a:fontRef idx="minor">
+            <a:schemeClr val="lt1"/>
+          </a:fontRef>
+        </p:style>
+        <p:txBody>
+          <a:bodyPr rtlCol="0" anchor="ctr"/>
+          <a:lstStyle/>
+          <a:p>
+            <a:pPr algn="ctr"/>
+          </a:p>
+        </p:txBody>
+      </p:sp>
+      <p:sp>
+        <p:nvSpPr>
+          <p:cNvPr id="32" name="TextBox 31"/>
+          <p:cNvSpPr txBox="1"/>
+          <p:nvPr/>
+        </p:nvSpPr>
+        <p:spPr>
+          <a:xfrm>
+            <a:off x="1293876" y="4306824"/>
+            <a:ext cx="2651760" cy="594360"/>
+          </a:xfrm>
+          <a:prstGeom prst="rect">
+            <a:avLst/>
+          </a:prstGeom>
+          <a:noFill/>
+        </p:spPr>
+        <p:txBody>
+          <a:bodyPr wrap="square">
+            <a:spAutoFit/>
+          </a:bodyPr>
+          <a:lstStyle/>
+          <a:p>
+            <a:pPr algn="ctr"/>
+            <a:r>
+              <a:rPr sz="2600" b="0" i="0">
+                <a:solidFill>
+                  <a:srgbClr val="FFFFFF"/>
+                </a:solidFill>
+              </a:rPr>
+              <a:t>🖥️</a:t>
+            </a:r>
+          </a:p>
+        </p:txBody>
+      </p:sp>
+      <p:sp>
+        <p:nvSpPr>
+          <p:cNvPr id="33" name="TextBox 32"/>
+          <p:cNvSpPr txBox="1"/>
+          <p:nvPr/>
+        </p:nvSpPr>
+        <p:spPr>
+          <a:xfrm>
+            <a:off x="1293876" y="4882896"/>
+            <a:ext cx="2651760" cy="365760"/>
+          </a:xfrm>
+          <a:prstGeom prst="rect">
+            <a:avLst/>
+          </a:prstGeom>
+          <a:noFill/>
+        </p:spPr>
+        <p:txBody>
+          <a:bodyPr wrap="square">
+            <a:spAutoFit/>
+          </a:bodyPr>
+          <a:lstStyle/>
+          <a:p>
+            <a:pPr algn="ctr"/>
+            <a:r>
+              <a:rPr sz="1400" b="1" i="0">
+                <a:solidFill>
+                  <a:srgbClr val="FFFFFF"/>
+                </a:solidFill>
+              </a:rPr>
+              <a:t>내 서버</a:t>
+            </a:r>
+          </a:p>
+        </p:txBody>
+      </p:sp>
+      <p:sp>
+        <p:nvSpPr>
+          <p:cNvPr id="34" name="TextBox 33"/>
+          <p:cNvSpPr txBox="1"/>
+          <p:nvPr/>
+        </p:nvSpPr>
+        <p:spPr>
+          <a:xfrm>
+            <a:off x="1293876" y="5294376"/>
+            <a:ext cx="2651760" cy="292608"/>
+          </a:xfrm>
+          <a:prstGeom prst="rect">
+            <a:avLst/>
+          </a:prstGeom>
+          <a:noFill/>
+        </p:spPr>
+        <p:txBody>
+          <a:bodyPr wrap="square">
+            <a:spAutoFit/>
+          </a:bodyPr>
+          <a:lstStyle/>
+          <a:p>
+            <a:pPr algn="ctr"/>
+            <a:r>
+              <a:rPr sz="1000" b="0" i="0">
+                <a:solidFill>
+                  <a:srgbClr val="60A5FA"/>
+                </a:solidFill>
+              </a:rPr>
+              <a:t>My Server  Port 80</a:t>
+            </a:r>
+          </a:p>
+        </p:txBody>
+      </p:sp>
+      <p:sp>
+        <p:nvSpPr>
+          <p:cNvPr id="35" name="TextBox 34"/>
+          <p:cNvSpPr txBox="1"/>
+          <p:nvPr/>
+        </p:nvSpPr>
+        <p:spPr>
+          <a:xfrm>
+            <a:off x="3945636" y="4325112"/>
+            <a:ext cx="822960" cy="457200"/>
+          </a:xfrm>
+          <a:prstGeom prst="rect">
+            <a:avLst/>
+          </a:prstGeom>
+          <a:noFill/>
+        </p:spPr>
+        <p:txBody>
+          <a:bodyPr wrap="square">
+            <a:spAutoFit/>
+          </a:bodyPr>
+          <a:lstStyle/>
+          <a:p>
+            <a:pPr algn="ctr"/>
+            <a:r>
+              <a:rPr sz="900" b="0" i="0">
+                <a:solidFill>
+                  <a:srgbClr val="475569"/>
+                </a:solidFill>
+              </a:rPr>
+              <a:t>Port
+80</a:t>
+            </a:r>
+          </a:p>
+        </p:txBody>
+      </p:sp>
+      <p:sp>
+        <p:nvSpPr>
+          <p:cNvPr id="36" name="TextBox 35"/>
+          <p:cNvSpPr txBox="1"/>
+          <p:nvPr/>
+        </p:nvSpPr>
+        <p:spPr>
+          <a:xfrm>
+            <a:off x="3945636" y="4764024"/>
+            <a:ext cx="822960" cy="457200"/>
+          </a:xfrm>
+          <a:prstGeom prst="rect">
+            <a:avLst/>
+          </a:prstGeom>
+          <a:noFill/>
+        </p:spPr>
+        <p:txBody>
+          <a:bodyPr wrap="square">
+            <a:spAutoFit/>
+          </a:bodyPr>
+          <a:lstStyle/>
+          <a:p>
+            <a:pPr algn="ctr"/>
+            <a:r>
+              <a:rPr sz="2000" b="1" i="0">
+                <a:solidFill>
+                  <a:srgbClr val="475569"/>
+                </a:solidFill>
+              </a:rPr>
+              <a:t>◀────</a:t>
+            </a:r>
+          </a:p>
+        </p:txBody>
+      </p:sp>
+      <p:sp>
+        <p:nvSpPr>
+          <p:cNvPr id="37" name="Rectangle 36"/>
+          <p:cNvSpPr/>
+          <p:nvPr/>
+        </p:nvSpPr>
+        <p:spPr>
+          <a:xfrm>
+            <a:off x="4768596" y="4215384"/>
+            <a:ext cx="2651760" cy="1737360"/>
+          </a:xfrm>
+          <a:prstGeom prst="rect">
+            <a:avLst/>
+          </a:prstGeom>
+          <a:solidFill>
+            <a:srgbClr val="475569"/>
+          </a:solidFill>
+          <a:ln>
+            <a:noFill/>
+          </a:ln>
+        </p:spPr>
+        <p:style>
+          <a:lnRef idx="1">
+            <a:schemeClr val="accent1"/>
+          </a:lnRef>
+          <a:fillRef idx="3">
+            <a:schemeClr val="accent1"/>
+          </a:fillRef>
+          <a:effectRef idx="2">
+            <a:schemeClr val="accent1"/>
+          </a:effectRef>
+          <a:fontRef idx="minor">
+            <a:schemeClr val="lt1"/>
+          </a:fontRef>
+        </p:style>
+        <p:txBody>
+          <a:bodyPr rtlCol="0" anchor="ctr"/>
+          <a:lstStyle/>
+          <a:p>
+            <a:pPr algn="ctr"/>
+          </a:p>
+        </p:txBody>
+      </p:sp>
+      <p:sp>
+        <p:nvSpPr>
+          <p:cNvPr id="38" name="Rectangle 37"/>
+          <p:cNvSpPr/>
+          <p:nvPr/>
+        </p:nvSpPr>
+        <p:spPr>
+          <a:xfrm>
+            <a:off x="4768596" y="4215384"/>
+            <a:ext cx="2651760" cy="73152"/>
+          </a:xfrm>
+          <a:prstGeom prst="rect">
+            <a:avLst/>
+          </a:prstGeom>
+          <a:solidFill>
+            <a:srgbClr val="64748B"/>
+          </a:solidFill>
+          <a:ln>
+            <a:noFill/>
+          </a:ln>
+        </p:spPr>
+        <p:style>
+          <a:lnRef idx="1">
+            <a:schemeClr val="accent1"/>
+          </a:lnRef>
+          <a:fillRef idx="3">
+            <a:schemeClr val="accent1"/>
+          </a:fillRef>
+          <a:effectRef idx="2">
+            <a:schemeClr val="accent1"/>
+          </a:effectRef>
+          <a:fontRef idx="minor">
+            <a:schemeClr val="lt1"/>
+          </a:fontRef>
+        </p:style>
+        <p:txBody>
+          <a:bodyPr rtlCol="0" anchor="ctr"/>
+          <a:lstStyle/>
+          <a:p>
+            <a:pPr algn="ctr"/>
+          </a:p>
+        </p:txBody>
+      </p:sp>
+      <p:sp>
+        <p:nvSpPr>
+          <p:cNvPr id="39" name="TextBox 38"/>
+          <p:cNvSpPr txBox="1"/>
+          <p:nvPr/>
+        </p:nvSpPr>
+        <p:spPr>
+          <a:xfrm>
+            <a:off x="4768596" y="4306824"/>
+            <a:ext cx="2651760" cy="594360"/>
+          </a:xfrm>
+          <a:prstGeom prst="rect">
+            <a:avLst/>
+          </a:prstGeom>
+          <a:noFill/>
+        </p:spPr>
+        <p:txBody>
+          <a:bodyPr wrap="square">
+            <a:spAutoFit/>
+          </a:bodyPr>
+          <a:lstStyle/>
+          <a:p>
+            <a:pPr algn="ctr"/>
+            <a:r>
+              <a:rPr sz="2600" b="0" i="0">
+                <a:solidFill>
+                  <a:srgbClr val="FFFFFF"/>
+                </a:solidFill>
+              </a:rPr>
+              <a:t>🛡️</a:t>
+            </a:r>
+          </a:p>
+        </p:txBody>
+      </p:sp>
+      <p:sp>
+        <p:nvSpPr>
+          <p:cNvPr id="40" name="TextBox 39"/>
+          <p:cNvSpPr txBox="1"/>
+          <p:nvPr/>
+        </p:nvSpPr>
+        <p:spPr>
+          <a:xfrm>
+            <a:off x="4768596" y="4882896"/>
+            <a:ext cx="2651760" cy="365760"/>
+          </a:xfrm>
+          <a:prstGeom prst="rect">
+            <a:avLst/>
+          </a:prstGeom>
+          <a:noFill/>
+        </p:spPr>
+        <p:txBody>
+          <a:bodyPr wrap="square">
+            <a:spAutoFit/>
+          </a:bodyPr>
+          <a:lstStyle/>
+          <a:p>
+            <a:pPr algn="ctr"/>
+            <a:r>
+              <a:rPr sz="1400" b="1" i="0">
+                <a:solidFill>
+                  <a:srgbClr val="FFFFFF"/>
+                </a:solidFill>
+              </a:rPr>
+              <a:t>방화벽</a:t>
+            </a:r>
+          </a:p>
+        </p:txBody>
+      </p:sp>
+      <p:sp>
+        <p:nvSpPr>
+          <p:cNvPr id="41" name="TextBox 40"/>
+          <p:cNvSpPr txBox="1"/>
+          <p:nvPr/>
+        </p:nvSpPr>
+        <p:spPr>
+          <a:xfrm>
+            <a:off x="4768596" y="5294376"/>
+            <a:ext cx="2651760" cy="292608"/>
+          </a:xfrm>
+          <a:prstGeom prst="rect">
+            <a:avLst/>
+          </a:prstGeom>
+          <a:noFill/>
+        </p:spPr>
+        <p:txBody>
+          <a:bodyPr wrap="square">
+            <a:spAutoFit/>
+          </a:bodyPr>
+          <a:lstStyle/>
+          <a:p>
+            <a:pPr algn="ctr"/>
+            <a:r>
+              <a:rPr sz="1000" b="0" i="0">
+                <a:solidFill>
+                  <a:srgbClr val="CBD5E1"/>
+                </a:solidFill>
+              </a:rPr>
+              <a:t>Firewall</a:t>
+            </a:r>
+          </a:p>
+        </p:txBody>
+      </p:sp>
+      <p:sp>
+        <p:nvSpPr>
+          <p:cNvPr id="42" name="TextBox 41"/>
+          <p:cNvSpPr txBox="1"/>
+          <p:nvPr/>
+        </p:nvSpPr>
+        <p:spPr>
+          <a:xfrm>
+            <a:off x="7420356" y="4764024"/>
+            <a:ext cx="822960" cy="457200"/>
+          </a:xfrm>
+          <a:prstGeom prst="rect">
+            <a:avLst/>
+          </a:prstGeom>
+          <a:noFill/>
+        </p:spPr>
+        <p:txBody>
+          <a:bodyPr wrap="square">
+            <a:spAutoFit/>
+          </a:bodyPr>
+          <a:lstStyle/>
+          <a:p>
+            <a:pPr algn="ctr"/>
+            <a:r>
+              <a:rPr sz="2000" b="1" i="0">
+                <a:solidFill>
+                  <a:srgbClr val="475569"/>
+                </a:solidFill>
+              </a:rPr>
+              <a:t>◀────</a:t>
+            </a:r>
+          </a:p>
+        </p:txBody>
+      </p:sp>
+      <p:sp>
+        <p:nvSpPr>
+          <p:cNvPr id="43" name="Rectangle 42"/>
+          <p:cNvSpPr/>
+          <p:nvPr/>
+        </p:nvSpPr>
+        <p:spPr>
+          <a:xfrm>
+            <a:off x="8243316" y="4215384"/>
+            <a:ext cx="2651760" cy="1737360"/>
+          </a:xfrm>
+          <a:prstGeom prst="rect">
+            <a:avLst/>
+          </a:prstGeom>
+          <a:solidFill>
+            <a:srgbClr val="1E3A6E"/>
+          </a:solidFill>
+          <a:ln>
+            <a:noFill/>
+          </a:ln>
+        </p:spPr>
+        <p:style>
+          <a:lnRef idx="1">
+            <a:schemeClr val="accent1"/>
+          </a:lnRef>
+          <a:fillRef idx="3">
+            <a:schemeClr val="accent1"/>
+          </a:fillRef>
+          <a:effectRef idx="2">
+            <a:schemeClr val="accent1"/>
+          </a:effectRef>
+          <a:fontRef idx="minor">
+            <a:schemeClr val="lt1"/>
+          </a:fontRef>
+        </p:style>
+        <p:txBody>
+          <a:bodyPr rtlCol="0" anchor="ctr"/>
+          <a:lstStyle/>
+          <a:p>
+            <a:pPr algn="ctr"/>
+          </a:p>
+        </p:txBody>
+      </p:sp>
+      <p:sp>
+        <p:nvSpPr>
+          <p:cNvPr id="44" name="Rectangle 43"/>
+          <p:cNvSpPr/>
+          <p:nvPr/>
+        </p:nvSpPr>
+        <p:spPr>
+          <a:xfrm>
+            <a:off x="8243316" y="4215384"/>
+            <a:ext cx="2651760" cy="73152"/>
           </a:xfrm>
           <a:prstGeom prst="rect">
             <a:avLst/>
@@ -5788,20 +7132,123 @@
       </p:sp>
       <p:sp>
         <p:nvSpPr>
-          <p:cNvPr id="9" name="Rectangle 8"/>
+          <p:cNvPr id="45" name="TextBox 44"/>
+          <p:cNvSpPr txBox="1"/>
+          <p:nvPr/>
+        </p:nvSpPr>
+        <p:spPr>
+          <a:xfrm>
+            <a:off x="8243316" y="4306824"/>
+            <a:ext cx="2651760" cy="594360"/>
+          </a:xfrm>
+          <a:prstGeom prst="rect">
+            <a:avLst/>
+          </a:prstGeom>
+          <a:noFill/>
+        </p:spPr>
+        <p:txBody>
+          <a:bodyPr wrap="square">
+            <a:spAutoFit/>
+          </a:bodyPr>
+          <a:lstStyle/>
+          <a:p>
+            <a:pPr algn="ctr"/>
+            <a:r>
+              <a:rPr sz="2600" b="0" i="0">
+                <a:solidFill>
+                  <a:srgbClr val="FFFFFF"/>
+                </a:solidFill>
+              </a:rPr>
+              <a:t>📡</a:t>
+            </a:r>
+          </a:p>
+        </p:txBody>
+      </p:sp>
+      <p:sp>
+        <p:nvSpPr>
+          <p:cNvPr id="46" name="TextBox 45"/>
+          <p:cNvSpPr txBox="1"/>
+          <p:nvPr/>
+        </p:nvSpPr>
+        <p:spPr>
+          <a:xfrm>
+            <a:off x="8243316" y="4882896"/>
+            <a:ext cx="2651760" cy="365760"/>
+          </a:xfrm>
+          <a:prstGeom prst="rect">
+            <a:avLst/>
+          </a:prstGeom>
+          <a:noFill/>
+        </p:spPr>
+        <p:txBody>
+          <a:bodyPr wrap="square">
+            <a:spAutoFit/>
+          </a:bodyPr>
+          <a:lstStyle/>
+          <a:p>
+            <a:pPr algn="ctr"/>
+            <a:r>
+              <a:rPr sz="1300" b="1" i="0">
+                <a:solidFill>
+                  <a:srgbClr val="FFFFFF"/>
+                </a:solidFill>
+              </a:rPr>
+              <a:t>Knox 발신 서버</a:t>
+            </a:r>
+          </a:p>
+        </p:txBody>
+      </p:sp>
+      <p:sp>
+        <p:nvSpPr>
+          <p:cNvPr id="47" name="TextBox 46"/>
+          <p:cNvSpPr txBox="1"/>
+          <p:nvPr/>
+        </p:nvSpPr>
+        <p:spPr>
+          <a:xfrm>
+            <a:off x="8243316" y="5294376"/>
+            <a:ext cx="2651760" cy="566928"/>
+          </a:xfrm>
+          <a:prstGeom prst="rect">
+            <a:avLst/>
+          </a:prstGeom>
+          <a:noFill/>
+        </p:spPr>
+        <p:txBody>
+          <a:bodyPr wrap="square">
+            <a:spAutoFit/>
+          </a:bodyPr>
+          <a:lstStyle/>
+          <a:p>
+            <a:pPr algn="ctr"/>
+            <a:r>
+              <a:rPr sz="950" b="0" i="0">
+                <a:solidFill>
+                  <a:srgbClr val="60A5FA"/>
+                </a:solidFill>
+              </a:rPr>
+              <a:t>Webhook POST 전송
+메시지를 내 서버로 발신</a:t>
+            </a:r>
+          </a:p>
+        </p:txBody>
+      </p:sp>
+      <p:sp>
+        <p:nvSpPr>
+          <p:cNvPr id="48" name="Rectangle 47"/>
           <p:cNvSpPr/>
           <p:nvPr/>
         </p:nvSpPr>
         <p:spPr>
           <a:xfrm>
-            <a:off x="516636" y="1572768"/>
-            <a:ext cx="2743200" cy="91440"/>
+            <a:off x="1293876" y="6153912"/>
+            <a:ext cx="9601200" cy="475488"/>
           </a:xfrm>
           <a:prstGeom prst="rect">
             <a:avLst/>
           </a:prstGeom>
           <a:solidFill>
-            <a:srgbClr val="38BDF8"/>
+            <a:srgbClr val="E4E9F4"/>
           </a:solidFill>
           <a:ln>
             <a:noFill/>
@@ -5831,123 +7278,20 @@
       </p:sp>
       <p:sp>
         <p:nvSpPr>
-          <p:cNvPr id="10" name="TextBox 9"/>
-          <p:cNvSpPr txBox="1"/>
-          <p:nvPr/>
-        </p:nvSpPr>
-        <p:spPr>
-          <a:xfrm>
-            <a:off x="516636" y="1664208"/>
-            <a:ext cx="2743200" cy="640080"/>
-          </a:xfrm>
-          <a:prstGeom prst="rect">
-            <a:avLst/>
-          </a:prstGeom>
-          <a:noFill/>
-        </p:spPr>
-        <p:txBody>
-          <a:bodyPr wrap="square">
-            <a:spAutoFit/>
-          </a:bodyPr>
-          <a:lstStyle/>
-          <a:p>
-            <a:pPr algn="ctr"/>
-            <a:r>
-              <a:rPr sz="2800" b="0" i="0">
-                <a:solidFill>
-                  <a:srgbClr val="FFFFFF"/>
-                </a:solidFill>
-              </a:rPr>
-              <a:t>🖥️</a:t>
-            </a:r>
-          </a:p>
-        </p:txBody>
-      </p:sp>
-      <p:sp>
-        <p:nvSpPr>
-          <p:cNvPr id="11" name="TextBox 10"/>
-          <p:cNvSpPr txBox="1"/>
-          <p:nvPr/>
-        </p:nvSpPr>
-        <p:spPr>
-          <a:xfrm>
-            <a:off x="516636" y="2304288"/>
-            <a:ext cx="2743200" cy="411480"/>
-          </a:xfrm>
-          <a:prstGeom prst="rect">
-            <a:avLst/>
-          </a:prstGeom>
-          <a:noFill/>
-        </p:spPr>
-        <p:txBody>
-          <a:bodyPr wrap="square">
-            <a:spAutoFit/>
-          </a:bodyPr>
-          <a:lstStyle/>
-          <a:p>
-            <a:pPr algn="ctr"/>
-            <a:r>
-              <a:rPr sz="1400" b="1" i="0">
-                <a:solidFill>
-                  <a:srgbClr val="FFFFFF"/>
-                </a:solidFill>
-              </a:rPr>
-              <a:t>내 서버</a:t>
-            </a:r>
-          </a:p>
-        </p:txBody>
-      </p:sp>
-      <p:sp>
-        <p:nvSpPr>
-          <p:cNvPr id="12" name="TextBox 11"/>
-          <p:cNvSpPr txBox="1"/>
-          <p:nvPr/>
-        </p:nvSpPr>
-        <p:spPr>
-          <a:xfrm>
-            <a:off x="516636" y="2743200"/>
-            <a:ext cx="2743200" cy="594360"/>
-          </a:xfrm>
-          <a:prstGeom prst="rect">
-            <a:avLst/>
-          </a:prstGeom>
-          <a:noFill/>
-        </p:spPr>
-        <p:txBody>
-          <a:bodyPr wrap="square">
-            <a:spAutoFit/>
-          </a:bodyPr>
-          <a:lstStyle/>
-          <a:p>
-            <a:pPr algn="ctr"/>
-            <a:r>
-              <a:rPr sz="1000" b="0" i="0">
-                <a:solidFill>
-                  <a:srgbClr val="60A5FA"/>
-                </a:solidFill>
-              </a:rPr>
-              <a:t>My Server
-Port 80</a:t>
-            </a:r>
-          </a:p>
-        </p:txBody>
-      </p:sp>
-      <p:sp>
-        <p:nvSpPr>
-          <p:cNvPr id="13" name="Rectangle 12"/>
+          <p:cNvPr id="49" name="Rectangle 48"/>
           <p:cNvSpPr/>
           <p:nvPr/>
         </p:nvSpPr>
         <p:spPr>
           <a:xfrm>
-            <a:off x="4722876" y="1572768"/>
-            <a:ext cx="2743200" cy="1828800"/>
+            <a:off x="1293876" y="6153912"/>
+            <a:ext cx="54864" cy="475488"/>
           </a:xfrm>
           <a:prstGeom prst="rect">
             <a:avLst/>
           </a:prstGeom>
           <a:solidFill>
-            <a:srgbClr val="EF4444"/>
+            <a:srgbClr val="0F172A"/>
           </a:solidFill>
           <a:ln>
             <a:noFill/>
@@ -5977,639 +7321,14 @@
       </p:sp>
       <p:sp>
         <p:nvSpPr>
-          <p:cNvPr id="14" name="Rectangle 13"/>
-          <p:cNvSpPr/>
-          <p:nvPr/>
-        </p:nvSpPr>
-        <p:spPr>
-          <a:xfrm>
-            <a:off x="4722876" y="1572768"/>
-            <a:ext cx="2743200" cy="91440"/>
-          </a:xfrm>
-          <a:prstGeom prst="rect">
-            <a:avLst/>
-          </a:prstGeom>
-          <a:solidFill>
-            <a:srgbClr val="EF4444"/>
-          </a:solidFill>
-          <a:ln>
-            <a:noFill/>
-          </a:ln>
-        </p:spPr>
-        <p:style>
-          <a:lnRef idx="1">
-            <a:schemeClr val="accent1"/>
-          </a:lnRef>
-          <a:fillRef idx="3">
-            <a:schemeClr val="accent1"/>
-          </a:fillRef>
-          <a:effectRef idx="2">
-            <a:schemeClr val="accent1"/>
-          </a:effectRef>
-          <a:fontRef idx="minor">
-            <a:schemeClr val="lt1"/>
-          </a:fontRef>
-        </p:style>
-        <p:txBody>
-          <a:bodyPr rtlCol="0" anchor="ctr"/>
-          <a:lstStyle/>
-          <a:p>
-            <a:pPr algn="ctr"/>
-          </a:p>
-        </p:txBody>
-      </p:sp>
-      <p:sp>
-        <p:nvSpPr>
-          <p:cNvPr id="15" name="TextBox 14"/>
-          <p:cNvSpPr txBox="1"/>
-          <p:nvPr/>
-        </p:nvSpPr>
-        <p:spPr>
-          <a:xfrm>
-            <a:off x="4722876" y="1664208"/>
-            <a:ext cx="2743200" cy="640080"/>
-          </a:xfrm>
-          <a:prstGeom prst="rect">
-            <a:avLst/>
-          </a:prstGeom>
-          <a:noFill/>
-        </p:spPr>
-        <p:txBody>
-          <a:bodyPr wrap="square">
-            <a:spAutoFit/>
-          </a:bodyPr>
-          <a:lstStyle/>
-          <a:p>
-            <a:pPr algn="ctr"/>
-            <a:r>
-              <a:rPr sz="2800" b="0" i="0">
-                <a:solidFill>
-                  <a:srgbClr val="FFFFFF"/>
-                </a:solidFill>
-              </a:rPr>
-              <a:t>🔥</a:t>
-            </a:r>
-          </a:p>
-        </p:txBody>
-      </p:sp>
-      <p:sp>
-        <p:nvSpPr>
-          <p:cNvPr id="16" name="TextBox 15"/>
-          <p:cNvSpPr txBox="1"/>
-          <p:nvPr/>
-        </p:nvSpPr>
-        <p:spPr>
-          <a:xfrm>
-            <a:off x="4722876" y="2304288"/>
-            <a:ext cx="2743200" cy="411480"/>
-          </a:xfrm>
-          <a:prstGeom prst="rect">
-            <a:avLst/>
-          </a:prstGeom>
-          <a:noFill/>
-        </p:spPr>
-        <p:txBody>
-          <a:bodyPr wrap="square">
-            <a:spAutoFit/>
-          </a:bodyPr>
-          <a:lstStyle/>
-          <a:p>
-            <a:pPr algn="ctr"/>
-            <a:r>
-              <a:rPr sz="1400" b="1" i="0">
-                <a:solidFill>
-                  <a:srgbClr val="FFFFFF"/>
-                </a:solidFill>
-              </a:rPr>
-              <a:t>방화벽</a:t>
-            </a:r>
-          </a:p>
-        </p:txBody>
-      </p:sp>
-      <p:sp>
-        <p:nvSpPr>
-          <p:cNvPr id="17" name="TextBox 16"/>
-          <p:cNvSpPr txBox="1"/>
-          <p:nvPr/>
-        </p:nvSpPr>
-        <p:spPr>
-          <a:xfrm>
-            <a:off x="4722876" y="2743200"/>
-            <a:ext cx="2743200" cy="594360"/>
-          </a:xfrm>
-          <a:prstGeom prst="rect">
-            <a:avLst/>
-          </a:prstGeom>
-          <a:noFill/>
-        </p:spPr>
-        <p:txBody>
-          <a:bodyPr wrap="square">
-            <a:spAutoFit/>
-          </a:bodyPr>
-          <a:lstStyle/>
-          <a:p>
-            <a:pPr algn="ctr"/>
-            <a:r>
-              <a:rPr sz="1000" b="0" i="0">
-                <a:solidFill>
-                  <a:srgbClr val="FFFFFF"/>
-                </a:solidFill>
-              </a:rPr>
-              <a:t>Firewall
-개방 필요</a:t>
-            </a:r>
-          </a:p>
-        </p:txBody>
-      </p:sp>
-      <p:sp>
-        <p:nvSpPr>
-          <p:cNvPr id="18" name="Rectangle 17"/>
-          <p:cNvSpPr/>
-          <p:nvPr/>
-        </p:nvSpPr>
-        <p:spPr>
-          <a:xfrm>
-            <a:off x="8929116" y="1572768"/>
-            <a:ext cx="2743200" cy="1828800"/>
-          </a:xfrm>
-          <a:prstGeom prst="rect">
-            <a:avLst/>
-          </a:prstGeom>
-          <a:solidFill>
-            <a:srgbClr val="1E3A6E"/>
-          </a:solidFill>
-          <a:ln>
-            <a:noFill/>
-          </a:ln>
-        </p:spPr>
-        <p:style>
-          <a:lnRef idx="1">
-            <a:schemeClr val="accent1"/>
-          </a:lnRef>
-          <a:fillRef idx="3">
-            <a:schemeClr val="accent1"/>
-          </a:fillRef>
-          <a:effectRef idx="2">
-            <a:schemeClr val="accent1"/>
-          </a:effectRef>
-          <a:fontRef idx="minor">
-            <a:schemeClr val="lt1"/>
-          </a:fontRef>
-        </p:style>
-        <p:txBody>
-          <a:bodyPr rtlCol="0" anchor="ctr"/>
-          <a:lstStyle/>
-          <a:p>
-            <a:pPr algn="ctr"/>
-          </a:p>
-        </p:txBody>
-      </p:sp>
-      <p:sp>
-        <p:nvSpPr>
-          <p:cNvPr id="19" name="Rectangle 18"/>
-          <p:cNvSpPr/>
-          <p:nvPr/>
-        </p:nvSpPr>
-        <p:spPr>
-          <a:xfrm>
-            <a:off x="8929116" y="1572768"/>
-            <a:ext cx="2743200" cy="91440"/>
-          </a:xfrm>
-          <a:prstGeom prst="rect">
-            <a:avLst/>
-          </a:prstGeom>
-          <a:solidFill>
-            <a:srgbClr val="38BDF8"/>
-          </a:solidFill>
-          <a:ln>
-            <a:noFill/>
-          </a:ln>
-        </p:spPr>
-        <p:style>
-          <a:lnRef idx="1">
-            <a:schemeClr val="accent1"/>
-          </a:lnRef>
-          <a:fillRef idx="3">
-            <a:schemeClr val="accent1"/>
-          </a:fillRef>
-          <a:effectRef idx="2">
-            <a:schemeClr val="accent1"/>
-          </a:effectRef>
-          <a:fontRef idx="minor">
-            <a:schemeClr val="lt1"/>
-          </a:fontRef>
-        </p:style>
-        <p:txBody>
-          <a:bodyPr rtlCol="0" anchor="ctr"/>
-          <a:lstStyle/>
-          <a:p>
-            <a:pPr algn="ctr"/>
-          </a:p>
-        </p:txBody>
-      </p:sp>
-      <p:sp>
-        <p:nvSpPr>
-          <p:cNvPr id="20" name="TextBox 19"/>
-          <p:cNvSpPr txBox="1"/>
-          <p:nvPr/>
-        </p:nvSpPr>
-        <p:spPr>
-          <a:xfrm>
-            <a:off x="8929116" y="1664208"/>
-            <a:ext cx="2743200" cy="640080"/>
-          </a:xfrm>
-          <a:prstGeom prst="rect">
-            <a:avLst/>
-          </a:prstGeom>
-          <a:noFill/>
-        </p:spPr>
-        <p:txBody>
-          <a:bodyPr wrap="square">
-            <a:spAutoFit/>
-          </a:bodyPr>
-          <a:lstStyle/>
-          <a:p>
-            <a:pPr algn="ctr"/>
-            <a:r>
-              <a:rPr sz="2800" b="0" i="0">
-                <a:solidFill>
-                  <a:srgbClr val="FFFFFF"/>
-                </a:solidFill>
-              </a:rPr>
-              <a:t>📡</a:t>
-            </a:r>
-          </a:p>
-        </p:txBody>
-      </p:sp>
-      <p:sp>
-        <p:nvSpPr>
-          <p:cNvPr id="21" name="TextBox 20"/>
-          <p:cNvSpPr txBox="1"/>
-          <p:nvPr/>
-        </p:nvSpPr>
-        <p:spPr>
-          <a:xfrm>
-            <a:off x="8929116" y="2304288"/>
-            <a:ext cx="2743200" cy="411480"/>
-          </a:xfrm>
-          <a:prstGeom prst="rect">
-            <a:avLst/>
-          </a:prstGeom>
-          <a:noFill/>
-        </p:spPr>
-        <p:txBody>
-          <a:bodyPr wrap="square">
-            <a:spAutoFit/>
-          </a:bodyPr>
-          <a:lstStyle/>
-          <a:p>
-            <a:pPr algn="ctr"/>
-            <a:r>
-              <a:rPr sz="1400" b="1" i="0">
-                <a:solidFill>
-                  <a:srgbClr val="FFFFFF"/>
-                </a:solidFill>
-              </a:rPr>
-              <a:t>Knox 서버</a:t>
-            </a:r>
-          </a:p>
-        </p:txBody>
-      </p:sp>
-      <p:sp>
-        <p:nvSpPr>
-          <p:cNvPr id="22" name="TextBox 21"/>
-          <p:cNvSpPr txBox="1"/>
-          <p:nvPr/>
-        </p:nvSpPr>
-        <p:spPr>
-          <a:xfrm>
-            <a:off x="8929116" y="2743200"/>
-            <a:ext cx="2743200" cy="594360"/>
-          </a:xfrm>
-          <a:prstGeom prst="rect">
-            <a:avLst/>
-          </a:prstGeom>
-          <a:noFill/>
-        </p:spPr>
-        <p:txBody>
-          <a:bodyPr wrap="square">
-            <a:spAutoFit/>
-          </a:bodyPr>
-          <a:lstStyle/>
-          <a:p>
-            <a:pPr algn="ctr"/>
-            <a:r>
-              <a:rPr sz="1000" b="0" i="0">
-                <a:solidFill>
-                  <a:srgbClr val="60A5FA"/>
-                </a:solidFill>
-              </a:rPr>
-              <a:t>openapi.samsung.net
-(Stage / Production)</a:t>
-            </a:r>
-          </a:p>
-        </p:txBody>
-      </p:sp>
-      <p:sp>
-        <p:nvSpPr>
-          <p:cNvPr id="23" name="TextBox 22"/>
-          <p:cNvSpPr txBox="1"/>
-          <p:nvPr/>
-        </p:nvSpPr>
-        <p:spPr>
-          <a:xfrm>
-            <a:off x="3259836" y="1847088"/>
-            <a:ext cx="1463040" cy="457200"/>
-          </a:xfrm>
-          <a:prstGeom prst="rect">
-            <a:avLst/>
-          </a:prstGeom>
-          <a:noFill/>
-        </p:spPr>
-        <p:txBody>
-          <a:bodyPr wrap="square">
-            <a:spAutoFit/>
-          </a:bodyPr>
-          <a:lstStyle/>
-          <a:p>
-            <a:pPr algn="ctr"/>
-            <a:r>
-              <a:rPr sz="1800" b="1" i="0">
-                <a:solidFill>
-                  <a:srgbClr val="10B981"/>
-                </a:solidFill>
-              </a:rPr>
-              <a:t>─────▶</a:t>
-            </a:r>
-          </a:p>
-        </p:txBody>
-      </p:sp>
-      <p:sp>
-        <p:nvSpPr>
-          <p:cNvPr id="24" name="TextBox 23"/>
-          <p:cNvSpPr txBox="1"/>
-          <p:nvPr/>
-        </p:nvSpPr>
-        <p:spPr>
-          <a:xfrm>
-            <a:off x="7466076" y="1847088"/>
-            <a:ext cx="1463040" cy="457200"/>
-          </a:xfrm>
-          <a:prstGeom prst="rect">
-            <a:avLst/>
-          </a:prstGeom>
-          <a:noFill/>
-        </p:spPr>
-        <p:txBody>
-          <a:bodyPr wrap="square">
-            <a:spAutoFit/>
-          </a:bodyPr>
-          <a:lstStyle/>
-          <a:p>
-            <a:pPr algn="ctr"/>
-            <a:r>
-              <a:rPr sz="1800" b="1" i="0">
-                <a:solidFill>
-                  <a:srgbClr val="10B981"/>
-                </a:solidFill>
-              </a:rPr>
-              <a:t>─────▶</a:t>
-            </a:r>
-          </a:p>
-        </p:txBody>
-      </p:sp>
-      <p:sp>
-        <p:nvSpPr>
-          <p:cNvPr id="25" name="TextBox 24"/>
-          <p:cNvSpPr txBox="1"/>
-          <p:nvPr/>
-        </p:nvSpPr>
-        <p:spPr>
-          <a:xfrm>
-            <a:off x="3259836" y="1527048"/>
-            <a:ext cx="5669280" cy="347472"/>
-          </a:xfrm>
-          <a:prstGeom prst="rect">
-            <a:avLst/>
-          </a:prstGeom>
-          <a:noFill/>
-        </p:spPr>
-        <p:txBody>
-          <a:bodyPr wrap="square">
-            <a:spAutoFit/>
-          </a:bodyPr>
-          <a:lstStyle/>
-          <a:p>
-            <a:pPr algn="ctr"/>
-            <a:r>
-              <a:rPr sz="1100" b="1" i="0">
-                <a:solidFill>
-                  <a:srgbClr val="10B981"/>
-                </a:solidFill>
-              </a:rPr>
-              <a:t>발신 (Outbound)  Port 80/443</a:t>
-            </a:r>
-          </a:p>
-        </p:txBody>
-      </p:sp>
-      <p:sp>
-        <p:nvSpPr>
-          <p:cNvPr id="26" name="TextBox 25"/>
-          <p:cNvSpPr txBox="1"/>
-          <p:nvPr/>
-        </p:nvSpPr>
-        <p:spPr>
-          <a:xfrm>
-            <a:off x="3259836" y="2898648"/>
-            <a:ext cx="1463040" cy="457200"/>
-          </a:xfrm>
-          <a:prstGeom prst="rect">
-            <a:avLst/>
-          </a:prstGeom>
-          <a:noFill/>
-        </p:spPr>
-        <p:txBody>
-          <a:bodyPr wrap="square">
-            <a:spAutoFit/>
-          </a:bodyPr>
-          <a:lstStyle/>
-          <a:p>
-            <a:pPr algn="ctr"/>
-            <a:r>
-              <a:rPr sz="1800" b="1" i="0">
-                <a:solidFill>
-                  <a:srgbClr val="EF4444"/>
-                </a:solidFill>
-              </a:rPr>
-              <a:t>◀─────</a:t>
-            </a:r>
-          </a:p>
-        </p:txBody>
-      </p:sp>
-      <p:sp>
-        <p:nvSpPr>
-          <p:cNvPr id="27" name="TextBox 26"/>
-          <p:cNvSpPr txBox="1"/>
-          <p:nvPr/>
-        </p:nvSpPr>
-        <p:spPr>
-          <a:xfrm>
-            <a:off x="7466076" y="2898648"/>
-            <a:ext cx="1463040" cy="457200"/>
-          </a:xfrm>
-          <a:prstGeom prst="rect">
-            <a:avLst/>
-          </a:prstGeom>
-          <a:noFill/>
-        </p:spPr>
-        <p:txBody>
-          <a:bodyPr wrap="square">
-            <a:spAutoFit/>
-          </a:bodyPr>
-          <a:lstStyle/>
-          <a:p>
-            <a:pPr algn="ctr"/>
-            <a:r>
-              <a:rPr sz="1800" b="1" i="0">
-                <a:solidFill>
-                  <a:srgbClr val="EF4444"/>
-                </a:solidFill>
-              </a:rPr>
-              <a:t>◀─────</a:t>
-            </a:r>
-          </a:p>
-        </p:txBody>
-      </p:sp>
-      <p:sp>
-        <p:nvSpPr>
-          <p:cNvPr id="28" name="TextBox 27"/>
-          <p:cNvSpPr txBox="1"/>
-          <p:nvPr/>
-        </p:nvSpPr>
-        <p:spPr>
-          <a:xfrm>
-            <a:off x="3259836" y="3264408"/>
-            <a:ext cx="5669280" cy="347472"/>
-          </a:xfrm>
-          <a:prstGeom prst="rect">
-            <a:avLst/>
-          </a:prstGeom>
-          <a:noFill/>
-        </p:spPr>
-        <p:txBody>
-          <a:bodyPr wrap="square">
-            <a:spAutoFit/>
-          </a:bodyPr>
-          <a:lstStyle/>
-          <a:p>
-            <a:pPr algn="ctr"/>
-            <a:r>
-              <a:rPr sz="1100" b="1" i="0">
-                <a:solidFill>
-                  <a:srgbClr val="EF4444"/>
-                </a:solidFill>
-              </a:rPr>
-              <a:t>수신 (Inbound)  Port 80  ← 반드시 허용!</a:t>
-            </a:r>
-          </a:p>
-        </p:txBody>
-      </p:sp>
-      <p:sp>
-        <p:nvSpPr>
-          <p:cNvPr id="29" name="Rectangle 28"/>
-          <p:cNvSpPr/>
-          <p:nvPr/>
-        </p:nvSpPr>
-        <p:spPr>
-          <a:xfrm>
-            <a:off x="365760" y="4224528"/>
-            <a:ext cx="11457432" cy="1371600"/>
-          </a:xfrm>
-          <a:prstGeom prst="rect">
-            <a:avLst/>
-          </a:prstGeom>
-          <a:solidFill>
-            <a:srgbClr val="1E293B"/>
-          </a:solidFill>
-          <a:ln>
-            <a:noFill/>
-          </a:ln>
-        </p:spPr>
-        <p:style>
-          <a:lnRef idx="1">
-            <a:schemeClr val="accent1"/>
-          </a:lnRef>
-          <a:fillRef idx="3">
-            <a:schemeClr val="accent1"/>
-          </a:fillRef>
-          <a:effectRef idx="2">
-            <a:schemeClr val="accent1"/>
-          </a:effectRef>
-          <a:fontRef idx="minor">
-            <a:schemeClr val="lt1"/>
-          </a:fontRef>
-        </p:style>
-        <p:txBody>
-          <a:bodyPr rtlCol="0" anchor="ctr"/>
-          <a:lstStyle/>
-          <a:p>
-            <a:pPr algn="ctr"/>
-          </a:p>
-        </p:txBody>
-      </p:sp>
-      <p:sp>
-        <p:nvSpPr>
-          <p:cNvPr id="30" name="Rectangle 29"/>
-          <p:cNvSpPr/>
-          <p:nvPr/>
-        </p:nvSpPr>
-        <p:spPr>
-          <a:xfrm>
-            <a:off x="365760" y="4224528"/>
-            <a:ext cx="54864" cy="1371600"/>
-          </a:xfrm>
-          <a:prstGeom prst="rect">
-            <a:avLst/>
-          </a:prstGeom>
-          <a:solidFill>
-            <a:srgbClr val="EF4444"/>
-          </a:solidFill>
-          <a:ln>
-            <a:noFill/>
-          </a:ln>
-        </p:spPr>
-        <p:style>
-          <a:lnRef idx="1">
-            <a:schemeClr val="accent1"/>
-          </a:lnRef>
-          <a:fillRef idx="3">
-            <a:schemeClr val="accent1"/>
-          </a:fillRef>
-          <a:effectRef idx="2">
-            <a:schemeClr val="accent1"/>
-          </a:effectRef>
-          <a:fontRef idx="minor">
-            <a:schemeClr val="lt1"/>
-          </a:fontRef>
-        </p:style>
-        <p:txBody>
-          <a:bodyPr rtlCol="0" anchor="ctr"/>
-          <a:lstStyle/>
-          <a:p>
-            <a:pPr algn="ctr"/>
-          </a:p>
-        </p:txBody>
-      </p:sp>
-      <p:sp>
-        <p:nvSpPr>
-          <p:cNvPr id="31" name="TextBox 30"/>
-          <p:cNvSpPr txBox="1"/>
-          <p:nvPr/>
-        </p:nvSpPr>
-        <p:spPr>
-          <a:xfrm>
-            <a:off x="594360" y="4297680"/>
-            <a:ext cx="11091672" cy="457200"/>
+          <p:cNvPr id="50" name="TextBox 49"/>
+          <p:cNvSpPr txBox="1"/>
+          <p:nvPr/>
+        </p:nvSpPr>
+        <p:spPr>
+          <a:xfrm>
+            <a:off x="1385316" y="6208776"/>
+            <a:ext cx="9418320" cy="384048"/>
           </a:xfrm>
           <a:prstGeom prst="rect">
             <a:avLst/>
@@ -6624,80 +7343,12 @@
           <a:p>
             <a:pPr algn="l"/>
             <a:r>
-              <a:rPr sz="1400" b="1" i="0">
-                <a:solidFill>
-                  <a:srgbClr val="FFFFFF"/>
-                </a:solidFill>
-              </a:rPr>
-              <a:t>Knox 서버(외부)  →  방화벽  →  내 서버 Port 80  으로 인바운드 HTTP 요청이 들어옵니다</a:t>
-            </a:r>
-          </a:p>
-        </p:txBody>
-      </p:sp>
-      <p:sp>
-        <p:nvSpPr>
-          <p:cNvPr id="32" name="TextBox 31"/>
-          <p:cNvSpPr txBox="1"/>
-          <p:nvPr/>
-        </p:nvSpPr>
-        <p:spPr>
-          <a:xfrm>
-            <a:off x="594360" y="4754880"/>
-            <a:ext cx="11091672" cy="347472"/>
-          </a:xfrm>
-          <a:prstGeom prst="rect">
-            <a:avLst/>
-          </a:prstGeom>
-          <a:noFill/>
-        </p:spPr>
-        <p:txBody>
-          <a:bodyPr wrap="square">
-            <a:spAutoFit/>
-          </a:bodyPr>
-          <a:lstStyle/>
-          <a:p>
-            <a:pPr algn="l"/>
-            <a:r>
-              <a:rPr sz="1200" b="0" i="0">
-                <a:solidFill>
-                  <a:srgbClr val="60A5FA"/>
-                </a:solidFill>
-              </a:rPr>
-              <a:t>수신(Inbound) 정책:  Knox 서버 출발지 IP  →  내 서버 IP  Port 80  허용</a:t>
-            </a:r>
-          </a:p>
-        </p:txBody>
-      </p:sp>
-      <p:sp>
-        <p:nvSpPr>
-          <p:cNvPr id="33" name="TextBox 32"/>
-          <p:cNvSpPr txBox="1"/>
-          <p:nvPr/>
-        </p:nvSpPr>
-        <p:spPr>
-          <a:xfrm>
-            <a:off x="594360" y="5120640"/>
-            <a:ext cx="11091672" cy="347472"/>
-          </a:xfrm>
-          <a:prstGeom prst="rect">
-            <a:avLst/>
-          </a:prstGeom>
-          <a:noFill/>
-        </p:spPr>
-        <p:txBody>
-          <a:bodyPr wrap="square">
-            <a:spAutoFit/>
-          </a:bodyPr>
-          <a:lstStyle/>
-          <a:p>
-            <a:pPr algn="l"/>
-            <a:r>
-              <a:rPr sz="1200" b="0" i="0">
-                <a:solidFill>
-                  <a:srgbClr val="10B981"/>
-                </a:solidFill>
-              </a:rPr>
-              <a:t>발신(Outbound) 정책:  내 서버 IP  →  openapi.samsung.net  Port 80, 443  허용</a:t>
+              <a:rPr sz="1100" b="0" i="0">
+                <a:solidFill>
+                  <a:srgbClr val="0F172A"/>
+                </a:solidFill>
+              </a:rPr>
+              <a:t>  💡  Knox 서버 IP는 방향(수신/발신)과 환경(스테이지/운영)에 따라 다릅니다 — 다음 슬라이드에서 상세 확인</a:t>
             </a:r>
           </a:p>
         </p:txBody>
@@ -6735,6 +7386,49 @@
             <a:avLst/>
           </a:prstGeom>
           <a:solidFill>
+            <a:srgbClr val="F8F9FC"/>
+          </a:solidFill>
+          <a:ln>
+            <a:noFill/>
+          </a:ln>
+        </p:spPr>
+        <p:style>
+          <a:lnRef idx="1">
+            <a:schemeClr val="accent1"/>
+          </a:lnRef>
+          <a:fillRef idx="3">
+            <a:schemeClr val="accent1"/>
+          </a:fillRef>
+          <a:effectRef idx="2">
+            <a:schemeClr val="accent1"/>
+          </a:effectRef>
+          <a:fontRef idx="minor">
+            <a:schemeClr val="lt1"/>
+          </a:fontRef>
+        </p:style>
+        <p:txBody>
+          <a:bodyPr rtlCol="0" anchor="ctr"/>
+          <a:lstStyle/>
+          <a:p>
+            <a:pPr algn="ctr"/>
+          </a:p>
+        </p:txBody>
+      </p:sp>
+      <p:sp>
+        <p:nvSpPr>
+          <p:cNvPr id="3" name="Rectangle 2"/>
+          <p:cNvSpPr/>
+          <p:nvPr/>
+        </p:nvSpPr>
+        <p:spPr>
+          <a:xfrm>
+            <a:off x="0" y="0"/>
+            <a:ext cx="12188952" cy="91440"/>
+          </a:xfrm>
+          <a:prstGeom prst="rect">
+            <a:avLst/>
+          </a:prstGeom>
+          <a:solidFill>
             <a:srgbClr val="0F172A"/>
           </a:solidFill>
           <a:ln>
@@ -6765,49 +7459,6 @@
       </p:sp>
       <p:sp>
         <p:nvSpPr>
-          <p:cNvPr id="3" name="Rectangle 2"/>
-          <p:cNvSpPr/>
-          <p:nvPr/>
-        </p:nvSpPr>
-        <p:spPr>
-          <a:xfrm>
-            <a:off x="0" y="0"/>
-            <a:ext cx="12188952" cy="91440"/>
-          </a:xfrm>
-          <a:prstGeom prst="rect">
-            <a:avLst/>
-          </a:prstGeom>
-          <a:solidFill>
-            <a:srgbClr val="38BDF8"/>
-          </a:solidFill>
-          <a:ln>
-            <a:noFill/>
-          </a:ln>
-        </p:spPr>
-        <p:style>
-          <a:lnRef idx="1">
-            <a:schemeClr val="accent1"/>
-          </a:lnRef>
-          <a:fillRef idx="3">
-            <a:schemeClr val="accent1"/>
-          </a:fillRef>
-          <a:effectRef idx="2">
-            <a:schemeClr val="accent1"/>
-          </a:effectRef>
-          <a:fontRef idx="minor">
-            <a:schemeClr val="lt1"/>
-          </a:fontRef>
-        </p:style>
-        <p:txBody>
-          <a:bodyPr rtlCol="0" anchor="ctr"/>
-          <a:lstStyle/>
-          <a:p>
-            <a:pPr algn="ctr"/>
-          </a:p>
-        </p:txBody>
-      </p:sp>
-      <p:sp>
-        <p:nvSpPr>
           <p:cNvPr id="4" name="TextBox 3"/>
           <p:cNvSpPr txBox="1"/>
           <p:nvPr/>
@@ -6832,7 +7483,7 @@
             <a:r>
               <a:rPr sz="1200" b="1" i="0">
                 <a:solidFill>
-                  <a:srgbClr val="38BDF8"/>
+                  <a:srgbClr val="2D5A9E"/>
                 </a:solidFill>
               </a:rPr>
               <a:t>STEP 02</a:t>
@@ -6849,7 +7500,7 @@
         <p:spPr>
           <a:xfrm>
             <a:off x="457200" y="502920"/>
-            <a:ext cx="10972800" cy="685800"/>
+            <a:ext cx="10972800" cy="640080"/>
           </a:xfrm>
           <a:prstGeom prst="rect">
             <a:avLst/>
@@ -6866,7 +7517,7 @@
             <a:r>
               <a:rPr sz="2600" b="1" i="0">
                 <a:solidFill>
-                  <a:srgbClr val="FFFFFF"/>
+                  <a:srgbClr val="0F172A"/>
                 </a:solidFill>
               </a:rPr>
               <a:t>방화벽 정책 상세</a:t>
@@ -6883,7 +7534,7 @@
         <p:spPr>
           <a:xfrm>
             <a:off x="457200" y="1078992"/>
-            <a:ext cx="10972800" cy="411480"/>
+            <a:ext cx="10972800" cy="384048"/>
           </a:xfrm>
           <a:prstGeom prst="rect">
             <a:avLst/>
@@ -6900,7 +7551,7 @@
             <a:r>
               <a:rPr sz="1300" b="0" i="1">
                 <a:solidFill>
-                  <a:srgbClr val="60A5FA"/>
+                  <a:srgbClr val="475569"/>
                 </a:solidFill>
               </a:rPr>
               <a:t>스테이지(개발)와 운영 서버의 IP/포트 정보를 방화벽 담당자에게 전달합니다</a:t>
@@ -6916,14 +7567,14 @@
         </p:nvSpPr>
         <p:spPr>
           <a:xfrm>
-            <a:off x="365760" y="1371600"/>
+            <a:off x="365760" y="1417320"/>
             <a:ext cx="11457432" cy="19050"/>
           </a:xfrm>
           <a:prstGeom prst="rect">
             <a:avLst/>
           </a:prstGeom>
           <a:solidFill>
-            <a:srgbClr val="38BDF8"/>
+            <a:srgbClr val="0F172A"/>
           </a:solidFill>
           <a:ln>
             <a:noFill/>
@@ -7043,7 +7694,7 @@
             <a:avLst/>
           </a:prstGeom>
           <a:solidFill>
-            <a:srgbClr val="063A20"/>
+            <a:srgbClr val="1A422E"/>
           </a:solidFill>
           <a:ln>
             <a:noFill/>
@@ -7097,10 +7748,10 @@
             <a:r>
               <a:rPr sz="1100" b="1" i="0">
                 <a:solidFill>
-                  <a:srgbClr val="10B981"/>
-                </a:solidFill>
-              </a:rPr>
-              <a:t>  발신 (Outbound) — 내 서버  →  Knox 서버</a:t>
+                  <a:srgbClr val="86EFAC"/>
+                </a:solidFill>
+              </a:rPr>
+              <a:t>  ▲  발신 (Outbound) — 내 서버  →  Knox 수신 서버</a:t>
             </a:r>
           </a:p>
         </p:txBody>
@@ -7564,7 +8215,7 @@
             <a:avLst/>
           </a:prstGeom>
           <a:solidFill>
-            <a:srgbClr val="4A0E0E"/>
+            <a:srgbClr val="475569"/>
           </a:solidFill>
           <a:ln>
             <a:noFill/>
@@ -7618,10 +8269,10 @@
             <a:r>
               <a:rPr sz="1100" b="1" i="0">
                 <a:solidFill>
-                  <a:srgbClr val="EF4444"/>
-                </a:solidFill>
-              </a:rPr>
-              <a:t>  수신 (Inbound) — Knox 서버  →  내 서버  ⚠ 반드시 허용</a:t>
+                  <a:srgbClr val="FFFFFF"/>
+                </a:solidFill>
+              </a:rPr>
+              <a:t>  ▼  수신 (Inbound) — Knox 발신 서버  →  내 서버  ⚠ 반드시 허용</a:t>
             </a:r>
           </a:p>
         </p:txBody>
@@ -7641,7 +8292,7 @@
             <a:avLst/>
           </a:prstGeom>
           <a:solidFill>
-            <a:srgbClr val="3A0C0C"/>
+            <a:srgbClr val="2A3244"/>
           </a:solidFill>
           <a:ln>
             <a:noFill/>
@@ -7695,7 +8346,7 @@
             <a:r>
               <a:rPr sz="1100" b="1" i="0">
                 <a:solidFill>
-                  <a:srgbClr val="EF4444"/>
+                  <a:srgbClr val="60A5FA"/>
                 </a:solidFill>
               </a:rPr>
               <a:t>출발지</a:t>
@@ -7732,7 +8383,7 @@
                   <a:srgbClr val="FFFFFF"/>
                 </a:solidFill>
               </a:rPr>
-              <a:t>112.106.197.162  (1개)</a:t>
+              <a:t>112.106.197.162  (발신 서버 1개)</a:t>
             </a:r>
           </a:p>
         </p:txBody>
@@ -7752,7 +8403,7 @@
             <a:avLst/>
           </a:prstGeom>
           <a:solidFill>
-            <a:srgbClr val="3A0C0C"/>
+            <a:srgbClr val="2A3244"/>
           </a:solidFill>
           <a:ln>
             <a:noFill/>
@@ -7806,7 +8457,7 @@
             <a:r>
               <a:rPr sz="1100" b="1" i="0">
                 <a:solidFill>
-                  <a:srgbClr val="EF4444"/>
+                  <a:srgbClr val="60A5FA"/>
                 </a:solidFill>
               </a:rPr>
               <a:t>목적지</a:t>
@@ -7863,7 +8514,7 @@
             <a:avLst/>
           </a:prstGeom>
           <a:solidFill>
-            <a:srgbClr val="3A0C0C"/>
+            <a:srgbClr val="2A3244"/>
           </a:solidFill>
           <a:ln>
             <a:noFill/>
@@ -7917,7 +8568,7 @@
             <a:r>
               <a:rPr sz="1100" b="1" i="0">
                 <a:solidFill>
-                  <a:srgbClr val="EF4444"/>
+                  <a:srgbClr val="60A5FA"/>
                 </a:solidFill>
               </a:rPr>
               <a:t>포트</a:t>
@@ -7974,7 +8625,7 @@
             <a:avLst/>
           </a:prstGeom>
           <a:solidFill>
-            <a:srgbClr val="5C3505"/>
+            <a:srgbClr val="1E3A6E"/>
           </a:solidFill>
           <a:ln>
             <a:noFill/>
@@ -8031,7 +8682,7 @@
                   <a:srgbClr val="FFFFFF"/>
                 </a:solidFill>
               </a:rPr>
-              <a:t>  🔶  운영 (실사용 서버)</a:t>
+              <a:t>  🔷  운영 (실사용 서버)</a:t>
             </a:r>
           </a:p>
         </p:txBody>
@@ -8051,7 +8702,7 @@
             <a:avLst/>
           </a:prstGeom>
           <a:solidFill>
-            <a:srgbClr val="063A20"/>
+            <a:srgbClr val="1A422E"/>
           </a:solidFill>
           <a:ln>
             <a:noFill/>
@@ -8105,10 +8756,10 @@
             <a:r>
               <a:rPr sz="1100" b="1" i="0">
                 <a:solidFill>
-                  <a:srgbClr val="10B981"/>
-                </a:solidFill>
-              </a:rPr>
-              <a:t>  발신 (Outbound) — 내 서버  →  Knox 서버</a:t>
+                  <a:srgbClr val="86EFAC"/>
+                </a:solidFill>
+              </a:rPr>
+              <a:t>  ▲  발신 (Outbound) — 내 서버  →  Knox 수신 서버</a:t>
             </a:r>
           </a:p>
         </p:txBody>
@@ -8572,7 +9223,7 @@
             <a:avLst/>
           </a:prstGeom>
           <a:solidFill>
-            <a:srgbClr val="4A0E0E"/>
+            <a:srgbClr val="475569"/>
           </a:solidFill>
           <a:ln>
             <a:noFill/>
@@ -8626,10 +9277,10 @@
             <a:r>
               <a:rPr sz="1100" b="1" i="0">
                 <a:solidFill>
-                  <a:srgbClr val="EF4444"/>
-                </a:solidFill>
-              </a:rPr>
-              <a:t>  수신 (Inbound) — Knox 서버  →  내 서버  ⚠ 반드시 허용</a:t>
+                  <a:srgbClr val="FFFFFF"/>
+                </a:solidFill>
+              </a:rPr>
+              <a:t>  ▼  수신 (Inbound) — Knox 발신 서버  →  내 서버  ⚠ 반드시 허용</a:t>
             </a:r>
           </a:p>
         </p:txBody>
@@ -8649,7 +9300,7 @@
             <a:avLst/>
           </a:prstGeom>
           <a:solidFill>
-            <a:srgbClr val="3A0C0C"/>
+            <a:srgbClr val="2A3244"/>
           </a:solidFill>
           <a:ln>
             <a:noFill/>
@@ -8703,7 +9354,7 @@
             <a:r>
               <a:rPr sz="1100" b="1" i="0">
                 <a:solidFill>
-                  <a:srgbClr val="EF4444"/>
+                  <a:srgbClr val="60A5FA"/>
                 </a:solidFill>
               </a:rPr>
               <a:t>출발지</a:t>
@@ -8742,7 +9393,7 @@
               </a:rPr>
               <a:t>182.195.35.14
 182.195.35.15
-182.195.35.16  (3개)</a:t>
+182.195.35.16  (발신 서버 3개)</a:t>
             </a:r>
           </a:p>
         </p:txBody>
@@ -8762,7 +9413,7 @@
             <a:avLst/>
           </a:prstGeom>
           <a:solidFill>
-            <a:srgbClr val="3A0C0C"/>
+            <a:srgbClr val="2A3244"/>
           </a:solidFill>
           <a:ln>
             <a:noFill/>
@@ -8816,7 +9467,7 @@
             <a:r>
               <a:rPr sz="1100" b="1" i="0">
                 <a:solidFill>
-                  <a:srgbClr val="EF4444"/>
+                  <a:srgbClr val="60A5FA"/>
                 </a:solidFill>
               </a:rPr>
               <a:t>목적지</a:t>
@@ -8873,7 +9524,7 @@
             <a:avLst/>
           </a:prstGeom>
           <a:solidFill>
-            <a:srgbClr val="3A0C0C"/>
+            <a:srgbClr val="2A3244"/>
           </a:solidFill>
           <a:ln>
             <a:noFill/>
@@ -8927,7 +9578,7 @@
             <a:r>
               <a:rPr sz="1100" b="1" i="0">
                 <a:solidFill>
-                  <a:srgbClr val="EF4444"/>
+                  <a:srgbClr val="60A5FA"/>
                 </a:solidFill>
               </a:rPr>
               <a:t>포트</a:t>

--- a/knox_chatbot_가이드.pptx
+++ b/knox_chatbot_가이드.pptx
@@ -13,6 +13,7 @@
     <p:sldId id="261" r:id="rId12"/>
     <p:sldId id="262" r:id="rId13"/>
     <p:sldId id="263" r:id="rId14"/>
+    <p:sldId id="264" r:id="rId15"/>
   </p:sldIdLst>
   <p:sldSz cx="12188952" cy="6858000" type="screen4x3"/>
   <p:notesSz cx="6858000" cy="9144000"/>
@@ -12092,6 +12093,1432 @@
 </file>
 
 <file path=ppt/slides/slide8.xml><?xml version="1.0" encoding="utf-8"?>
+<p:sld xmlns:a="http://schemas.openxmlformats.org/drawingml/2006/main" xmlns:p="http://schemas.openxmlformats.org/presentationml/2006/main" xmlns:r="http://schemas.openxmlformats.org/officeDocument/2006/relationships">
+  <p:cSld>
+    <p:spTree>
+      <p:nvGrpSpPr>
+        <p:cNvPr id="1" name=""/>
+        <p:cNvGrpSpPr/>
+        <p:nvPr/>
+      </p:nvGrpSpPr>
+      <p:grpSpPr/>
+      <p:sp>
+        <p:nvSpPr>
+          <p:cNvPr id="2" name="Rectangle 1"/>
+          <p:cNvSpPr/>
+          <p:nvPr/>
+        </p:nvSpPr>
+        <p:spPr>
+          <a:xfrm>
+            <a:off x="0" y="0"/>
+            <a:ext cx="12188952" cy="6858000"/>
+          </a:xfrm>
+          <a:prstGeom prst="rect">
+            <a:avLst/>
+          </a:prstGeom>
+          <a:solidFill>
+            <a:srgbClr val="0F172A"/>
+          </a:solidFill>
+          <a:ln>
+            <a:noFill/>
+          </a:ln>
+        </p:spPr>
+        <p:style>
+          <a:lnRef idx="1">
+            <a:schemeClr val="accent1"/>
+          </a:lnRef>
+          <a:fillRef idx="3">
+            <a:schemeClr val="accent1"/>
+          </a:fillRef>
+          <a:effectRef idx="2">
+            <a:schemeClr val="accent1"/>
+          </a:effectRef>
+          <a:fontRef idx="minor">
+            <a:schemeClr val="lt1"/>
+          </a:fontRef>
+        </p:style>
+        <p:txBody>
+          <a:bodyPr rtlCol="0" anchor="ctr"/>
+          <a:lstStyle/>
+          <a:p>
+            <a:pPr algn="ctr"/>
+          </a:p>
+        </p:txBody>
+      </p:sp>
+      <p:sp>
+        <p:nvSpPr>
+          <p:cNvPr id="3" name="Rectangle 2"/>
+          <p:cNvSpPr/>
+          <p:nvPr/>
+        </p:nvSpPr>
+        <p:spPr>
+          <a:xfrm>
+            <a:off x="0" y="0"/>
+            <a:ext cx="12188952" cy="91440"/>
+          </a:xfrm>
+          <a:prstGeom prst="rect">
+            <a:avLst/>
+          </a:prstGeom>
+          <a:solidFill>
+            <a:srgbClr val="38BDF8"/>
+          </a:solidFill>
+          <a:ln>
+            <a:noFill/>
+          </a:ln>
+        </p:spPr>
+        <p:style>
+          <a:lnRef idx="1">
+            <a:schemeClr val="accent1"/>
+          </a:lnRef>
+          <a:fillRef idx="3">
+            <a:schemeClr val="accent1"/>
+          </a:fillRef>
+          <a:effectRef idx="2">
+            <a:schemeClr val="accent1"/>
+          </a:effectRef>
+          <a:fontRef idx="minor">
+            <a:schemeClr val="lt1"/>
+          </a:fontRef>
+        </p:style>
+        <p:txBody>
+          <a:bodyPr rtlCol="0" anchor="ctr"/>
+          <a:lstStyle/>
+          <a:p>
+            <a:pPr algn="ctr"/>
+          </a:p>
+        </p:txBody>
+      </p:sp>
+      <p:sp>
+        <p:nvSpPr>
+          <p:cNvPr id="4" name="TextBox 3"/>
+          <p:cNvSpPr txBox="1"/>
+          <p:nvPr/>
+        </p:nvSpPr>
+        <p:spPr>
+          <a:xfrm>
+            <a:off x="457200" y="164592"/>
+            <a:ext cx="2743200" cy="457200"/>
+          </a:xfrm>
+          <a:prstGeom prst="rect">
+            <a:avLst/>
+          </a:prstGeom>
+          <a:noFill/>
+        </p:spPr>
+        <p:txBody>
+          <a:bodyPr wrap="square">
+            <a:spAutoFit/>
+          </a:bodyPr>
+          <a:lstStyle/>
+          <a:p>
+            <a:pPr algn="l"/>
+            <a:r>
+              <a:rPr sz="1200" b="1" i="0">
+                <a:solidFill>
+                  <a:srgbClr val="38BDF8"/>
+                </a:solidFill>
+              </a:rPr>
+              <a:t>STEP 04</a:t>
+            </a:r>
+          </a:p>
+        </p:txBody>
+      </p:sp>
+      <p:sp>
+        <p:nvSpPr>
+          <p:cNvPr id="5" name="TextBox 4"/>
+          <p:cNvSpPr txBox="1"/>
+          <p:nvPr/>
+        </p:nvSpPr>
+        <p:spPr>
+          <a:xfrm>
+            <a:off x="457200" y="502920"/>
+            <a:ext cx="10972800" cy="685800"/>
+          </a:xfrm>
+          <a:prstGeom prst="rect">
+            <a:avLst/>
+          </a:prstGeom>
+          <a:noFill/>
+        </p:spPr>
+        <p:txBody>
+          <a:bodyPr wrap="square">
+            <a:spAutoFit/>
+          </a:bodyPr>
+          <a:lstStyle/>
+          <a:p>
+            <a:pPr algn="l"/>
+            <a:r>
+              <a:rPr sz="2600" b="1" i="0">
+                <a:solidFill>
+                  <a:srgbClr val="FFFFFF"/>
+                </a:solidFill>
+              </a:rPr>
+              <a:t>API 코드 예제 — Python</a:t>
+            </a:r>
+          </a:p>
+        </p:txBody>
+      </p:sp>
+      <p:sp>
+        <p:nvSpPr>
+          <p:cNvPr id="6" name="TextBox 5"/>
+          <p:cNvSpPr txBox="1"/>
+          <p:nvPr/>
+        </p:nvSpPr>
+        <p:spPr>
+          <a:xfrm>
+            <a:off x="457200" y="1078992"/>
+            <a:ext cx="10972800" cy="411480"/>
+          </a:xfrm>
+          <a:prstGeom prst="rect">
+            <a:avLst/>
+          </a:prstGeom>
+          <a:noFill/>
+        </p:spPr>
+        <p:txBody>
+          <a:bodyPr wrap="square">
+            <a:spAutoFit/>
+          </a:bodyPr>
+          <a:lstStyle/>
+          <a:p>
+            <a:pPr algn="l"/>
+            <a:r>
+              <a:rPr sz="1300" b="0" i="1">
+                <a:solidFill>
+                  <a:srgbClr val="60A5FA"/>
+                </a:solidFill>
+              </a:rPr>
+              <a:t>① Device 등록  →  ② 대화방 생성  →  ③ 메시지 전송 순서로 호출합니다</a:t>
+            </a:r>
+          </a:p>
+        </p:txBody>
+      </p:sp>
+      <p:sp>
+        <p:nvSpPr>
+          <p:cNvPr id="7" name="Rectangle 6"/>
+          <p:cNvSpPr/>
+          <p:nvPr/>
+        </p:nvSpPr>
+        <p:spPr>
+          <a:xfrm>
+            <a:off x="365760" y="1371600"/>
+            <a:ext cx="11457432" cy="19050"/>
+          </a:xfrm>
+          <a:prstGeom prst="rect">
+            <a:avLst/>
+          </a:prstGeom>
+          <a:solidFill>
+            <a:srgbClr val="38BDF8"/>
+          </a:solidFill>
+          <a:ln>
+            <a:noFill/>
+          </a:ln>
+        </p:spPr>
+        <p:style>
+          <a:lnRef idx="1">
+            <a:schemeClr val="accent1"/>
+          </a:lnRef>
+          <a:fillRef idx="3">
+            <a:schemeClr val="accent1"/>
+          </a:fillRef>
+          <a:effectRef idx="2">
+            <a:schemeClr val="accent1"/>
+          </a:effectRef>
+          <a:fontRef idx="minor">
+            <a:schemeClr val="lt1"/>
+          </a:fontRef>
+        </p:style>
+        <p:txBody>
+          <a:bodyPr rtlCol="0" anchor="ctr"/>
+          <a:lstStyle/>
+          <a:p>
+            <a:pPr algn="ctr"/>
+          </a:p>
+        </p:txBody>
+      </p:sp>
+      <p:sp>
+        <p:nvSpPr>
+          <p:cNvPr id="8" name="Rectangle 7"/>
+          <p:cNvSpPr/>
+          <p:nvPr/>
+        </p:nvSpPr>
+        <p:spPr>
+          <a:xfrm>
+            <a:off x="365760" y="1508760"/>
+            <a:ext cx="5577840" cy="292608"/>
+          </a:xfrm>
+          <a:prstGeom prst="rect">
+            <a:avLst/>
+          </a:prstGeom>
+          <a:solidFill>
+            <a:srgbClr val="2D5A9E"/>
+          </a:solidFill>
+          <a:ln>
+            <a:noFill/>
+          </a:ln>
+        </p:spPr>
+        <p:style>
+          <a:lnRef idx="1">
+            <a:schemeClr val="accent1"/>
+          </a:lnRef>
+          <a:fillRef idx="3">
+            <a:schemeClr val="accent1"/>
+          </a:fillRef>
+          <a:effectRef idx="2">
+            <a:schemeClr val="accent1"/>
+          </a:effectRef>
+          <a:fontRef idx="minor">
+            <a:schemeClr val="lt1"/>
+          </a:fontRef>
+        </p:style>
+        <p:txBody>
+          <a:bodyPr rtlCol="0" anchor="ctr"/>
+          <a:lstStyle/>
+          <a:p>
+            <a:pPr algn="ctr"/>
+          </a:p>
+        </p:txBody>
+      </p:sp>
+      <p:sp>
+        <p:nvSpPr>
+          <p:cNvPr id="9" name="TextBox 8"/>
+          <p:cNvSpPr txBox="1"/>
+          <p:nvPr/>
+        </p:nvSpPr>
+        <p:spPr>
+          <a:xfrm>
+            <a:off x="365760" y="1508760"/>
+            <a:ext cx="5577840" cy="292608"/>
+          </a:xfrm>
+          <a:prstGeom prst="rect">
+            <a:avLst/>
+          </a:prstGeom>
+          <a:noFill/>
+        </p:spPr>
+        <p:txBody>
+          <a:bodyPr wrap="square">
+            <a:spAutoFit/>
+          </a:bodyPr>
+          <a:lstStyle/>
+          <a:p>
+            <a:pPr algn="l"/>
+            <a:r>
+              <a:rPr sz="1100" b="1" i="0">
+                <a:solidFill>
+                  <a:srgbClr val="FFFFFF"/>
+                </a:solidFill>
+              </a:rPr>
+              <a:t>  공통 설정 (Base URL &amp; Headers)</a:t>
+            </a:r>
+          </a:p>
+        </p:txBody>
+      </p:sp>
+      <p:sp>
+        <p:nvSpPr>
+          <p:cNvPr id="10" name="Rectangle 9"/>
+          <p:cNvSpPr/>
+          <p:nvPr/>
+        </p:nvSpPr>
+        <p:spPr>
+          <a:xfrm>
+            <a:off x="365760" y="1801368"/>
+            <a:ext cx="5577840" cy="1508760"/>
+          </a:xfrm>
+          <a:prstGeom prst="rect">
+            <a:avLst/>
+          </a:prstGeom>
+          <a:solidFill>
+            <a:srgbClr val="1E293B"/>
+          </a:solidFill>
+          <a:ln>
+            <a:noFill/>
+          </a:ln>
+        </p:spPr>
+        <p:style>
+          <a:lnRef idx="1">
+            <a:schemeClr val="accent1"/>
+          </a:lnRef>
+          <a:fillRef idx="3">
+            <a:schemeClr val="accent1"/>
+          </a:fillRef>
+          <a:effectRef idx="2">
+            <a:schemeClr val="accent1"/>
+          </a:effectRef>
+          <a:fontRef idx="minor">
+            <a:schemeClr val="lt1"/>
+          </a:fontRef>
+        </p:style>
+        <p:txBody>
+          <a:bodyPr rtlCol="0" anchor="ctr"/>
+          <a:lstStyle/>
+          <a:p>
+            <a:pPr algn="ctr"/>
+          </a:p>
+        </p:txBody>
+      </p:sp>
+      <p:sp>
+        <p:nvSpPr>
+          <p:cNvPr id="11" name="Rectangle 10"/>
+          <p:cNvSpPr/>
+          <p:nvPr/>
+        </p:nvSpPr>
+        <p:spPr>
+          <a:xfrm>
+            <a:off x="365760" y="1801368"/>
+            <a:ext cx="45720" cy="1508760"/>
+          </a:xfrm>
+          <a:prstGeom prst="rect">
+            <a:avLst/>
+          </a:prstGeom>
+          <a:solidFill>
+            <a:srgbClr val="38BDF8"/>
+          </a:solidFill>
+          <a:ln>
+            <a:noFill/>
+          </a:ln>
+        </p:spPr>
+        <p:style>
+          <a:lnRef idx="1">
+            <a:schemeClr val="accent1"/>
+          </a:lnRef>
+          <a:fillRef idx="3">
+            <a:schemeClr val="accent1"/>
+          </a:fillRef>
+          <a:effectRef idx="2">
+            <a:schemeClr val="accent1"/>
+          </a:effectRef>
+          <a:fontRef idx="minor">
+            <a:schemeClr val="lt1"/>
+          </a:fontRef>
+        </p:style>
+        <p:txBody>
+          <a:bodyPr rtlCol="0" anchor="ctr"/>
+          <a:lstStyle/>
+          <a:p>
+            <a:pPr algn="ctr"/>
+          </a:p>
+        </p:txBody>
+      </p:sp>
+      <p:sp>
+        <p:nvSpPr>
+          <p:cNvPr id="12" name="TextBox 11"/>
+          <p:cNvSpPr txBox="1"/>
+          <p:nvPr/>
+        </p:nvSpPr>
+        <p:spPr>
+          <a:xfrm>
+            <a:off x="475488" y="1847088"/>
+            <a:ext cx="5413248" cy="1435608"/>
+          </a:xfrm>
+          <a:prstGeom prst="rect">
+            <a:avLst/>
+          </a:prstGeom>
+          <a:noFill/>
+        </p:spPr>
+        <p:txBody>
+          <a:bodyPr wrap="square">
+            <a:spAutoFit/>
+          </a:bodyPr>
+          <a:lstStyle/>
+          <a:p>
+            <a:pPr algn="l"/>
+            <a:r>
+              <a:rPr sz="950" b="0" i="0">
+                <a:solidFill>
+                  <a:srgbClr val="93C5FD"/>
+                </a:solidFill>
+              </a:rPr>
+              <a:t>import requests
+BASE = "https://openapi.stage.samsung.net"
+headers = {
+    "Authorization": "Bearer &lt;ACCESS_TOKEN&gt;",
+    "x-system-id":   "&lt;SYSTEM_ID&gt;",
+    "Content-Type":  "application/json",
+}</a:t>
+            </a:r>
+          </a:p>
+        </p:txBody>
+      </p:sp>
+      <p:sp>
+        <p:nvSpPr>
+          <p:cNvPr id="13" name="Rectangle 12"/>
+          <p:cNvSpPr/>
+          <p:nvPr/>
+        </p:nvSpPr>
+        <p:spPr>
+          <a:xfrm>
+            <a:off x="365760" y="3401568"/>
+            <a:ext cx="5577840" cy="292608"/>
+          </a:xfrm>
+          <a:prstGeom prst="rect">
+            <a:avLst/>
+          </a:prstGeom>
+          <a:solidFill>
+            <a:srgbClr val="1E3A6E"/>
+          </a:solidFill>
+          <a:ln>
+            <a:noFill/>
+          </a:ln>
+        </p:spPr>
+        <p:style>
+          <a:lnRef idx="1">
+            <a:schemeClr val="accent1"/>
+          </a:lnRef>
+          <a:fillRef idx="3">
+            <a:schemeClr val="accent1"/>
+          </a:fillRef>
+          <a:effectRef idx="2">
+            <a:schemeClr val="accent1"/>
+          </a:effectRef>
+          <a:fontRef idx="minor">
+            <a:schemeClr val="lt1"/>
+          </a:fontRef>
+        </p:style>
+        <p:txBody>
+          <a:bodyPr rtlCol="0" anchor="ctr"/>
+          <a:lstStyle/>
+          <a:p>
+            <a:pPr algn="ctr"/>
+          </a:p>
+        </p:txBody>
+      </p:sp>
+      <p:sp>
+        <p:nvSpPr>
+          <p:cNvPr id="14" name="TextBox 13"/>
+          <p:cNvSpPr txBox="1"/>
+          <p:nvPr/>
+        </p:nvSpPr>
+        <p:spPr>
+          <a:xfrm>
+            <a:off x="365760" y="3401568"/>
+            <a:ext cx="5577840" cy="292608"/>
+          </a:xfrm>
+          <a:prstGeom prst="rect">
+            <a:avLst/>
+          </a:prstGeom>
+          <a:noFill/>
+        </p:spPr>
+        <p:txBody>
+          <a:bodyPr wrap="square">
+            <a:spAutoFit/>
+          </a:bodyPr>
+          <a:lstStyle/>
+          <a:p>
+            <a:pPr algn="l"/>
+            <a:r>
+              <a:rPr sz="1100" b="1" i="0">
+                <a:solidFill>
+                  <a:srgbClr val="FFFFFF"/>
+                </a:solidFill>
+              </a:rPr>
+              <a:t>  ① Device 등록</a:t>
+            </a:r>
+          </a:p>
+        </p:txBody>
+      </p:sp>
+      <p:sp>
+        <p:nvSpPr>
+          <p:cNvPr id="15" name="Rectangle 14"/>
+          <p:cNvSpPr/>
+          <p:nvPr/>
+        </p:nvSpPr>
+        <p:spPr>
+          <a:xfrm>
+            <a:off x="365760" y="3694176"/>
+            <a:ext cx="5577840" cy="1508760"/>
+          </a:xfrm>
+          <a:prstGeom prst="rect">
+            <a:avLst/>
+          </a:prstGeom>
+          <a:solidFill>
+            <a:srgbClr val="1E293B"/>
+          </a:solidFill>
+          <a:ln>
+            <a:noFill/>
+          </a:ln>
+        </p:spPr>
+        <p:style>
+          <a:lnRef idx="1">
+            <a:schemeClr val="accent1"/>
+          </a:lnRef>
+          <a:fillRef idx="3">
+            <a:schemeClr val="accent1"/>
+          </a:fillRef>
+          <a:effectRef idx="2">
+            <a:schemeClr val="accent1"/>
+          </a:effectRef>
+          <a:fontRef idx="minor">
+            <a:schemeClr val="lt1"/>
+          </a:fontRef>
+        </p:style>
+        <p:txBody>
+          <a:bodyPr rtlCol="0" anchor="ctr"/>
+          <a:lstStyle/>
+          <a:p>
+            <a:pPr algn="ctr"/>
+          </a:p>
+        </p:txBody>
+      </p:sp>
+      <p:sp>
+        <p:nvSpPr>
+          <p:cNvPr id="16" name="Rectangle 15"/>
+          <p:cNvSpPr/>
+          <p:nvPr/>
+        </p:nvSpPr>
+        <p:spPr>
+          <a:xfrm>
+            <a:off x="365760" y="3694176"/>
+            <a:ext cx="45720" cy="1508760"/>
+          </a:xfrm>
+          <a:prstGeom prst="rect">
+            <a:avLst/>
+          </a:prstGeom>
+          <a:solidFill>
+            <a:srgbClr val="38BDF8"/>
+          </a:solidFill>
+          <a:ln>
+            <a:noFill/>
+          </a:ln>
+        </p:spPr>
+        <p:style>
+          <a:lnRef idx="1">
+            <a:schemeClr val="accent1"/>
+          </a:lnRef>
+          <a:fillRef idx="3">
+            <a:schemeClr val="accent1"/>
+          </a:fillRef>
+          <a:effectRef idx="2">
+            <a:schemeClr val="accent1"/>
+          </a:effectRef>
+          <a:fontRef idx="minor">
+            <a:schemeClr val="lt1"/>
+          </a:fontRef>
+        </p:style>
+        <p:txBody>
+          <a:bodyPr rtlCol="0" anchor="ctr"/>
+          <a:lstStyle/>
+          <a:p>
+            <a:pPr algn="ctr"/>
+          </a:p>
+        </p:txBody>
+      </p:sp>
+      <p:sp>
+        <p:nvSpPr>
+          <p:cNvPr id="17" name="TextBox 16"/>
+          <p:cNvSpPr txBox="1"/>
+          <p:nvPr/>
+        </p:nvSpPr>
+        <p:spPr>
+          <a:xfrm>
+            <a:off x="475488" y="3739896"/>
+            <a:ext cx="5413248" cy="1435608"/>
+          </a:xfrm>
+          <a:prstGeom prst="rect">
+            <a:avLst/>
+          </a:prstGeom>
+          <a:noFill/>
+        </p:spPr>
+        <p:txBody>
+          <a:bodyPr wrap="square">
+            <a:spAutoFit/>
+          </a:bodyPr>
+          <a:lstStyle/>
+          <a:p>
+            <a:pPr algn="l"/>
+            <a:r>
+              <a:rPr sz="950" b="0" i="0">
+                <a:solidFill>
+                  <a:srgbClr val="93C5FD"/>
+                </a:solidFill>
+              </a:rPr>
+              <a:t>res = requests.post(
+    f"{BASE}/messenger/bot/v1/device",
+    headers=headers,
+    json={"deviceName": "fa-service-bot"},
+)
+device_id = res.json()["deviceId"]
+# device_id 를 저장해 두세요</a:t>
+            </a:r>
+          </a:p>
+        </p:txBody>
+      </p:sp>
+      <p:sp>
+        <p:nvSpPr>
+          <p:cNvPr id="18" name="Rectangle 17"/>
+          <p:cNvSpPr/>
+          <p:nvPr/>
+        </p:nvSpPr>
+        <p:spPr>
+          <a:xfrm>
+            <a:off x="365760" y="5047488"/>
+            <a:ext cx="5577840" cy="457200"/>
+          </a:xfrm>
+          <a:prstGeom prst="rect">
+            <a:avLst/>
+          </a:prstGeom>
+          <a:solidFill>
+            <a:srgbClr val="1E293B"/>
+          </a:solidFill>
+          <a:ln>
+            <a:noFill/>
+          </a:ln>
+        </p:spPr>
+        <p:style>
+          <a:lnRef idx="1">
+            <a:schemeClr val="accent1"/>
+          </a:lnRef>
+          <a:fillRef idx="3">
+            <a:schemeClr val="accent1"/>
+          </a:fillRef>
+          <a:effectRef idx="2">
+            <a:schemeClr val="accent1"/>
+          </a:effectRef>
+          <a:fontRef idx="minor">
+            <a:schemeClr val="lt1"/>
+          </a:fontRef>
+        </p:style>
+        <p:txBody>
+          <a:bodyPr rtlCol="0" anchor="ctr"/>
+          <a:lstStyle/>
+          <a:p>
+            <a:pPr algn="ctr"/>
+          </a:p>
+        </p:txBody>
+      </p:sp>
+      <p:sp>
+        <p:nvSpPr>
+          <p:cNvPr id="19" name="Rectangle 18"/>
+          <p:cNvSpPr/>
+          <p:nvPr/>
+        </p:nvSpPr>
+        <p:spPr>
+          <a:xfrm>
+            <a:off x="365760" y="5047488"/>
+            <a:ext cx="54864" cy="457200"/>
+          </a:xfrm>
+          <a:prstGeom prst="rect">
+            <a:avLst/>
+          </a:prstGeom>
+          <a:solidFill>
+            <a:srgbClr val="10B981"/>
+          </a:solidFill>
+          <a:ln>
+            <a:noFill/>
+          </a:ln>
+        </p:spPr>
+        <p:style>
+          <a:lnRef idx="1">
+            <a:schemeClr val="accent1"/>
+          </a:lnRef>
+          <a:fillRef idx="3">
+            <a:schemeClr val="accent1"/>
+          </a:fillRef>
+          <a:effectRef idx="2">
+            <a:schemeClr val="accent1"/>
+          </a:effectRef>
+          <a:fontRef idx="minor">
+            <a:schemeClr val="lt1"/>
+          </a:fontRef>
+        </p:style>
+        <p:txBody>
+          <a:bodyPr rtlCol="0" anchor="ctr"/>
+          <a:lstStyle/>
+          <a:p>
+            <a:pPr algn="ctr"/>
+          </a:p>
+        </p:txBody>
+      </p:sp>
+      <p:sp>
+        <p:nvSpPr>
+          <p:cNvPr id="20" name="TextBox 19"/>
+          <p:cNvSpPr txBox="1"/>
+          <p:nvPr/>
+        </p:nvSpPr>
+        <p:spPr>
+          <a:xfrm>
+            <a:off x="502920" y="5102352"/>
+            <a:ext cx="5394960" cy="365760"/>
+          </a:xfrm>
+          <a:prstGeom prst="rect">
+            <a:avLst/>
+          </a:prstGeom>
+          <a:noFill/>
+        </p:spPr>
+        <p:txBody>
+          <a:bodyPr wrap="square">
+            <a:spAutoFit/>
+          </a:bodyPr>
+          <a:lstStyle/>
+          <a:p>
+            <a:pPr algn="l"/>
+            <a:r>
+              <a:rPr sz="1100" b="0" i="0">
+                <a:solidFill>
+                  <a:srgbClr val="FFFFFF"/>
+                </a:solidFill>
+              </a:rPr>
+              <a:t>💡 device_id : 이후 모든 API 호출에  x-device-id  헤더로 사용합니다</a:t>
+            </a:r>
+          </a:p>
+        </p:txBody>
+      </p:sp>
+      <p:sp>
+        <p:nvSpPr>
+          <p:cNvPr id="21" name="Rectangle 20"/>
+          <p:cNvSpPr/>
+          <p:nvPr/>
+        </p:nvSpPr>
+        <p:spPr>
+          <a:xfrm>
+            <a:off x="365760" y="5596128"/>
+            <a:ext cx="5577840" cy="457200"/>
+          </a:xfrm>
+          <a:prstGeom prst="rect">
+            <a:avLst/>
+          </a:prstGeom>
+          <a:solidFill>
+            <a:srgbClr val="1E293B"/>
+          </a:solidFill>
+          <a:ln>
+            <a:noFill/>
+          </a:ln>
+        </p:spPr>
+        <p:style>
+          <a:lnRef idx="1">
+            <a:schemeClr val="accent1"/>
+          </a:lnRef>
+          <a:fillRef idx="3">
+            <a:schemeClr val="accent1"/>
+          </a:fillRef>
+          <a:effectRef idx="2">
+            <a:schemeClr val="accent1"/>
+          </a:effectRef>
+          <a:fontRef idx="minor">
+            <a:schemeClr val="lt1"/>
+          </a:fontRef>
+        </p:style>
+        <p:txBody>
+          <a:bodyPr rtlCol="0" anchor="ctr"/>
+          <a:lstStyle/>
+          <a:p>
+            <a:pPr algn="ctr"/>
+          </a:p>
+        </p:txBody>
+      </p:sp>
+      <p:sp>
+        <p:nvSpPr>
+          <p:cNvPr id="22" name="Rectangle 21"/>
+          <p:cNvSpPr/>
+          <p:nvPr/>
+        </p:nvSpPr>
+        <p:spPr>
+          <a:xfrm>
+            <a:off x="365760" y="5596128"/>
+            <a:ext cx="54864" cy="457200"/>
+          </a:xfrm>
+          <a:prstGeom prst="rect">
+            <a:avLst/>
+          </a:prstGeom>
+          <a:solidFill>
+            <a:srgbClr val="64748B"/>
+          </a:solidFill>
+          <a:ln>
+            <a:noFill/>
+          </a:ln>
+        </p:spPr>
+        <p:style>
+          <a:lnRef idx="1">
+            <a:schemeClr val="accent1"/>
+          </a:lnRef>
+          <a:fillRef idx="3">
+            <a:schemeClr val="accent1"/>
+          </a:fillRef>
+          <a:effectRef idx="2">
+            <a:schemeClr val="accent1"/>
+          </a:effectRef>
+          <a:fontRef idx="minor">
+            <a:schemeClr val="lt1"/>
+          </a:fontRef>
+        </p:style>
+        <p:txBody>
+          <a:bodyPr rtlCol="0" anchor="ctr"/>
+          <a:lstStyle/>
+          <a:p>
+            <a:pPr algn="ctr"/>
+          </a:p>
+        </p:txBody>
+      </p:sp>
+      <p:sp>
+        <p:nvSpPr>
+          <p:cNvPr id="23" name="TextBox 22"/>
+          <p:cNvSpPr txBox="1"/>
+          <p:nvPr/>
+        </p:nvSpPr>
+        <p:spPr>
+          <a:xfrm>
+            <a:off x="502920" y="5650992"/>
+            <a:ext cx="5394960" cy="365760"/>
+          </a:xfrm>
+          <a:prstGeom prst="rect">
+            <a:avLst/>
+          </a:prstGeom>
+          <a:noFill/>
+        </p:spPr>
+        <p:txBody>
+          <a:bodyPr wrap="square">
+            <a:spAutoFit/>
+          </a:bodyPr>
+          <a:lstStyle/>
+          <a:p>
+            <a:pPr algn="l"/>
+            <a:r>
+              <a:rPr sz="1100" b="0" i="0">
+                <a:solidFill>
+                  <a:srgbClr val="FFFFFF"/>
+                </a:solidFill>
+              </a:rPr>
+              <a:t>📌 운영 서버:  BASE = "https://openapi.samsung.net"  으로 변경</a:t>
+            </a:r>
+          </a:p>
+        </p:txBody>
+      </p:sp>
+      <p:sp>
+        <p:nvSpPr>
+          <p:cNvPr id="24" name="Rectangle 23"/>
+          <p:cNvSpPr/>
+          <p:nvPr/>
+        </p:nvSpPr>
+        <p:spPr>
+          <a:xfrm>
+            <a:off x="6336792" y="1508760"/>
+            <a:ext cx="5577840" cy="292608"/>
+          </a:xfrm>
+          <a:prstGeom prst="rect">
+            <a:avLst/>
+          </a:prstGeom>
+          <a:solidFill>
+            <a:srgbClr val="1E3A6E"/>
+          </a:solidFill>
+          <a:ln>
+            <a:noFill/>
+          </a:ln>
+        </p:spPr>
+        <p:style>
+          <a:lnRef idx="1">
+            <a:schemeClr val="accent1"/>
+          </a:lnRef>
+          <a:fillRef idx="3">
+            <a:schemeClr val="accent1"/>
+          </a:fillRef>
+          <a:effectRef idx="2">
+            <a:schemeClr val="accent1"/>
+          </a:effectRef>
+          <a:fontRef idx="minor">
+            <a:schemeClr val="lt1"/>
+          </a:fontRef>
+        </p:style>
+        <p:txBody>
+          <a:bodyPr rtlCol="0" anchor="ctr"/>
+          <a:lstStyle/>
+          <a:p>
+            <a:pPr algn="ctr"/>
+          </a:p>
+        </p:txBody>
+      </p:sp>
+      <p:sp>
+        <p:nvSpPr>
+          <p:cNvPr id="25" name="TextBox 24"/>
+          <p:cNvSpPr txBox="1"/>
+          <p:nvPr/>
+        </p:nvSpPr>
+        <p:spPr>
+          <a:xfrm>
+            <a:off x="6336792" y="1508760"/>
+            <a:ext cx="5577840" cy="292608"/>
+          </a:xfrm>
+          <a:prstGeom prst="rect">
+            <a:avLst/>
+          </a:prstGeom>
+          <a:noFill/>
+        </p:spPr>
+        <p:txBody>
+          <a:bodyPr wrap="square">
+            <a:spAutoFit/>
+          </a:bodyPr>
+          <a:lstStyle/>
+          <a:p>
+            <a:pPr algn="l"/>
+            <a:r>
+              <a:rPr sz="1100" b="1" i="0">
+                <a:solidFill>
+                  <a:srgbClr val="FFFFFF"/>
+                </a:solidFill>
+              </a:rPr>
+              <a:t>  ② 대화방 생성</a:t>
+            </a:r>
+          </a:p>
+        </p:txBody>
+      </p:sp>
+      <p:sp>
+        <p:nvSpPr>
+          <p:cNvPr id="26" name="Rectangle 25"/>
+          <p:cNvSpPr/>
+          <p:nvPr/>
+        </p:nvSpPr>
+        <p:spPr>
+          <a:xfrm>
+            <a:off x="6336792" y="1801368"/>
+            <a:ext cx="5577840" cy="1874519"/>
+          </a:xfrm>
+          <a:prstGeom prst="rect">
+            <a:avLst/>
+          </a:prstGeom>
+          <a:solidFill>
+            <a:srgbClr val="1E293B"/>
+          </a:solidFill>
+          <a:ln>
+            <a:noFill/>
+          </a:ln>
+        </p:spPr>
+        <p:style>
+          <a:lnRef idx="1">
+            <a:schemeClr val="accent1"/>
+          </a:lnRef>
+          <a:fillRef idx="3">
+            <a:schemeClr val="accent1"/>
+          </a:fillRef>
+          <a:effectRef idx="2">
+            <a:schemeClr val="accent1"/>
+          </a:effectRef>
+          <a:fontRef idx="minor">
+            <a:schemeClr val="lt1"/>
+          </a:fontRef>
+        </p:style>
+        <p:txBody>
+          <a:bodyPr rtlCol="0" anchor="ctr"/>
+          <a:lstStyle/>
+          <a:p>
+            <a:pPr algn="ctr"/>
+          </a:p>
+        </p:txBody>
+      </p:sp>
+      <p:sp>
+        <p:nvSpPr>
+          <p:cNvPr id="27" name="Rectangle 26"/>
+          <p:cNvSpPr/>
+          <p:nvPr/>
+        </p:nvSpPr>
+        <p:spPr>
+          <a:xfrm>
+            <a:off x="6336792" y="1801368"/>
+            <a:ext cx="45720" cy="1874519"/>
+          </a:xfrm>
+          <a:prstGeom prst="rect">
+            <a:avLst/>
+          </a:prstGeom>
+          <a:solidFill>
+            <a:srgbClr val="38BDF8"/>
+          </a:solidFill>
+          <a:ln>
+            <a:noFill/>
+          </a:ln>
+        </p:spPr>
+        <p:style>
+          <a:lnRef idx="1">
+            <a:schemeClr val="accent1"/>
+          </a:lnRef>
+          <a:fillRef idx="3">
+            <a:schemeClr val="accent1"/>
+          </a:fillRef>
+          <a:effectRef idx="2">
+            <a:schemeClr val="accent1"/>
+          </a:effectRef>
+          <a:fontRef idx="minor">
+            <a:schemeClr val="lt1"/>
+          </a:fontRef>
+        </p:style>
+        <p:txBody>
+          <a:bodyPr rtlCol="0" anchor="ctr"/>
+          <a:lstStyle/>
+          <a:p>
+            <a:pPr algn="ctr"/>
+          </a:p>
+        </p:txBody>
+      </p:sp>
+      <p:sp>
+        <p:nvSpPr>
+          <p:cNvPr id="28" name="TextBox 27"/>
+          <p:cNvSpPr txBox="1"/>
+          <p:nvPr/>
+        </p:nvSpPr>
+        <p:spPr>
+          <a:xfrm>
+            <a:off x="6446520" y="1847088"/>
+            <a:ext cx="5413248" cy="1801367"/>
+          </a:xfrm>
+          <a:prstGeom prst="rect">
+            <a:avLst/>
+          </a:prstGeom>
+          <a:noFill/>
+        </p:spPr>
+        <p:txBody>
+          <a:bodyPr wrap="square">
+            <a:spAutoFit/>
+          </a:bodyPr>
+          <a:lstStyle/>
+          <a:p>
+            <a:pPr algn="l"/>
+            <a:r>
+              <a:rPr sz="950" b="0" i="0">
+                <a:solidFill>
+                  <a:srgbClr val="93C5FD"/>
+                </a:solidFill>
+              </a:rPr>
+              <a:t>res = requests.post(
+    f"{BASE}/messenger/bot/v1/chatroom",
+    headers={**headers, "x-device-id": device_id},
+    json={
+        "roomName": "FA 분석 알림",
+        "memberList": ["hong.gildong@samsung.com"],
+    },
+)
+room_id = res.json()["roomId"]</a:t>
+            </a:r>
+          </a:p>
+        </p:txBody>
+      </p:sp>
+      <p:sp>
+        <p:nvSpPr>
+          <p:cNvPr id="29" name="Rectangle 28"/>
+          <p:cNvSpPr/>
+          <p:nvPr/>
+        </p:nvSpPr>
+        <p:spPr>
+          <a:xfrm>
+            <a:off x="6336792" y="3493008"/>
+            <a:ext cx="5577840" cy="292608"/>
+          </a:xfrm>
+          <a:prstGeom prst="rect">
+            <a:avLst/>
+          </a:prstGeom>
+          <a:solidFill>
+            <a:srgbClr val="2D5A9E"/>
+          </a:solidFill>
+          <a:ln>
+            <a:noFill/>
+          </a:ln>
+        </p:spPr>
+        <p:style>
+          <a:lnRef idx="1">
+            <a:schemeClr val="accent1"/>
+          </a:lnRef>
+          <a:fillRef idx="3">
+            <a:schemeClr val="accent1"/>
+          </a:fillRef>
+          <a:effectRef idx="2">
+            <a:schemeClr val="accent1"/>
+          </a:effectRef>
+          <a:fontRef idx="minor">
+            <a:schemeClr val="lt1"/>
+          </a:fontRef>
+        </p:style>
+        <p:txBody>
+          <a:bodyPr rtlCol="0" anchor="ctr"/>
+          <a:lstStyle/>
+          <a:p>
+            <a:pPr algn="ctr"/>
+          </a:p>
+        </p:txBody>
+      </p:sp>
+      <p:sp>
+        <p:nvSpPr>
+          <p:cNvPr id="30" name="TextBox 29"/>
+          <p:cNvSpPr txBox="1"/>
+          <p:nvPr/>
+        </p:nvSpPr>
+        <p:spPr>
+          <a:xfrm>
+            <a:off x="6336792" y="3493008"/>
+            <a:ext cx="5577840" cy="292608"/>
+          </a:xfrm>
+          <a:prstGeom prst="rect">
+            <a:avLst/>
+          </a:prstGeom>
+          <a:noFill/>
+        </p:spPr>
+        <p:txBody>
+          <a:bodyPr wrap="square">
+            <a:spAutoFit/>
+          </a:bodyPr>
+          <a:lstStyle/>
+          <a:p>
+            <a:pPr algn="l"/>
+            <a:r>
+              <a:rPr sz="1100" b="1" i="0">
+                <a:solidFill>
+                  <a:srgbClr val="FFFFFF"/>
+                </a:solidFill>
+              </a:rPr>
+              <a:t>  ③ 메시지 전송</a:t>
+            </a:r>
+          </a:p>
+        </p:txBody>
+      </p:sp>
+      <p:sp>
+        <p:nvSpPr>
+          <p:cNvPr id="31" name="Rectangle 30"/>
+          <p:cNvSpPr/>
+          <p:nvPr/>
+        </p:nvSpPr>
+        <p:spPr>
+          <a:xfrm>
+            <a:off x="6336792" y="3785616"/>
+            <a:ext cx="5577840" cy="1874519"/>
+          </a:xfrm>
+          <a:prstGeom prst="rect">
+            <a:avLst/>
+          </a:prstGeom>
+          <a:solidFill>
+            <a:srgbClr val="1E293B"/>
+          </a:solidFill>
+          <a:ln>
+            <a:noFill/>
+          </a:ln>
+        </p:spPr>
+        <p:style>
+          <a:lnRef idx="1">
+            <a:schemeClr val="accent1"/>
+          </a:lnRef>
+          <a:fillRef idx="3">
+            <a:schemeClr val="accent1"/>
+          </a:fillRef>
+          <a:effectRef idx="2">
+            <a:schemeClr val="accent1"/>
+          </a:effectRef>
+          <a:fontRef idx="minor">
+            <a:schemeClr val="lt1"/>
+          </a:fontRef>
+        </p:style>
+        <p:txBody>
+          <a:bodyPr rtlCol="0" anchor="ctr"/>
+          <a:lstStyle/>
+          <a:p>
+            <a:pPr algn="ctr"/>
+          </a:p>
+        </p:txBody>
+      </p:sp>
+      <p:sp>
+        <p:nvSpPr>
+          <p:cNvPr id="32" name="Rectangle 31"/>
+          <p:cNvSpPr/>
+          <p:nvPr/>
+        </p:nvSpPr>
+        <p:spPr>
+          <a:xfrm>
+            <a:off x="6336792" y="3785616"/>
+            <a:ext cx="45720" cy="1874519"/>
+          </a:xfrm>
+          <a:prstGeom prst="rect">
+            <a:avLst/>
+          </a:prstGeom>
+          <a:solidFill>
+            <a:srgbClr val="38BDF8"/>
+          </a:solidFill>
+          <a:ln>
+            <a:noFill/>
+          </a:ln>
+        </p:spPr>
+        <p:style>
+          <a:lnRef idx="1">
+            <a:schemeClr val="accent1"/>
+          </a:lnRef>
+          <a:fillRef idx="3">
+            <a:schemeClr val="accent1"/>
+          </a:fillRef>
+          <a:effectRef idx="2">
+            <a:schemeClr val="accent1"/>
+          </a:effectRef>
+          <a:fontRef idx="minor">
+            <a:schemeClr val="lt1"/>
+          </a:fontRef>
+        </p:style>
+        <p:txBody>
+          <a:bodyPr rtlCol="0" anchor="ctr"/>
+          <a:lstStyle/>
+          <a:p>
+            <a:pPr algn="ctr"/>
+          </a:p>
+        </p:txBody>
+      </p:sp>
+      <p:sp>
+        <p:nvSpPr>
+          <p:cNvPr id="33" name="TextBox 32"/>
+          <p:cNvSpPr txBox="1"/>
+          <p:nvPr/>
+        </p:nvSpPr>
+        <p:spPr>
+          <a:xfrm>
+            <a:off x="6446520" y="3831336"/>
+            <a:ext cx="5413248" cy="1801367"/>
+          </a:xfrm>
+          <a:prstGeom prst="rect">
+            <a:avLst/>
+          </a:prstGeom>
+          <a:noFill/>
+        </p:spPr>
+        <p:txBody>
+          <a:bodyPr wrap="square">
+            <a:spAutoFit/>
+          </a:bodyPr>
+          <a:lstStyle/>
+          <a:p>
+            <a:pPr algn="l"/>
+            <a:r>
+              <a:rPr sz="950" b="0" i="0">
+                <a:solidFill>
+                  <a:srgbClr val="93C5FD"/>
+                </a:solidFill>
+              </a:rPr>
+              <a:t>res = requests.post(
+    f"{BASE}/messenger/bot/v1/message",
+    headers={**headers, "x-device-id": device_id},
+    json={
+        "roomId": room_id,
+        "messageType": "TEXT",
+        "message": "FA 분석이 완료되었습니다.",
+    },
+)
+# 응답: {"result": "success", ...}</a:t>
+            </a:r>
+          </a:p>
+        </p:txBody>
+      </p:sp>
+      <p:sp>
+        <p:nvSpPr>
+          <p:cNvPr id="34" name="Rectangle 33"/>
+          <p:cNvSpPr/>
+          <p:nvPr/>
+        </p:nvSpPr>
+        <p:spPr>
+          <a:xfrm>
+            <a:off x="6336792" y="5486400"/>
+            <a:ext cx="5577840" cy="457200"/>
+          </a:xfrm>
+          <a:prstGeom prst="rect">
+            <a:avLst/>
+          </a:prstGeom>
+          <a:solidFill>
+            <a:srgbClr val="1E293B"/>
+          </a:solidFill>
+          <a:ln>
+            <a:noFill/>
+          </a:ln>
+        </p:spPr>
+        <p:style>
+          <a:lnRef idx="1">
+            <a:schemeClr val="accent1"/>
+          </a:lnRef>
+          <a:fillRef idx="3">
+            <a:schemeClr val="accent1"/>
+          </a:fillRef>
+          <a:effectRef idx="2">
+            <a:schemeClr val="accent1"/>
+          </a:effectRef>
+          <a:fontRef idx="minor">
+            <a:schemeClr val="lt1"/>
+          </a:fontRef>
+        </p:style>
+        <p:txBody>
+          <a:bodyPr rtlCol="0" anchor="ctr"/>
+          <a:lstStyle/>
+          <a:p>
+            <a:pPr algn="ctr"/>
+          </a:p>
+        </p:txBody>
+      </p:sp>
+      <p:sp>
+        <p:nvSpPr>
+          <p:cNvPr id="35" name="Rectangle 34"/>
+          <p:cNvSpPr/>
+          <p:nvPr/>
+        </p:nvSpPr>
+        <p:spPr>
+          <a:xfrm>
+            <a:off x="6336792" y="5486400"/>
+            <a:ext cx="54864" cy="457200"/>
+          </a:xfrm>
+          <a:prstGeom prst="rect">
+            <a:avLst/>
+          </a:prstGeom>
+          <a:solidFill>
+            <a:srgbClr val="38BDF8"/>
+          </a:solidFill>
+          <a:ln>
+            <a:noFill/>
+          </a:ln>
+        </p:spPr>
+        <p:style>
+          <a:lnRef idx="1">
+            <a:schemeClr val="accent1"/>
+          </a:lnRef>
+          <a:fillRef idx="3">
+            <a:schemeClr val="accent1"/>
+          </a:fillRef>
+          <a:effectRef idx="2">
+            <a:schemeClr val="accent1"/>
+          </a:effectRef>
+          <a:fontRef idx="minor">
+            <a:schemeClr val="lt1"/>
+          </a:fontRef>
+        </p:style>
+        <p:txBody>
+          <a:bodyPr rtlCol="0" anchor="ctr"/>
+          <a:lstStyle/>
+          <a:p>
+            <a:pPr algn="ctr"/>
+          </a:p>
+        </p:txBody>
+      </p:sp>
+      <p:sp>
+        <p:nvSpPr>
+          <p:cNvPr id="36" name="TextBox 35"/>
+          <p:cNvSpPr txBox="1"/>
+          <p:nvPr/>
+        </p:nvSpPr>
+        <p:spPr>
+          <a:xfrm>
+            <a:off x="6473952" y="5541264"/>
+            <a:ext cx="5394960" cy="365760"/>
+          </a:xfrm>
+          <a:prstGeom prst="rect">
+            <a:avLst/>
+          </a:prstGeom>
+          <a:noFill/>
+        </p:spPr>
+        <p:txBody>
+          <a:bodyPr wrap="square">
+            <a:spAutoFit/>
+          </a:bodyPr>
+          <a:lstStyle/>
+          <a:p>
+            <a:pPr algn="l"/>
+            <a:r>
+              <a:rPr sz="1100" b="0" i="0">
+                <a:solidFill>
+                  <a:srgbClr val="FFFFFF"/>
+                </a:solidFill>
+              </a:rPr>
+              <a:t>💡 실제 엔드포인트/파라미터는 Knox Developer Center 공식 문서를 반드시 확인하세요</a:t>
+            </a:r>
+          </a:p>
+        </p:txBody>
+      </p:sp>
+    </p:spTree>
+  </p:cSld>
+  <p:clrMapOvr>
+    <a:masterClrMapping/>
+  </p:clrMapOvr>
+</p:sld>
+</file>
+
+<file path=ppt/slides/slide9.xml><?xml version="1.0" encoding="utf-8"?>
 <p:sld xmlns:a="http://schemas.openxmlformats.org/drawingml/2006/main" xmlns:p="http://schemas.openxmlformats.org/presentationml/2006/main" xmlns:r="http://schemas.openxmlformats.org/officeDocument/2006/relationships">
   <p:cSld>
     <p:spTree>

--- a/knox_chatbot_가이드.pptx
+++ b/knox_chatbot_가이드.pptx
@@ -14,6 +14,7 @@
     <p:sldId id="262" r:id="rId13"/>
     <p:sldId id="263" r:id="rId14"/>
     <p:sldId id="264" r:id="rId15"/>
+    <p:sldId id="265" r:id="rId16"/>
   </p:sldIdLst>
   <p:sldSz cx="12188952" cy="6858000" type="screen4x3"/>
   <p:notesSz cx="6858000" cy="9144000"/>
@@ -3447,6 +3448,951 @@
 </p:sld>
 </file>
 
+<file path=ppt/slides/slide10.xml><?xml version="1.0" encoding="utf-8"?>
+<p:sld xmlns:a="http://schemas.openxmlformats.org/drawingml/2006/main" xmlns:p="http://schemas.openxmlformats.org/presentationml/2006/main" xmlns:r="http://schemas.openxmlformats.org/officeDocument/2006/relationships">
+  <p:cSld>
+    <p:spTree>
+      <p:nvGrpSpPr>
+        <p:cNvPr id="1" name=""/>
+        <p:cNvGrpSpPr/>
+        <p:nvPr/>
+      </p:nvGrpSpPr>
+      <p:grpSpPr/>
+      <p:sp>
+        <p:nvSpPr>
+          <p:cNvPr id="2" name="Rectangle 1"/>
+          <p:cNvSpPr/>
+          <p:nvPr/>
+        </p:nvSpPr>
+        <p:spPr>
+          <a:xfrm>
+            <a:off x="0" y="0"/>
+            <a:ext cx="12188952" cy="6858000"/>
+          </a:xfrm>
+          <a:prstGeom prst="rect">
+            <a:avLst/>
+          </a:prstGeom>
+          <a:solidFill>
+            <a:srgbClr val="0F172A"/>
+          </a:solidFill>
+          <a:ln>
+            <a:noFill/>
+          </a:ln>
+        </p:spPr>
+        <p:style>
+          <a:lnRef idx="1">
+            <a:schemeClr val="accent1"/>
+          </a:lnRef>
+          <a:fillRef idx="3">
+            <a:schemeClr val="accent1"/>
+          </a:fillRef>
+          <a:effectRef idx="2">
+            <a:schemeClr val="accent1"/>
+          </a:effectRef>
+          <a:fontRef idx="minor">
+            <a:schemeClr val="lt1"/>
+          </a:fontRef>
+        </p:style>
+        <p:txBody>
+          <a:bodyPr rtlCol="0" anchor="ctr"/>
+          <a:lstStyle/>
+          <a:p>
+            <a:pPr algn="ctr"/>
+          </a:p>
+        </p:txBody>
+      </p:sp>
+      <p:sp>
+        <p:nvSpPr>
+          <p:cNvPr id="3" name="Rectangle 2"/>
+          <p:cNvSpPr/>
+          <p:nvPr/>
+        </p:nvSpPr>
+        <p:spPr>
+          <a:xfrm>
+            <a:off x="0" y="0"/>
+            <a:ext cx="12188952" cy="91440"/>
+          </a:xfrm>
+          <a:prstGeom prst="rect">
+            <a:avLst/>
+          </a:prstGeom>
+          <a:solidFill>
+            <a:srgbClr val="38BDF8"/>
+          </a:solidFill>
+          <a:ln>
+            <a:noFill/>
+          </a:ln>
+        </p:spPr>
+        <p:style>
+          <a:lnRef idx="1">
+            <a:schemeClr val="accent1"/>
+          </a:lnRef>
+          <a:fillRef idx="3">
+            <a:schemeClr val="accent1"/>
+          </a:fillRef>
+          <a:effectRef idx="2">
+            <a:schemeClr val="accent1"/>
+          </a:effectRef>
+          <a:fontRef idx="minor">
+            <a:schemeClr val="lt1"/>
+          </a:fontRef>
+        </p:style>
+        <p:txBody>
+          <a:bodyPr rtlCol="0" anchor="ctr"/>
+          <a:lstStyle/>
+          <a:p>
+            <a:pPr algn="ctr"/>
+          </a:p>
+        </p:txBody>
+      </p:sp>
+      <p:sp>
+        <p:nvSpPr>
+          <p:cNvPr id="4" name="TextBox 3"/>
+          <p:cNvSpPr txBox="1"/>
+          <p:nvPr/>
+        </p:nvSpPr>
+        <p:spPr>
+          <a:xfrm>
+            <a:off x="457200" y="164592"/>
+            <a:ext cx="2743200" cy="457200"/>
+          </a:xfrm>
+          <a:prstGeom prst="rect">
+            <a:avLst/>
+          </a:prstGeom>
+          <a:noFill/>
+        </p:spPr>
+        <p:txBody>
+          <a:bodyPr wrap="square">
+            <a:spAutoFit/>
+          </a:bodyPr>
+          <a:lstStyle/>
+          <a:p>
+            <a:pPr algn="l"/>
+            <a:r>
+              <a:rPr sz="1200" b="1" i="0">
+                <a:solidFill>
+                  <a:srgbClr val="38BDF8"/>
+                </a:solidFill>
+              </a:rPr>
+              <a:t>STEP 05</a:t>
+            </a:r>
+          </a:p>
+        </p:txBody>
+      </p:sp>
+      <p:sp>
+        <p:nvSpPr>
+          <p:cNvPr id="5" name="TextBox 4"/>
+          <p:cNvSpPr txBox="1"/>
+          <p:nvPr/>
+        </p:nvSpPr>
+        <p:spPr>
+          <a:xfrm>
+            <a:off x="457200" y="502920"/>
+            <a:ext cx="10972800" cy="685800"/>
+          </a:xfrm>
+          <a:prstGeom prst="rect">
+            <a:avLst/>
+          </a:prstGeom>
+          <a:noFill/>
+        </p:spPr>
+        <p:txBody>
+          <a:bodyPr wrap="square">
+            <a:spAutoFit/>
+          </a:bodyPr>
+          <a:lstStyle/>
+          <a:p>
+            <a:pPr algn="l"/>
+            <a:r>
+              <a:rPr sz="2600" b="1" i="0">
+                <a:solidFill>
+                  <a:srgbClr val="FFFFFF"/>
+                </a:solidFill>
+              </a:rPr>
+              <a:t>FAQ</a:t>
+            </a:r>
+          </a:p>
+        </p:txBody>
+      </p:sp>
+      <p:sp>
+        <p:nvSpPr>
+          <p:cNvPr id="6" name="TextBox 5"/>
+          <p:cNvSpPr txBox="1"/>
+          <p:nvPr/>
+        </p:nvSpPr>
+        <p:spPr>
+          <a:xfrm>
+            <a:off x="457200" y="1078992"/>
+            <a:ext cx="10972800" cy="411480"/>
+          </a:xfrm>
+          <a:prstGeom prst="rect">
+            <a:avLst/>
+          </a:prstGeom>
+          <a:noFill/>
+        </p:spPr>
+        <p:txBody>
+          <a:bodyPr wrap="square">
+            <a:spAutoFit/>
+          </a:bodyPr>
+          <a:lstStyle/>
+          <a:p>
+            <a:pPr algn="l"/>
+            <a:r>
+              <a:rPr sz="1300" b="0" i="1">
+                <a:solidFill>
+                  <a:srgbClr val="60A5FA"/>
+                </a:solidFill>
+              </a:rPr>
+              <a:t>궁금한 점이 있을 때 참고하세요</a:t>
+            </a:r>
+          </a:p>
+        </p:txBody>
+      </p:sp>
+      <p:sp>
+        <p:nvSpPr>
+          <p:cNvPr id="7" name="Rectangle 6"/>
+          <p:cNvSpPr/>
+          <p:nvPr/>
+        </p:nvSpPr>
+        <p:spPr>
+          <a:xfrm>
+            <a:off x="365760" y="1371600"/>
+            <a:ext cx="11457432" cy="19050"/>
+          </a:xfrm>
+          <a:prstGeom prst="rect">
+            <a:avLst/>
+          </a:prstGeom>
+          <a:solidFill>
+            <a:srgbClr val="38BDF8"/>
+          </a:solidFill>
+          <a:ln>
+            <a:noFill/>
+          </a:ln>
+        </p:spPr>
+        <p:style>
+          <a:lnRef idx="1">
+            <a:schemeClr val="accent1"/>
+          </a:lnRef>
+          <a:fillRef idx="3">
+            <a:schemeClr val="accent1"/>
+          </a:fillRef>
+          <a:effectRef idx="2">
+            <a:schemeClr val="accent1"/>
+          </a:effectRef>
+          <a:fontRef idx="minor">
+            <a:schemeClr val="lt1"/>
+          </a:fontRef>
+        </p:style>
+        <p:txBody>
+          <a:bodyPr rtlCol="0" anchor="ctr"/>
+          <a:lstStyle/>
+          <a:p>
+            <a:pPr algn="ctr"/>
+          </a:p>
+        </p:txBody>
+      </p:sp>
+      <p:sp>
+        <p:nvSpPr>
+          <p:cNvPr id="8" name="Rectangle 7"/>
+          <p:cNvSpPr/>
+          <p:nvPr/>
+        </p:nvSpPr>
+        <p:spPr>
+          <a:xfrm>
+            <a:off x="365760" y="1600200"/>
+            <a:ext cx="5669280" cy="1417320"/>
+          </a:xfrm>
+          <a:prstGeom prst="rect">
+            <a:avLst/>
+          </a:prstGeom>
+          <a:solidFill>
+            <a:srgbClr val="1E3A6E"/>
+          </a:solidFill>
+          <a:ln>
+            <a:noFill/>
+          </a:ln>
+        </p:spPr>
+        <p:style>
+          <a:lnRef idx="1">
+            <a:schemeClr val="accent1"/>
+          </a:lnRef>
+          <a:fillRef idx="3">
+            <a:schemeClr val="accent1"/>
+          </a:fillRef>
+          <a:effectRef idx="2">
+            <a:schemeClr val="accent1"/>
+          </a:effectRef>
+          <a:fontRef idx="minor">
+            <a:schemeClr val="lt1"/>
+          </a:fontRef>
+        </p:style>
+        <p:txBody>
+          <a:bodyPr rtlCol="0" anchor="ctr"/>
+          <a:lstStyle/>
+          <a:p>
+            <a:pPr algn="ctr"/>
+          </a:p>
+        </p:txBody>
+      </p:sp>
+      <p:sp>
+        <p:nvSpPr>
+          <p:cNvPr id="9" name="Rectangle 8"/>
+          <p:cNvSpPr/>
+          <p:nvPr/>
+        </p:nvSpPr>
+        <p:spPr>
+          <a:xfrm>
+            <a:off x="365760" y="1600200"/>
+            <a:ext cx="5669280" cy="73152"/>
+          </a:xfrm>
+          <a:prstGeom prst="rect">
+            <a:avLst/>
+          </a:prstGeom>
+          <a:solidFill>
+            <a:srgbClr val="38BDF8"/>
+          </a:solidFill>
+          <a:ln>
+            <a:noFill/>
+          </a:ln>
+        </p:spPr>
+        <p:style>
+          <a:lnRef idx="1">
+            <a:schemeClr val="accent1"/>
+          </a:lnRef>
+          <a:fillRef idx="3">
+            <a:schemeClr val="accent1"/>
+          </a:fillRef>
+          <a:effectRef idx="2">
+            <a:schemeClr val="accent1"/>
+          </a:effectRef>
+          <a:fontRef idx="minor">
+            <a:schemeClr val="lt1"/>
+          </a:fontRef>
+        </p:style>
+        <p:txBody>
+          <a:bodyPr rtlCol="0" anchor="ctr"/>
+          <a:lstStyle/>
+          <a:p>
+            <a:pPr algn="ctr"/>
+          </a:p>
+        </p:txBody>
+      </p:sp>
+      <p:sp>
+        <p:nvSpPr>
+          <p:cNvPr id="10" name="Rectangle 9"/>
+          <p:cNvSpPr/>
+          <p:nvPr/>
+        </p:nvSpPr>
+        <p:spPr>
+          <a:xfrm>
+            <a:off x="365760" y="1709928"/>
+            <a:ext cx="548640" cy="502920"/>
+          </a:xfrm>
+          <a:prstGeom prst="rect">
+            <a:avLst/>
+          </a:prstGeom>
+          <a:solidFill>
+            <a:srgbClr val="2D5A9E"/>
+          </a:solidFill>
+          <a:ln>
+            <a:noFill/>
+          </a:ln>
+        </p:spPr>
+        <p:style>
+          <a:lnRef idx="1">
+            <a:schemeClr val="accent1"/>
+          </a:lnRef>
+          <a:fillRef idx="3">
+            <a:schemeClr val="accent1"/>
+          </a:fillRef>
+          <a:effectRef idx="2">
+            <a:schemeClr val="accent1"/>
+          </a:effectRef>
+          <a:fontRef idx="minor">
+            <a:schemeClr val="lt1"/>
+          </a:fontRef>
+        </p:style>
+        <p:txBody>
+          <a:bodyPr rtlCol="0" anchor="ctr"/>
+          <a:lstStyle/>
+          <a:p>
+            <a:pPr algn="ctr"/>
+          </a:p>
+        </p:txBody>
+      </p:sp>
+      <p:sp>
+        <p:nvSpPr>
+          <p:cNvPr id="11" name="TextBox 10"/>
+          <p:cNvSpPr txBox="1"/>
+          <p:nvPr/>
+        </p:nvSpPr>
+        <p:spPr>
+          <a:xfrm>
+            <a:off x="365760" y="1709928"/>
+            <a:ext cx="548640" cy="475488"/>
+          </a:xfrm>
+          <a:prstGeom prst="rect">
+            <a:avLst/>
+          </a:prstGeom>
+          <a:noFill/>
+        </p:spPr>
+        <p:txBody>
+          <a:bodyPr wrap="square">
+            <a:spAutoFit/>
+          </a:bodyPr>
+          <a:lstStyle/>
+          <a:p>
+            <a:pPr algn="ctr"/>
+            <a:r>
+              <a:rPr sz="1300" b="1" i="0">
+                <a:solidFill>
+                  <a:srgbClr val="38BDF8"/>
+                </a:solidFill>
+              </a:rPr>
+              <a:t>Q1</a:t>
+            </a:r>
+          </a:p>
+        </p:txBody>
+      </p:sp>
+      <p:sp>
+        <p:nvSpPr>
+          <p:cNvPr id="12" name="TextBox 11"/>
+          <p:cNvSpPr txBox="1"/>
+          <p:nvPr/>
+        </p:nvSpPr>
+        <p:spPr>
+          <a:xfrm>
+            <a:off x="1005840" y="1709928"/>
+            <a:ext cx="4983480" cy="475488"/>
+          </a:xfrm>
+          <a:prstGeom prst="rect">
+            <a:avLst/>
+          </a:prstGeom>
+          <a:noFill/>
+        </p:spPr>
+        <p:txBody>
+          <a:bodyPr wrap="square">
+            <a:spAutoFit/>
+          </a:bodyPr>
+          <a:lstStyle/>
+          <a:p>
+            <a:pPr algn="l"/>
+            <a:r>
+              <a:rPr sz="1400" b="1" i="0">
+                <a:solidFill>
+                  <a:srgbClr val="FFFFFF"/>
+                </a:solidFill>
+              </a:rPr>
+              <a:t>문의는 어디에 하나요?</a:t>
+            </a:r>
+          </a:p>
+        </p:txBody>
+      </p:sp>
+      <p:sp>
+        <p:nvSpPr>
+          <p:cNvPr id="13" name="TextBox 12"/>
+          <p:cNvSpPr txBox="1"/>
+          <p:nvPr/>
+        </p:nvSpPr>
+        <p:spPr>
+          <a:xfrm>
+            <a:off x="1005840" y="2240280"/>
+            <a:ext cx="4983480" cy="685800"/>
+          </a:xfrm>
+          <a:prstGeom prst="rect">
+            <a:avLst/>
+          </a:prstGeom>
+          <a:noFill/>
+        </p:spPr>
+        <p:txBody>
+          <a:bodyPr wrap="square">
+            <a:spAutoFit/>
+          </a:bodyPr>
+          <a:lstStyle/>
+          <a:p>
+            <a:pPr algn="l"/>
+            <a:r>
+              <a:rPr sz="1200" b="0" i="0">
+                <a:solidFill>
+                  <a:srgbClr val="60A5FA"/>
+                </a:solidFill>
+              </a:rPr>
+              <a:t>Knoxportal@samsung.com 으로 이메일 문의</a:t>
+            </a:r>
+          </a:p>
+        </p:txBody>
+      </p:sp>
+      <p:sp>
+        <p:nvSpPr>
+          <p:cNvPr id="14" name="Rectangle 13"/>
+          <p:cNvSpPr/>
+          <p:nvPr/>
+        </p:nvSpPr>
+        <p:spPr>
+          <a:xfrm>
+            <a:off x="365760" y="3246120"/>
+            <a:ext cx="5669280" cy="1417320"/>
+          </a:xfrm>
+          <a:prstGeom prst="rect">
+            <a:avLst/>
+          </a:prstGeom>
+          <a:solidFill>
+            <a:srgbClr val="1E3A6E"/>
+          </a:solidFill>
+          <a:ln>
+            <a:noFill/>
+          </a:ln>
+        </p:spPr>
+        <p:style>
+          <a:lnRef idx="1">
+            <a:schemeClr val="accent1"/>
+          </a:lnRef>
+          <a:fillRef idx="3">
+            <a:schemeClr val="accent1"/>
+          </a:fillRef>
+          <a:effectRef idx="2">
+            <a:schemeClr val="accent1"/>
+          </a:effectRef>
+          <a:fontRef idx="minor">
+            <a:schemeClr val="lt1"/>
+          </a:fontRef>
+        </p:style>
+        <p:txBody>
+          <a:bodyPr rtlCol="0" anchor="ctr"/>
+          <a:lstStyle/>
+          <a:p>
+            <a:pPr algn="ctr"/>
+          </a:p>
+        </p:txBody>
+      </p:sp>
+      <p:sp>
+        <p:nvSpPr>
+          <p:cNvPr id="15" name="Rectangle 14"/>
+          <p:cNvSpPr/>
+          <p:nvPr/>
+        </p:nvSpPr>
+        <p:spPr>
+          <a:xfrm>
+            <a:off x="365760" y="3246120"/>
+            <a:ext cx="5669280" cy="73152"/>
+          </a:xfrm>
+          <a:prstGeom prst="rect">
+            <a:avLst/>
+          </a:prstGeom>
+          <a:solidFill>
+            <a:srgbClr val="38BDF8"/>
+          </a:solidFill>
+          <a:ln>
+            <a:noFill/>
+          </a:ln>
+        </p:spPr>
+        <p:style>
+          <a:lnRef idx="1">
+            <a:schemeClr val="accent1"/>
+          </a:lnRef>
+          <a:fillRef idx="3">
+            <a:schemeClr val="accent1"/>
+          </a:fillRef>
+          <a:effectRef idx="2">
+            <a:schemeClr val="accent1"/>
+          </a:effectRef>
+          <a:fontRef idx="minor">
+            <a:schemeClr val="lt1"/>
+          </a:fontRef>
+        </p:style>
+        <p:txBody>
+          <a:bodyPr rtlCol="0" anchor="ctr"/>
+          <a:lstStyle/>
+          <a:p>
+            <a:pPr algn="ctr"/>
+          </a:p>
+        </p:txBody>
+      </p:sp>
+      <p:sp>
+        <p:nvSpPr>
+          <p:cNvPr id="16" name="Rectangle 15"/>
+          <p:cNvSpPr/>
+          <p:nvPr/>
+        </p:nvSpPr>
+        <p:spPr>
+          <a:xfrm>
+            <a:off x="365760" y="3355848"/>
+            <a:ext cx="548640" cy="502920"/>
+          </a:xfrm>
+          <a:prstGeom prst="rect">
+            <a:avLst/>
+          </a:prstGeom>
+          <a:solidFill>
+            <a:srgbClr val="2D5A9E"/>
+          </a:solidFill>
+          <a:ln>
+            <a:noFill/>
+          </a:ln>
+        </p:spPr>
+        <p:style>
+          <a:lnRef idx="1">
+            <a:schemeClr val="accent1"/>
+          </a:lnRef>
+          <a:fillRef idx="3">
+            <a:schemeClr val="accent1"/>
+          </a:fillRef>
+          <a:effectRef idx="2">
+            <a:schemeClr val="accent1"/>
+          </a:effectRef>
+          <a:fontRef idx="minor">
+            <a:schemeClr val="lt1"/>
+          </a:fontRef>
+        </p:style>
+        <p:txBody>
+          <a:bodyPr rtlCol="0" anchor="ctr"/>
+          <a:lstStyle/>
+          <a:p>
+            <a:pPr algn="ctr"/>
+          </a:p>
+        </p:txBody>
+      </p:sp>
+      <p:sp>
+        <p:nvSpPr>
+          <p:cNvPr id="17" name="TextBox 16"/>
+          <p:cNvSpPr txBox="1"/>
+          <p:nvPr/>
+        </p:nvSpPr>
+        <p:spPr>
+          <a:xfrm>
+            <a:off x="365760" y="3355848"/>
+            <a:ext cx="548640" cy="475488"/>
+          </a:xfrm>
+          <a:prstGeom prst="rect">
+            <a:avLst/>
+          </a:prstGeom>
+          <a:noFill/>
+        </p:spPr>
+        <p:txBody>
+          <a:bodyPr wrap="square">
+            <a:spAutoFit/>
+          </a:bodyPr>
+          <a:lstStyle/>
+          <a:p>
+            <a:pPr algn="ctr"/>
+            <a:r>
+              <a:rPr sz="1300" b="1" i="0">
+                <a:solidFill>
+                  <a:srgbClr val="38BDF8"/>
+                </a:solidFill>
+              </a:rPr>
+              <a:t>Q2</a:t>
+            </a:r>
+          </a:p>
+        </p:txBody>
+      </p:sp>
+      <p:sp>
+        <p:nvSpPr>
+          <p:cNvPr id="18" name="TextBox 17"/>
+          <p:cNvSpPr txBox="1"/>
+          <p:nvPr/>
+        </p:nvSpPr>
+        <p:spPr>
+          <a:xfrm>
+            <a:off x="1005840" y="3355848"/>
+            <a:ext cx="4983480" cy="475488"/>
+          </a:xfrm>
+          <a:prstGeom prst="rect">
+            <a:avLst/>
+          </a:prstGeom>
+          <a:noFill/>
+        </p:spPr>
+        <p:txBody>
+          <a:bodyPr wrap="square">
+            <a:spAutoFit/>
+          </a:bodyPr>
+          <a:lstStyle/>
+          <a:p>
+            <a:pPr algn="l"/>
+            <a:r>
+              <a:rPr sz="1400" b="1" i="0">
+                <a:solidFill>
+                  <a:srgbClr val="FFFFFF"/>
+                </a:solidFill>
+              </a:rPr>
+              <a:t>Knox Support는 어떻게 사용하나요?</a:t>
+            </a:r>
+          </a:p>
+        </p:txBody>
+      </p:sp>
+      <p:sp>
+        <p:nvSpPr>
+          <p:cNvPr id="19" name="TextBox 18"/>
+          <p:cNvSpPr txBox="1"/>
+          <p:nvPr/>
+        </p:nvSpPr>
+        <p:spPr>
+          <a:xfrm>
+            <a:off x="1005840" y="3886200"/>
+            <a:ext cx="4983480" cy="685800"/>
+          </a:xfrm>
+          <a:prstGeom prst="rect">
+            <a:avLst/>
+          </a:prstGeom>
+          <a:noFill/>
+        </p:spPr>
+        <p:txBody>
+          <a:bodyPr wrap="square">
+            <a:spAutoFit/>
+          </a:bodyPr>
+          <a:lstStyle/>
+          <a:p>
+            <a:pPr algn="l"/>
+            <a:r>
+              <a:rPr sz="1200" b="0" i="0">
+                <a:solidFill>
+                  <a:srgbClr val="60A5FA"/>
+                </a:solidFill>
+              </a:rPr>
+              <a:t>Knox Portal 화면 내 프로필 왼편  ❓  → Knox Support 진입
+Teams 메뉴에서 검색 및 문의 업로드 가능</a:t>
+            </a:r>
+          </a:p>
+        </p:txBody>
+      </p:sp>
+      <p:sp>
+        <p:nvSpPr>
+          <p:cNvPr id="20" name="Rectangle 19"/>
+          <p:cNvSpPr/>
+          <p:nvPr/>
+        </p:nvSpPr>
+        <p:spPr>
+          <a:xfrm>
+            <a:off x="6492240" y="1600200"/>
+            <a:ext cx="5394960" cy="4846320"/>
+          </a:xfrm>
+          <a:prstGeom prst="rect">
+            <a:avLst/>
+          </a:prstGeom>
+          <a:solidFill>
+            <a:srgbClr val="12223A"/>
+          </a:solidFill>
+          <a:ln w="19050">
+            <a:solidFill>
+              <a:srgbClr val="60A5FA"/>
+            </a:solidFill>
+          </a:ln>
+        </p:spPr>
+        <p:style>
+          <a:lnRef idx="1">
+            <a:schemeClr val="accent1"/>
+          </a:lnRef>
+          <a:fillRef idx="3">
+            <a:schemeClr val="accent1"/>
+          </a:fillRef>
+          <a:effectRef idx="2">
+            <a:schemeClr val="accent1"/>
+          </a:effectRef>
+          <a:fontRef idx="minor">
+            <a:schemeClr val="lt1"/>
+          </a:fontRef>
+        </p:style>
+        <p:txBody>
+          <a:bodyPr rtlCol="0" anchor="ctr"/>
+          <a:lstStyle/>
+          <a:p>
+            <a:pPr algn="ctr"/>
+          </a:p>
+        </p:txBody>
+      </p:sp>
+      <p:sp>
+        <p:nvSpPr>
+          <p:cNvPr id="21" name="TextBox 20"/>
+          <p:cNvSpPr txBox="1"/>
+          <p:nvPr/>
+        </p:nvSpPr>
+        <p:spPr>
+          <a:xfrm>
+            <a:off x="6492240" y="3703320"/>
+            <a:ext cx="5394960" cy="640080"/>
+          </a:xfrm>
+          <a:prstGeom prst="rect">
+            <a:avLst/>
+          </a:prstGeom>
+          <a:noFill/>
+        </p:spPr>
+        <p:txBody>
+          <a:bodyPr wrap="square">
+            <a:spAutoFit/>
+          </a:bodyPr>
+          <a:lstStyle/>
+          <a:p>
+            <a:pPr algn="ctr"/>
+            <a:r>
+              <a:rPr sz="1500" b="1" i="0">
+                <a:solidFill>
+                  <a:srgbClr val="60A5FA"/>
+                </a:solidFill>
+              </a:rPr>
+              <a:t>📷   Knox Support 화면 캡쳐</a:t>
+            </a:r>
+          </a:p>
+        </p:txBody>
+      </p:sp>
+      <p:sp>
+        <p:nvSpPr>
+          <p:cNvPr id="22" name="TextBox 21"/>
+          <p:cNvSpPr txBox="1"/>
+          <p:nvPr/>
+        </p:nvSpPr>
+        <p:spPr>
+          <a:xfrm>
+            <a:off x="457200" y="5029200"/>
+            <a:ext cx="5486400" cy="457200"/>
+          </a:xfrm>
+          <a:prstGeom prst="rect">
+            <a:avLst/>
+          </a:prstGeom>
+          <a:noFill/>
+        </p:spPr>
+        <p:txBody>
+          <a:bodyPr wrap="square">
+            <a:spAutoFit/>
+          </a:bodyPr>
+          <a:lstStyle/>
+          <a:p>
+            <a:pPr algn="l"/>
+            <a:r>
+              <a:rPr sz="1400" b="1" i="0">
+                <a:solidFill>
+                  <a:srgbClr val="38BDF8"/>
+                </a:solidFill>
+              </a:rPr>
+              <a:t>Knoxportal@samsung.com</a:t>
+            </a:r>
+          </a:p>
+        </p:txBody>
+      </p:sp>
+      <p:sp>
+        <p:nvSpPr>
+          <p:cNvPr id="23" name="Rectangle 22"/>
+          <p:cNvSpPr/>
+          <p:nvPr/>
+        </p:nvSpPr>
+        <p:spPr>
+          <a:xfrm>
+            <a:off x="365760" y="5577840"/>
+            <a:ext cx="5943600" cy="457200"/>
+          </a:xfrm>
+          <a:prstGeom prst="rect">
+            <a:avLst/>
+          </a:prstGeom>
+          <a:solidFill>
+            <a:srgbClr val="1E293B"/>
+          </a:solidFill>
+          <a:ln>
+            <a:noFill/>
+          </a:ln>
+        </p:spPr>
+        <p:style>
+          <a:lnRef idx="1">
+            <a:schemeClr val="accent1"/>
+          </a:lnRef>
+          <a:fillRef idx="3">
+            <a:schemeClr val="accent1"/>
+          </a:fillRef>
+          <a:effectRef idx="2">
+            <a:schemeClr val="accent1"/>
+          </a:effectRef>
+          <a:fontRef idx="minor">
+            <a:schemeClr val="lt1"/>
+          </a:fontRef>
+        </p:style>
+        <p:txBody>
+          <a:bodyPr rtlCol="0" anchor="ctr"/>
+          <a:lstStyle/>
+          <a:p>
+            <a:pPr algn="ctr"/>
+          </a:p>
+        </p:txBody>
+      </p:sp>
+      <p:sp>
+        <p:nvSpPr>
+          <p:cNvPr id="24" name="Rectangle 23"/>
+          <p:cNvSpPr/>
+          <p:nvPr/>
+        </p:nvSpPr>
+        <p:spPr>
+          <a:xfrm>
+            <a:off x="365760" y="5577840"/>
+            <a:ext cx="54864" cy="457200"/>
+          </a:xfrm>
+          <a:prstGeom prst="rect">
+            <a:avLst/>
+          </a:prstGeom>
+          <a:solidFill>
+            <a:srgbClr val="60A5FA"/>
+          </a:solidFill>
+          <a:ln>
+            <a:noFill/>
+          </a:ln>
+        </p:spPr>
+        <p:style>
+          <a:lnRef idx="1">
+            <a:schemeClr val="accent1"/>
+          </a:lnRef>
+          <a:fillRef idx="3">
+            <a:schemeClr val="accent1"/>
+          </a:fillRef>
+          <a:effectRef idx="2">
+            <a:schemeClr val="accent1"/>
+          </a:effectRef>
+          <a:fontRef idx="minor">
+            <a:schemeClr val="lt1"/>
+          </a:fontRef>
+        </p:style>
+        <p:txBody>
+          <a:bodyPr rtlCol="0" anchor="ctr"/>
+          <a:lstStyle/>
+          <a:p>
+            <a:pPr algn="ctr"/>
+          </a:p>
+        </p:txBody>
+      </p:sp>
+      <p:sp>
+        <p:nvSpPr>
+          <p:cNvPr id="25" name="TextBox 24"/>
+          <p:cNvSpPr txBox="1"/>
+          <p:nvPr/>
+        </p:nvSpPr>
+        <p:spPr>
+          <a:xfrm>
+            <a:off x="502920" y="5632704"/>
+            <a:ext cx="5760720" cy="365760"/>
+          </a:xfrm>
+          <a:prstGeom prst="rect">
+            <a:avLst/>
+          </a:prstGeom>
+          <a:noFill/>
+        </p:spPr>
+        <p:txBody>
+          <a:bodyPr wrap="square">
+            <a:spAutoFit/>
+          </a:bodyPr>
+          <a:lstStyle/>
+          <a:p>
+            <a:pPr algn="l"/>
+            <a:r>
+              <a:rPr sz="1100" b="0" i="0">
+                <a:solidFill>
+                  <a:srgbClr val="FFFFFF"/>
+                </a:solidFill>
+              </a:rPr>
+              <a:t>💡 Knox Portal 내 물음표(?) 버튼 → Knox Support → Teams 메뉴</a:t>
+            </a:r>
+          </a:p>
+        </p:txBody>
+      </p:sp>
+    </p:spTree>
+  </p:cSld>
+  <p:clrMapOvr>
+    <a:masterClrMapping/>
+  </p:clrMapOvr>
+</p:sld>
+</file>
+
 <file path=ppt/slides/slide2.xml><?xml version="1.0" encoding="utf-8"?>
 <p:sld xmlns:a="http://schemas.openxmlformats.org/drawingml/2006/main" xmlns:p="http://schemas.openxmlformats.org/presentationml/2006/main" xmlns:r="http://schemas.openxmlformats.org/officeDocument/2006/relationships">
   <p:cSld>
@@ -13643,7 +14589,7 @@
                   <a:srgbClr val="38BDF8"/>
                 </a:solidFill>
               </a:rPr>
-              <a:t>STEP 05</a:t>
+              <a:t>STEP 04</a:t>
             </a:r>
           </a:p>
         </p:txBody>
@@ -13677,7 +14623,7 @@
                   <a:srgbClr val="FFFFFF"/>
                 </a:solidFill>
               </a:rPr>
-              <a:t>FAQ</a:t>
+              <a:t>Adaptive Card &amp; 파일 전송 예제</a:t>
             </a:r>
           </a:p>
         </p:txBody>
@@ -13711,7 +14657,7 @@
                   <a:srgbClr val="60A5FA"/>
                 </a:solidFill>
               </a:rPr>
-              <a:t>궁금한 점이 있을 때 참고하세요</a:t>
+              <a:t>카드 메시지로 링크 버튼을 포함한 알림을 보내고, PDF 파일도 직접 전송할 수 있습니다</a:t>
             </a:r>
           </a:p>
         </p:txBody>
@@ -13767,14 +14713,14 @@
         </p:nvSpPr>
         <p:spPr>
           <a:xfrm>
-            <a:off x="365760" y="1600200"/>
-            <a:ext cx="5669280" cy="1417320"/>
-          </a:xfrm>
-          <a:prstGeom prst="rect">
-            <a:avLst/>
-          </a:prstGeom>
-          <a:solidFill>
-            <a:srgbClr val="1E3A6E"/>
+            <a:off x="365760" y="1508760"/>
+            <a:ext cx="5577840" cy="292608"/>
+          </a:xfrm>
+          <a:prstGeom prst="rect">
+            <a:avLst/>
+          </a:prstGeom>
+          <a:solidFill>
+            <a:srgbClr val="14536E"/>
           </a:solidFill>
           <a:ln>
             <a:noFill/>
@@ -13804,20 +14750,54 @@
       </p:sp>
       <p:sp>
         <p:nvSpPr>
-          <p:cNvPr id="9" name="Rectangle 8"/>
+          <p:cNvPr id="9" name="TextBox 8"/>
+          <p:cNvSpPr txBox="1"/>
+          <p:nvPr/>
+        </p:nvSpPr>
+        <p:spPr>
+          <a:xfrm>
+            <a:off x="365760" y="1508760"/>
+            <a:ext cx="5577840" cy="292608"/>
+          </a:xfrm>
+          <a:prstGeom prst="rect">
+            <a:avLst/>
+          </a:prstGeom>
+          <a:noFill/>
+        </p:spPr>
+        <p:txBody>
+          <a:bodyPr wrap="square">
+            <a:spAutoFit/>
+          </a:bodyPr>
+          <a:lstStyle/>
+          <a:p>
+            <a:pPr algn="l"/>
+            <a:r>
+              <a:rPr sz="1100" b="1" i="0">
+                <a:solidFill>
+                  <a:srgbClr val="FFFFFF"/>
+                </a:solidFill>
+              </a:rPr>
+              <a:t>  📋  Adaptive Card 발신 (링크 버튼 포함)</a:t>
+            </a:r>
+          </a:p>
+        </p:txBody>
+      </p:sp>
+      <p:sp>
+        <p:nvSpPr>
+          <p:cNvPr id="10" name="Rectangle 9"/>
           <p:cNvSpPr/>
           <p:nvPr/>
         </p:nvSpPr>
         <p:spPr>
           <a:xfrm>
-            <a:off x="365760" y="1600200"/>
-            <a:ext cx="5669280" cy="73152"/>
-          </a:xfrm>
-          <a:prstGeom prst="rect">
-            <a:avLst/>
-          </a:prstGeom>
-          <a:solidFill>
-            <a:srgbClr val="38BDF8"/>
+            <a:off x="365760" y="1801368"/>
+            <a:ext cx="5577840" cy="2971800"/>
+          </a:xfrm>
+          <a:prstGeom prst="rect">
+            <a:avLst/>
+          </a:prstGeom>
+          <a:solidFill>
+            <a:srgbClr val="1E293B"/>
           </a:solidFill>
           <a:ln>
             <a:noFill/>
@@ -13847,20 +14827,20 @@
       </p:sp>
       <p:sp>
         <p:nvSpPr>
-          <p:cNvPr id="10" name="Rectangle 9"/>
+          <p:cNvPr id="11" name="Rectangle 10"/>
           <p:cNvSpPr/>
           <p:nvPr/>
         </p:nvSpPr>
         <p:spPr>
           <a:xfrm>
-            <a:off x="365760" y="1709928"/>
-            <a:ext cx="548640" cy="502920"/>
-          </a:xfrm>
-          <a:prstGeom prst="rect">
-            <a:avLst/>
-          </a:prstGeom>
-          <a:solidFill>
-            <a:srgbClr val="2D5A9E"/>
+            <a:off x="365760" y="1801368"/>
+            <a:ext cx="45720" cy="2971800"/>
+          </a:xfrm>
+          <a:prstGeom prst="rect">
+            <a:avLst/>
+          </a:prstGeom>
+          <a:solidFill>
+            <a:srgbClr val="38BDF8"/>
           </a:solidFill>
           <a:ln>
             <a:noFill/>
@@ -13890,48 +14870,14 @@
       </p:sp>
       <p:sp>
         <p:nvSpPr>
-          <p:cNvPr id="11" name="TextBox 10"/>
-          <p:cNvSpPr txBox="1"/>
-          <p:nvPr/>
-        </p:nvSpPr>
-        <p:spPr>
-          <a:xfrm>
-            <a:off x="365760" y="1709928"/>
-            <a:ext cx="548640" cy="475488"/>
-          </a:xfrm>
-          <a:prstGeom prst="rect">
-            <a:avLst/>
-          </a:prstGeom>
-          <a:noFill/>
-        </p:spPr>
-        <p:txBody>
-          <a:bodyPr wrap="square">
-            <a:spAutoFit/>
-          </a:bodyPr>
-          <a:lstStyle/>
-          <a:p>
-            <a:pPr algn="ctr"/>
-            <a:r>
-              <a:rPr sz="1300" b="1" i="0">
-                <a:solidFill>
-                  <a:srgbClr val="38BDF8"/>
-                </a:solidFill>
-              </a:rPr>
-              <a:t>Q1</a:t>
-            </a:r>
-          </a:p>
-        </p:txBody>
-      </p:sp>
-      <p:sp>
-        <p:nvSpPr>
           <p:cNvPr id="12" name="TextBox 11"/>
           <p:cNvSpPr txBox="1"/>
           <p:nvPr/>
         </p:nvSpPr>
         <p:spPr>
           <a:xfrm>
-            <a:off x="1005840" y="1709928"/>
-            <a:ext cx="4983480" cy="475488"/>
+            <a:off x="475488" y="1847088"/>
+            <a:ext cx="5413248" cy="2907792"/>
           </a:xfrm>
           <a:prstGeom prst="rect">
             <a:avLst/>
@@ -13946,66 +14892,48 @@
           <a:p>
             <a:pPr algn="l"/>
             <a:r>
-              <a:rPr sz="1400" b="1" i="0">
-                <a:solidFill>
-                  <a:srgbClr val="FFFFFF"/>
-                </a:solidFill>
-              </a:rPr>
-              <a:t>문의는 어디에 하나요?</a:t>
-            </a:r>
-          </a:p>
-        </p:txBody>
-      </p:sp>
-      <p:sp>
-        <p:nvSpPr>
-          <p:cNvPr id="13" name="TextBox 12"/>
-          <p:cNvSpPr txBox="1"/>
-          <p:nvPr/>
-        </p:nvSpPr>
-        <p:spPr>
-          <a:xfrm>
-            <a:off x="1005840" y="2240280"/>
-            <a:ext cx="4983480" cy="685800"/>
-          </a:xfrm>
-          <a:prstGeom prst="rect">
-            <a:avLst/>
-          </a:prstGeom>
-          <a:noFill/>
-        </p:spPr>
-        <p:txBody>
-          <a:bodyPr wrap="square">
-            <a:spAutoFit/>
-          </a:bodyPr>
-          <a:lstStyle/>
-          <a:p>
-            <a:pPr algn="l"/>
-            <a:r>
-              <a:rPr sz="1200" b="0" i="0">
-                <a:solidFill>
-                  <a:srgbClr val="60A5FA"/>
-                </a:solidFill>
-              </a:rPr>
-              <a:t>Knoxportal@samsung.com 으로 이메일 문의</a:t>
-            </a:r>
-          </a:p>
-        </p:txBody>
-      </p:sp>
-      <p:sp>
-        <p:nvSpPr>
-          <p:cNvPr id="14" name="Rectangle 13"/>
+              <a:rPr sz="950" b="0" i="0">
+                <a:solidFill>
+                  <a:srgbClr val="93C5FD"/>
+                </a:solidFill>
+              </a:rPr>
+              <a:t>res = requests.post(
+    f"{BASE}/messenger/bot/v1/message",
+    headers={**headers, "x-device-id": device_id},
+    json={
+        "roomId": room_id,
+        "messageType": "CARD",
+        "cardTitle": "FA 분석 결과",
+        "cardContent": "SN: R3CX1234...\n이상 항목: 3건",
+        "cardButtonList": [
+            {
+                "buttonType": "LINK",
+                "buttonText": "결과 보기",
+                "buttonValue": "http://10.246.9.74/result",
+            },
+        ],
+    },
+)</a:t>
+            </a:r>
+          </a:p>
+        </p:txBody>
+      </p:sp>
+      <p:sp>
+        <p:nvSpPr>
+          <p:cNvPr id="13" name="Rectangle 12"/>
           <p:cNvSpPr/>
           <p:nvPr/>
         </p:nvSpPr>
         <p:spPr>
           <a:xfrm>
-            <a:off x="365760" y="3246120"/>
-            <a:ext cx="5669280" cy="1417320"/>
-          </a:xfrm>
-          <a:prstGeom prst="rect">
-            <a:avLst/>
-          </a:prstGeom>
-          <a:solidFill>
-            <a:srgbClr val="1E3A6E"/>
+            <a:off x="365760" y="4892040"/>
+            <a:ext cx="5577840" cy="457200"/>
+          </a:xfrm>
+          <a:prstGeom prst="rect">
+            <a:avLst/>
+          </a:prstGeom>
+          <a:solidFill>
+            <a:srgbClr val="1E293B"/>
           </a:solidFill>
           <a:ln>
             <a:noFill/>
@@ -14035,20 +14963,20 @@
       </p:sp>
       <p:sp>
         <p:nvSpPr>
-          <p:cNvPr id="15" name="Rectangle 14"/>
+          <p:cNvPr id="14" name="Rectangle 13"/>
           <p:cNvSpPr/>
           <p:nvPr/>
         </p:nvSpPr>
         <p:spPr>
           <a:xfrm>
-            <a:off x="365760" y="3246120"/>
-            <a:ext cx="5669280" cy="73152"/>
-          </a:xfrm>
-          <a:prstGeom prst="rect">
-            <a:avLst/>
-          </a:prstGeom>
-          <a:solidFill>
-            <a:srgbClr val="38BDF8"/>
+            <a:off x="365760" y="4892040"/>
+            <a:ext cx="54864" cy="457200"/>
+          </a:xfrm>
+          <a:prstGeom prst="rect">
+            <a:avLst/>
+          </a:prstGeom>
+          <a:solidFill>
+            <a:srgbClr val="60A5FA"/>
           </a:solidFill>
           <a:ln>
             <a:noFill/>
@@ -14078,20 +15006,54 @@
       </p:sp>
       <p:sp>
         <p:nvSpPr>
+          <p:cNvPr id="15" name="TextBox 14"/>
+          <p:cNvSpPr txBox="1"/>
+          <p:nvPr/>
+        </p:nvSpPr>
+        <p:spPr>
+          <a:xfrm>
+            <a:off x="502920" y="4946904"/>
+            <a:ext cx="5394960" cy="365760"/>
+          </a:xfrm>
+          <a:prstGeom prst="rect">
+            <a:avLst/>
+          </a:prstGeom>
+          <a:noFill/>
+        </p:spPr>
+        <p:txBody>
+          <a:bodyPr wrap="square">
+            <a:spAutoFit/>
+          </a:bodyPr>
+          <a:lstStyle/>
+          <a:p>
+            <a:pPr algn="l"/>
+            <a:r>
+              <a:rPr sz="1100" b="0" i="0">
+                <a:solidFill>
+                  <a:srgbClr val="FFFFFF"/>
+                </a:solidFill>
+              </a:rPr>
+              <a:t>💡 cardButtonList 에 버튼 여러 개 추가 가능 (LINK / 전화 / 위치 등)</a:t>
+            </a:r>
+          </a:p>
+        </p:txBody>
+      </p:sp>
+      <p:sp>
+        <p:nvSpPr>
           <p:cNvPr id="16" name="Rectangle 15"/>
           <p:cNvSpPr/>
           <p:nvPr/>
         </p:nvSpPr>
         <p:spPr>
           <a:xfrm>
-            <a:off x="365760" y="3355848"/>
-            <a:ext cx="548640" cy="502920"/>
-          </a:xfrm>
-          <a:prstGeom prst="rect">
-            <a:avLst/>
-          </a:prstGeom>
-          <a:solidFill>
-            <a:srgbClr val="2D5A9E"/>
+            <a:off x="365760" y="5458968"/>
+            <a:ext cx="5577840" cy="457200"/>
+          </a:xfrm>
+          <a:prstGeom prst="rect">
+            <a:avLst/>
+          </a:prstGeom>
+          <a:solidFill>
+            <a:srgbClr val="1E293B"/>
           </a:solidFill>
           <a:ln>
             <a:noFill/>
@@ -14121,128 +15083,23 @@
       </p:sp>
       <p:sp>
         <p:nvSpPr>
-          <p:cNvPr id="17" name="TextBox 16"/>
-          <p:cNvSpPr txBox="1"/>
-          <p:nvPr/>
-        </p:nvSpPr>
-        <p:spPr>
-          <a:xfrm>
-            <a:off x="365760" y="3355848"/>
-            <a:ext cx="548640" cy="475488"/>
-          </a:xfrm>
-          <a:prstGeom prst="rect">
-            <a:avLst/>
-          </a:prstGeom>
-          <a:noFill/>
-        </p:spPr>
-        <p:txBody>
-          <a:bodyPr wrap="square">
-            <a:spAutoFit/>
-          </a:bodyPr>
-          <a:lstStyle/>
-          <a:p>
-            <a:pPr algn="ctr"/>
-            <a:r>
-              <a:rPr sz="1300" b="1" i="0">
-                <a:solidFill>
-                  <a:srgbClr val="38BDF8"/>
-                </a:solidFill>
-              </a:rPr>
-              <a:t>Q2</a:t>
-            </a:r>
-          </a:p>
-        </p:txBody>
-      </p:sp>
-      <p:sp>
-        <p:nvSpPr>
-          <p:cNvPr id="18" name="TextBox 17"/>
-          <p:cNvSpPr txBox="1"/>
-          <p:nvPr/>
-        </p:nvSpPr>
-        <p:spPr>
-          <a:xfrm>
-            <a:off x="1005840" y="3355848"/>
-            <a:ext cx="4983480" cy="475488"/>
-          </a:xfrm>
-          <a:prstGeom prst="rect">
-            <a:avLst/>
-          </a:prstGeom>
-          <a:noFill/>
-        </p:spPr>
-        <p:txBody>
-          <a:bodyPr wrap="square">
-            <a:spAutoFit/>
-          </a:bodyPr>
-          <a:lstStyle/>
-          <a:p>
-            <a:pPr algn="l"/>
-            <a:r>
-              <a:rPr sz="1400" b="1" i="0">
-                <a:solidFill>
-                  <a:srgbClr val="FFFFFF"/>
-                </a:solidFill>
-              </a:rPr>
-              <a:t>Knox Support는 어떻게 사용하나요?</a:t>
-            </a:r>
-          </a:p>
-        </p:txBody>
-      </p:sp>
-      <p:sp>
-        <p:nvSpPr>
-          <p:cNvPr id="19" name="TextBox 18"/>
-          <p:cNvSpPr txBox="1"/>
-          <p:nvPr/>
-        </p:nvSpPr>
-        <p:spPr>
-          <a:xfrm>
-            <a:off x="1005840" y="3886200"/>
-            <a:ext cx="4983480" cy="685800"/>
-          </a:xfrm>
-          <a:prstGeom prst="rect">
-            <a:avLst/>
-          </a:prstGeom>
-          <a:noFill/>
-        </p:spPr>
-        <p:txBody>
-          <a:bodyPr wrap="square">
-            <a:spAutoFit/>
-          </a:bodyPr>
-          <a:lstStyle/>
-          <a:p>
-            <a:pPr algn="l"/>
-            <a:r>
-              <a:rPr sz="1200" b="0" i="0">
-                <a:solidFill>
-                  <a:srgbClr val="60A5FA"/>
-                </a:solidFill>
-              </a:rPr>
-              <a:t>Knox Portal 화면 내 프로필 왼편  ❓  → Knox Support 진입
-Teams 메뉴에서 검색 및 문의 업로드 가능</a:t>
-            </a:r>
-          </a:p>
-        </p:txBody>
-      </p:sp>
-      <p:sp>
-        <p:nvSpPr>
-          <p:cNvPr id="20" name="Rectangle 19"/>
+          <p:cNvPr id="17" name="Rectangle 16"/>
           <p:cNvSpPr/>
           <p:nvPr/>
         </p:nvSpPr>
         <p:spPr>
           <a:xfrm>
-            <a:off x="6492240" y="1600200"/>
-            <a:ext cx="5394960" cy="4846320"/>
-          </a:xfrm>
-          <a:prstGeom prst="rect">
-            <a:avLst/>
-          </a:prstGeom>
-          <a:solidFill>
-            <a:srgbClr val="12223A"/>
-          </a:solidFill>
-          <a:ln w="19050">
-            <a:solidFill>
-              <a:srgbClr val="60A5FA"/>
-            </a:solidFill>
+            <a:off x="365760" y="5458968"/>
+            <a:ext cx="54864" cy="457200"/>
+          </a:xfrm>
+          <a:prstGeom prst="rect">
+            <a:avLst/>
+          </a:prstGeom>
+          <a:solidFill>
+            <a:srgbClr val="64748B"/>
+          </a:solidFill>
+          <a:ln>
+            <a:noFill/>
           </a:ln>
         </p:spPr>
         <p:style>
@@ -14269,48 +15126,14 @@
       </p:sp>
       <p:sp>
         <p:nvSpPr>
-          <p:cNvPr id="21" name="TextBox 20"/>
-          <p:cNvSpPr txBox="1"/>
-          <p:nvPr/>
-        </p:nvSpPr>
-        <p:spPr>
-          <a:xfrm>
-            <a:off x="6492240" y="3703320"/>
-            <a:ext cx="5394960" cy="640080"/>
-          </a:xfrm>
-          <a:prstGeom prst="rect">
-            <a:avLst/>
-          </a:prstGeom>
-          <a:noFill/>
-        </p:spPr>
-        <p:txBody>
-          <a:bodyPr wrap="square">
-            <a:spAutoFit/>
-          </a:bodyPr>
-          <a:lstStyle/>
-          <a:p>
-            <a:pPr algn="ctr"/>
-            <a:r>
-              <a:rPr sz="1500" b="1" i="0">
-                <a:solidFill>
-                  <a:srgbClr val="60A5FA"/>
-                </a:solidFill>
-              </a:rPr>
-              <a:t>📷   Knox Support 화면 캡쳐</a:t>
-            </a:r>
-          </a:p>
-        </p:txBody>
-      </p:sp>
-      <p:sp>
-        <p:nvSpPr>
-          <p:cNvPr id="22" name="TextBox 21"/>
-          <p:cNvSpPr txBox="1"/>
-          <p:nvPr/>
-        </p:nvSpPr>
-        <p:spPr>
-          <a:xfrm>
-            <a:off x="457200" y="5029200"/>
-            <a:ext cx="5486400" cy="457200"/>
+          <p:cNvPr id="18" name="TextBox 17"/>
+          <p:cNvSpPr txBox="1"/>
+          <p:nvPr/>
+        </p:nvSpPr>
+        <p:spPr>
+          <a:xfrm>
+            <a:off x="502920" y="5513832"/>
+            <a:ext cx="5394960" cy="365760"/>
           </a:xfrm>
           <a:prstGeom prst="rect">
             <a:avLst/>
@@ -14325,32 +15148,32 @@
           <a:p>
             <a:pPr algn="l"/>
             <a:r>
-              <a:rPr sz="1400" b="1" i="0">
-                <a:solidFill>
-                  <a:srgbClr val="38BDF8"/>
-                </a:solidFill>
-              </a:rPr>
-              <a:t>Knoxportal@samsung.com</a:t>
-            </a:r>
-          </a:p>
-        </p:txBody>
-      </p:sp>
-      <p:sp>
-        <p:nvSpPr>
-          <p:cNvPr id="23" name="Rectangle 22"/>
+              <a:rPr sz="1100" b="0" i="0">
+                <a:solidFill>
+                  <a:srgbClr val="FFFFFF"/>
+                </a:solidFill>
+              </a:rPr>
+              <a:t>📌 cardContent 줄바꿈:  \n  사용 (실제 문자열에서 \\n → \n)</a:t>
+            </a:r>
+          </a:p>
+        </p:txBody>
+      </p:sp>
+      <p:sp>
+        <p:nvSpPr>
+          <p:cNvPr id="19" name="Rectangle 18"/>
           <p:cNvSpPr/>
           <p:nvPr/>
         </p:nvSpPr>
         <p:spPr>
           <a:xfrm>
-            <a:off x="365760" y="5577840"/>
-            <a:ext cx="5943600" cy="457200"/>
-          </a:xfrm>
-          <a:prstGeom prst="rect">
-            <a:avLst/>
-          </a:prstGeom>
-          <a:solidFill>
-            <a:srgbClr val="1E293B"/>
+            <a:off x="6336792" y="1508760"/>
+            <a:ext cx="5577840" cy="292608"/>
+          </a:xfrm>
+          <a:prstGeom prst="rect">
+            <a:avLst/>
+          </a:prstGeom>
+          <a:solidFill>
+            <a:srgbClr val="4A276E"/>
           </a:solidFill>
           <a:ln>
             <a:noFill/>
@@ -14380,20 +15203,54 @@
       </p:sp>
       <p:sp>
         <p:nvSpPr>
-          <p:cNvPr id="24" name="Rectangle 23"/>
+          <p:cNvPr id="20" name="TextBox 19"/>
+          <p:cNvSpPr txBox="1"/>
+          <p:nvPr/>
+        </p:nvSpPr>
+        <p:spPr>
+          <a:xfrm>
+            <a:off x="6336792" y="1508760"/>
+            <a:ext cx="5577840" cy="292608"/>
+          </a:xfrm>
+          <a:prstGeom prst="rect">
+            <a:avLst/>
+          </a:prstGeom>
+          <a:noFill/>
+        </p:spPr>
+        <p:txBody>
+          <a:bodyPr wrap="square">
+            <a:spAutoFit/>
+          </a:bodyPr>
+          <a:lstStyle/>
+          <a:p>
+            <a:pPr algn="l"/>
+            <a:r>
+              <a:rPr sz="1100" b="1" i="0">
+                <a:solidFill>
+                  <a:srgbClr val="FFFFFF"/>
+                </a:solidFill>
+              </a:rPr>
+              <a:t>  📎  PDF 파일 전송 (업로드 → 메시지)</a:t>
+            </a:r>
+          </a:p>
+        </p:txBody>
+      </p:sp>
+      <p:sp>
+        <p:nvSpPr>
+          <p:cNvPr id="21" name="Rectangle 20"/>
           <p:cNvSpPr/>
           <p:nvPr/>
         </p:nvSpPr>
         <p:spPr>
           <a:xfrm>
-            <a:off x="365760" y="5577840"/>
-            <a:ext cx="54864" cy="457200"/>
-          </a:xfrm>
-          <a:prstGeom prst="rect">
-            <a:avLst/>
-          </a:prstGeom>
-          <a:solidFill>
-            <a:srgbClr val="60A5FA"/>
+            <a:off x="6336792" y="1801368"/>
+            <a:ext cx="5577840" cy="3520440"/>
+          </a:xfrm>
+          <a:prstGeom prst="rect">
+            <a:avLst/>
+          </a:prstGeom>
+          <a:solidFill>
+            <a:srgbClr val="1E293B"/>
           </a:solidFill>
           <a:ln>
             <a:noFill/>
@@ -14423,14 +15280,57 @@
       </p:sp>
       <p:sp>
         <p:nvSpPr>
-          <p:cNvPr id="25" name="TextBox 24"/>
-          <p:cNvSpPr txBox="1"/>
-          <p:nvPr/>
-        </p:nvSpPr>
-        <p:spPr>
-          <a:xfrm>
-            <a:off x="502920" y="5632704"/>
-            <a:ext cx="5760720" cy="365760"/>
+          <p:cNvPr id="22" name="Rectangle 21"/>
+          <p:cNvSpPr/>
+          <p:nvPr/>
+        </p:nvSpPr>
+        <p:spPr>
+          <a:xfrm>
+            <a:off x="6336792" y="1801368"/>
+            <a:ext cx="45720" cy="3520440"/>
+          </a:xfrm>
+          <a:prstGeom prst="rect">
+            <a:avLst/>
+          </a:prstGeom>
+          <a:solidFill>
+            <a:srgbClr val="9B5DE5"/>
+          </a:solidFill>
+          <a:ln>
+            <a:noFill/>
+          </a:ln>
+        </p:spPr>
+        <p:style>
+          <a:lnRef idx="1">
+            <a:schemeClr val="accent1"/>
+          </a:lnRef>
+          <a:fillRef idx="3">
+            <a:schemeClr val="accent1"/>
+          </a:fillRef>
+          <a:effectRef idx="2">
+            <a:schemeClr val="accent1"/>
+          </a:effectRef>
+          <a:fontRef idx="minor">
+            <a:schemeClr val="lt1"/>
+          </a:fontRef>
+        </p:style>
+        <p:txBody>
+          <a:bodyPr rtlCol="0" anchor="ctr"/>
+          <a:lstStyle/>
+          <a:p>
+            <a:pPr algn="ctr"/>
+          </a:p>
+        </p:txBody>
+      </p:sp>
+      <p:sp>
+        <p:nvSpPr>
+          <p:cNvPr id="23" name="TextBox 22"/>
+          <p:cNvSpPr txBox="1"/>
+          <p:nvPr/>
+        </p:nvSpPr>
+        <p:spPr>
+          <a:xfrm>
+            <a:off x="6446520" y="1847088"/>
+            <a:ext cx="5413248" cy="3456432"/>
           </a:xfrm>
           <a:prstGeom prst="rect">
             <a:avLst/>
@@ -14445,12 +15345,149 @@
           <a:p>
             <a:pPr algn="l"/>
             <a:r>
+              <a:rPr sz="950" b="0" i="0">
+                <a:solidFill>
+                  <a:srgbClr val="93C5FD"/>
+                </a:solidFill>
+              </a:rPr>
+              <a:t># ① 파일 업로드 → fileId 획득
+with open("fa_report.pdf", "rb") as f:
+    res = requests.post(
+        f"{BASE}/messenger/bot/v1/file",
+        headers={**headers, "x-device-id": device_id},
+        files={"file": ("fa_report.pdf", f, "application/pdf")},
+    )
+file_id = res.json()["fileId"]
+# ② 파일 메시지 전송
+res = requests.post(
+    f"{BASE}/messenger/bot/v1/message",
+    headers={**headers, "x-device-id": device_id},
+    json={
+        "roomId": room_id,
+        "messageType": "FILE",
+        "fileId": file_id,
+    },
+)</a:t>
+            </a:r>
+          </a:p>
+        </p:txBody>
+      </p:sp>
+      <p:sp>
+        <p:nvSpPr>
+          <p:cNvPr id="24" name="Rectangle 23"/>
+          <p:cNvSpPr/>
+          <p:nvPr/>
+        </p:nvSpPr>
+        <p:spPr>
+          <a:xfrm>
+            <a:off x="6336792" y="5440680"/>
+            <a:ext cx="5577840" cy="457200"/>
+          </a:xfrm>
+          <a:prstGeom prst="rect">
+            <a:avLst/>
+          </a:prstGeom>
+          <a:solidFill>
+            <a:srgbClr val="1E293B"/>
+          </a:solidFill>
+          <a:ln>
+            <a:noFill/>
+          </a:ln>
+        </p:spPr>
+        <p:style>
+          <a:lnRef idx="1">
+            <a:schemeClr val="accent1"/>
+          </a:lnRef>
+          <a:fillRef idx="3">
+            <a:schemeClr val="accent1"/>
+          </a:fillRef>
+          <a:effectRef idx="2">
+            <a:schemeClr val="accent1"/>
+          </a:effectRef>
+          <a:fontRef idx="minor">
+            <a:schemeClr val="lt1"/>
+          </a:fontRef>
+        </p:style>
+        <p:txBody>
+          <a:bodyPr rtlCol="0" anchor="ctr"/>
+          <a:lstStyle/>
+          <a:p>
+            <a:pPr algn="ctr"/>
+          </a:p>
+        </p:txBody>
+      </p:sp>
+      <p:sp>
+        <p:nvSpPr>
+          <p:cNvPr id="25" name="Rectangle 24"/>
+          <p:cNvSpPr/>
+          <p:nvPr/>
+        </p:nvSpPr>
+        <p:spPr>
+          <a:xfrm>
+            <a:off x="6336792" y="5440680"/>
+            <a:ext cx="54864" cy="457200"/>
+          </a:xfrm>
+          <a:prstGeom prst="rect">
+            <a:avLst/>
+          </a:prstGeom>
+          <a:solidFill>
+            <a:srgbClr val="9B5DE5"/>
+          </a:solidFill>
+          <a:ln>
+            <a:noFill/>
+          </a:ln>
+        </p:spPr>
+        <p:style>
+          <a:lnRef idx="1">
+            <a:schemeClr val="accent1"/>
+          </a:lnRef>
+          <a:fillRef idx="3">
+            <a:schemeClr val="accent1"/>
+          </a:fillRef>
+          <a:effectRef idx="2">
+            <a:schemeClr val="accent1"/>
+          </a:effectRef>
+          <a:fontRef idx="minor">
+            <a:schemeClr val="lt1"/>
+          </a:fontRef>
+        </p:style>
+        <p:txBody>
+          <a:bodyPr rtlCol="0" anchor="ctr"/>
+          <a:lstStyle/>
+          <a:p>
+            <a:pPr algn="ctr"/>
+          </a:p>
+        </p:txBody>
+      </p:sp>
+      <p:sp>
+        <p:nvSpPr>
+          <p:cNvPr id="26" name="TextBox 25"/>
+          <p:cNvSpPr txBox="1"/>
+          <p:nvPr/>
+        </p:nvSpPr>
+        <p:spPr>
+          <a:xfrm>
+            <a:off x="6473952" y="5495544"/>
+            <a:ext cx="5394960" cy="365760"/>
+          </a:xfrm>
+          <a:prstGeom prst="rect">
+            <a:avLst/>
+          </a:prstGeom>
+          <a:noFill/>
+        </p:spPr>
+        <p:txBody>
+          <a:bodyPr wrap="square">
+            <a:spAutoFit/>
+          </a:bodyPr>
+          <a:lstStyle/>
+          <a:p>
+            <a:pPr algn="l"/>
+            <a:r>
               <a:rPr sz="1100" b="0" i="0">
                 <a:solidFill>
                   <a:srgbClr val="FFFFFF"/>
                 </a:solidFill>
               </a:rPr>
-              <a:t>💡 Knox Portal 내 물음표(?) 버튼 → Knox Support → Teams 메뉴</a:t>
+              <a:t>💡 파일 크기 제한 및 허용 확장자는 Knox Developer Center 문서를 확인하세요</a:t>
             </a:r>
           </a:p>
         </p:txBody>

--- a/knox_chatbot_가이드.pptx
+++ b/knox_chatbot_가이드.pptx
@@ -15,6 +15,7 @@
     <p:sldId id="263" r:id="rId14"/>
     <p:sldId id="264" r:id="rId15"/>
     <p:sldId id="265" r:id="rId16"/>
+    <p:sldId id="266" r:id="rId17"/>
   </p:sldIdLst>
   <p:sldSz cx="12188952" cy="6858000" type="screen4x3"/>
   <p:notesSz cx="6858000" cy="9144000"/>
@@ -3449,6 +3450,996 @@
 </file>
 
 <file path=ppt/slides/slide10.xml><?xml version="1.0" encoding="utf-8"?>
+<p:sld xmlns:a="http://schemas.openxmlformats.org/drawingml/2006/main" xmlns:p="http://schemas.openxmlformats.org/presentationml/2006/main" xmlns:r="http://schemas.openxmlformats.org/officeDocument/2006/relationships">
+  <p:cSld>
+    <p:spTree>
+      <p:nvGrpSpPr>
+        <p:cNvPr id="1" name=""/>
+        <p:cNvGrpSpPr/>
+        <p:nvPr/>
+      </p:nvGrpSpPr>
+      <p:grpSpPr/>
+      <p:sp>
+        <p:nvSpPr>
+          <p:cNvPr id="2" name="Rectangle 1"/>
+          <p:cNvSpPr/>
+          <p:nvPr/>
+        </p:nvSpPr>
+        <p:spPr>
+          <a:xfrm>
+            <a:off x="0" y="0"/>
+            <a:ext cx="12188952" cy="6858000"/>
+          </a:xfrm>
+          <a:prstGeom prst="rect">
+            <a:avLst/>
+          </a:prstGeom>
+          <a:solidFill>
+            <a:srgbClr val="0F172A"/>
+          </a:solidFill>
+          <a:ln>
+            <a:noFill/>
+          </a:ln>
+        </p:spPr>
+        <p:style>
+          <a:lnRef idx="1">
+            <a:schemeClr val="accent1"/>
+          </a:lnRef>
+          <a:fillRef idx="3">
+            <a:schemeClr val="accent1"/>
+          </a:fillRef>
+          <a:effectRef idx="2">
+            <a:schemeClr val="accent1"/>
+          </a:effectRef>
+          <a:fontRef idx="minor">
+            <a:schemeClr val="lt1"/>
+          </a:fontRef>
+        </p:style>
+        <p:txBody>
+          <a:bodyPr rtlCol="0" anchor="ctr"/>
+          <a:lstStyle/>
+          <a:p>
+            <a:pPr algn="ctr"/>
+          </a:p>
+        </p:txBody>
+      </p:sp>
+      <p:sp>
+        <p:nvSpPr>
+          <p:cNvPr id="3" name="Rectangle 2"/>
+          <p:cNvSpPr/>
+          <p:nvPr/>
+        </p:nvSpPr>
+        <p:spPr>
+          <a:xfrm>
+            <a:off x="0" y="0"/>
+            <a:ext cx="12188952" cy="91440"/>
+          </a:xfrm>
+          <a:prstGeom prst="rect">
+            <a:avLst/>
+          </a:prstGeom>
+          <a:solidFill>
+            <a:srgbClr val="38BDF8"/>
+          </a:solidFill>
+          <a:ln>
+            <a:noFill/>
+          </a:ln>
+        </p:spPr>
+        <p:style>
+          <a:lnRef idx="1">
+            <a:schemeClr val="accent1"/>
+          </a:lnRef>
+          <a:fillRef idx="3">
+            <a:schemeClr val="accent1"/>
+          </a:fillRef>
+          <a:effectRef idx="2">
+            <a:schemeClr val="accent1"/>
+          </a:effectRef>
+          <a:fontRef idx="minor">
+            <a:schemeClr val="lt1"/>
+          </a:fontRef>
+        </p:style>
+        <p:txBody>
+          <a:bodyPr rtlCol="0" anchor="ctr"/>
+          <a:lstStyle/>
+          <a:p>
+            <a:pPr algn="ctr"/>
+          </a:p>
+        </p:txBody>
+      </p:sp>
+      <p:sp>
+        <p:nvSpPr>
+          <p:cNvPr id="4" name="TextBox 3"/>
+          <p:cNvSpPr txBox="1"/>
+          <p:nvPr/>
+        </p:nvSpPr>
+        <p:spPr>
+          <a:xfrm>
+            <a:off x="457200" y="164592"/>
+            <a:ext cx="2743200" cy="457200"/>
+          </a:xfrm>
+          <a:prstGeom prst="rect">
+            <a:avLst/>
+          </a:prstGeom>
+          <a:noFill/>
+        </p:spPr>
+        <p:txBody>
+          <a:bodyPr wrap="square">
+            <a:spAutoFit/>
+          </a:bodyPr>
+          <a:lstStyle/>
+          <a:p>
+            <a:pPr algn="l"/>
+            <a:r>
+              <a:rPr sz="1200" b="1" i="0">
+                <a:solidFill>
+                  <a:srgbClr val="38BDF8"/>
+                </a:solidFill>
+              </a:rPr>
+              <a:t>STEP 04</a:t>
+            </a:r>
+          </a:p>
+        </p:txBody>
+      </p:sp>
+      <p:sp>
+        <p:nvSpPr>
+          <p:cNvPr id="5" name="TextBox 4"/>
+          <p:cNvSpPr txBox="1"/>
+          <p:nvPr/>
+        </p:nvSpPr>
+        <p:spPr>
+          <a:xfrm>
+            <a:off x="457200" y="502920"/>
+            <a:ext cx="10972800" cy="685800"/>
+          </a:xfrm>
+          <a:prstGeom prst="rect">
+            <a:avLst/>
+          </a:prstGeom>
+          <a:noFill/>
+        </p:spPr>
+        <p:txBody>
+          <a:bodyPr wrap="square">
+            <a:spAutoFit/>
+          </a:bodyPr>
+          <a:lstStyle/>
+          <a:p>
+            <a:pPr algn="l"/>
+            <a:r>
+              <a:rPr sz="2600" b="1" i="0">
+                <a:solidFill>
+                  <a:srgbClr val="FFFFFF"/>
+                </a:solidFill>
+              </a:rPr>
+              <a:t>메시지 수신 — Webhook 처리</a:t>
+            </a:r>
+          </a:p>
+        </p:txBody>
+      </p:sp>
+      <p:sp>
+        <p:nvSpPr>
+          <p:cNvPr id="6" name="TextBox 5"/>
+          <p:cNvSpPr txBox="1"/>
+          <p:nvPr/>
+        </p:nvSpPr>
+        <p:spPr>
+          <a:xfrm>
+            <a:off x="457200" y="1078992"/>
+            <a:ext cx="10972800" cy="411480"/>
+          </a:xfrm>
+          <a:prstGeom prst="rect">
+            <a:avLst/>
+          </a:prstGeom>
+          <a:noFill/>
+        </p:spPr>
+        <p:txBody>
+          <a:bodyPr wrap="square">
+            <a:spAutoFit/>
+          </a:bodyPr>
+          <a:lstStyle/>
+          <a:p>
+            <a:pPr algn="l"/>
+            <a:r>
+              <a:rPr sz="1300" b="0" i="1">
+                <a:solidFill>
+                  <a:srgbClr val="60A5FA"/>
+                </a:solidFill>
+              </a:rPr>
+              <a:t>Knox가 내 서버로 POST를 보냅니다 · ① Webhook URL 등록  ②  FastAPI 수신 핸들러 구현</a:t>
+            </a:r>
+          </a:p>
+        </p:txBody>
+      </p:sp>
+      <p:sp>
+        <p:nvSpPr>
+          <p:cNvPr id="7" name="Rectangle 6"/>
+          <p:cNvSpPr/>
+          <p:nvPr/>
+        </p:nvSpPr>
+        <p:spPr>
+          <a:xfrm>
+            <a:off x="365760" y="1371600"/>
+            <a:ext cx="11457432" cy="19050"/>
+          </a:xfrm>
+          <a:prstGeom prst="rect">
+            <a:avLst/>
+          </a:prstGeom>
+          <a:solidFill>
+            <a:srgbClr val="38BDF8"/>
+          </a:solidFill>
+          <a:ln>
+            <a:noFill/>
+          </a:ln>
+        </p:spPr>
+        <p:style>
+          <a:lnRef idx="1">
+            <a:schemeClr val="accent1"/>
+          </a:lnRef>
+          <a:fillRef idx="3">
+            <a:schemeClr val="accent1"/>
+          </a:fillRef>
+          <a:effectRef idx="2">
+            <a:schemeClr val="accent1"/>
+          </a:effectRef>
+          <a:fontRef idx="minor">
+            <a:schemeClr val="lt1"/>
+          </a:fontRef>
+        </p:style>
+        <p:txBody>
+          <a:bodyPr rtlCol="0" anchor="ctr"/>
+          <a:lstStyle/>
+          <a:p>
+            <a:pPr algn="ctr"/>
+          </a:p>
+        </p:txBody>
+      </p:sp>
+      <p:sp>
+        <p:nvSpPr>
+          <p:cNvPr id="8" name="Rectangle 7"/>
+          <p:cNvSpPr/>
+          <p:nvPr/>
+        </p:nvSpPr>
+        <p:spPr>
+          <a:xfrm>
+            <a:off x="365760" y="1508760"/>
+            <a:ext cx="5577840" cy="292608"/>
+          </a:xfrm>
+          <a:prstGeom prst="rect">
+            <a:avLst/>
+          </a:prstGeom>
+          <a:solidFill>
+            <a:srgbClr val="2D5A9E"/>
+          </a:solidFill>
+          <a:ln>
+            <a:noFill/>
+          </a:ln>
+        </p:spPr>
+        <p:style>
+          <a:lnRef idx="1">
+            <a:schemeClr val="accent1"/>
+          </a:lnRef>
+          <a:fillRef idx="3">
+            <a:schemeClr val="accent1"/>
+          </a:fillRef>
+          <a:effectRef idx="2">
+            <a:schemeClr val="accent1"/>
+          </a:effectRef>
+          <a:fontRef idx="minor">
+            <a:schemeClr val="lt1"/>
+          </a:fontRef>
+        </p:style>
+        <p:txBody>
+          <a:bodyPr rtlCol="0" anchor="ctr"/>
+          <a:lstStyle/>
+          <a:p>
+            <a:pPr algn="ctr"/>
+          </a:p>
+        </p:txBody>
+      </p:sp>
+      <p:sp>
+        <p:nvSpPr>
+          <p:cNvPr id="9" name="TextBox 8"/>
+          <p:cNvSpPr txBox="1"/>
+          <p:nvPr/>
+        </p:nvSpPr>
+        <p:spPr>
+          <a:xfrm>
+            <a:off x="365760" y="1508760"/>
+            <a:ext cx="5577840" cy="292608"/>
+          </a:xfrm>
+          <a:prstGeom prst="rect">
+            <a:avLst/>
+          </a:prstGeom>
+          <a:noFill/>
+        </p:spPr>
+        <p:txBody>
+          <a:bodyPr wrap="square">
+            <a:spAutoFit/>
+          </a:bodyPr>
+          <a:lstStyle/>
+          <a:p>
+            <a:pPr algn="l"/>
+            <a:r>
+              <a:rPr sz="1100" b="1" i="0">
+                <a:solidFill>
+                  <a:srgbClr val="FFFFFF"/>
+                </a:solidFill>
+              </a:rPr>
+              <a:t>  ① Webhook URL 등록 (Knox → 내 서버)</a:t>
+            </a:r>
+          </a:p>
+        </p:txBody>
+      </p:sp>
+      <p:sp>
+        <p:nvSpPr>
+          <p:cNvPr id="10" name="Rectangle 9"/>
+          <p:cNvSpPr/>
+          <p:nvPr/>
+        </p:nvSpPr>
+        <p:spPr>
+          <a:xfrm>
+            <a:off x="365760" y="1801368"/>
+            <a:ext cx="5577840" cy="2011680"/>
+          </a:xfrm>
+          <a:prstGeom prst="rect">
+            <a:avLst/>
+          </a:prstGeom>
+          <a:solidFill>
+            <a:srgbClr val="1E293B"/>
+          </a:solidFill>
+          <a:ln>
+            <a:noFill/>
+          </a:ln>
+        </p:spPr>
+        <p:style>
+          <a:lnRef idx="1">
+            <a:schemeClr val="accent1"/>
+          </a:lnRef>
+          <a:fillRef idx="3">
+            <a:schemeClr val="accent1"/>
+          </a:fillRef>
+          <a:effectRef idx="2">
+            <a:schemeClr val="accent1"/>
+          </a:effectRef>
+          <a:fontRef idx="minor">
+            <a:schemeClr val="lt1"/>
+          </a:fontRef>
+        </p:style>
+        <p:txBody>
+          <a:bodyPr rtlCol="0" anchor="ctr"/>
+          <a:lstStyle/>
+          <a:p>
+            <a:pPr algn="ctr"/>
+          </a:p>
+        </p:txBody>
+      </p:sp>
+      <p:sp>
+        <p:nvSpPr>
+          <p:cNvPr id="11" name="Rectangle 10"/>
+          <p:cNvSpPr/>
+          <p:nvPr/>
+        </p:nvSpPr>
+        <p:spPr>
+          <a:xfrm>
+            <a:off x="365760" y="1801368"/>
+            <a:ext cx="45720" cy="2011680"/>
+          </a:xfrm>
+          <a:prstGeom prst="rect">
+            <a:avLst/>
+          </a:prstGeom>
+          <a:solidFill>
+            <a:srgbClr val="38BDF8"/>
+          </a:solidFill>
+          <a:ln>
+            <a:noFill/>
+          </a:ln>
+        </p:spPr>
+        <p:style>
+          <a:lnRef idx="1">
+            <a:schemeClr val="accent1"/>
+          </a:lnRef>
+          <a:fillRef idx="3">
+            <a:schemeClr val="accent1"/>
+          </a:fillRef>
+          <a:effectRef idx="2">
+            <a:schemeClr val="accent1"/>
+          </a:effectRef>
+          <a:fontRef idx="minor">
+            <a:schemeClr val="lt1"/>
+          </a:fontRef>
+        </p:style>
+        <p:txBody>
+          <a:bodyPr rtlCol="0" anchor="ctr"/>
+          <a:lstStyle/>
+          <a:p>
+            <a:pPr algn="ctr"/>
+          </a:p>
+        </p:txBody>
+      </p:sp>
+      <p:sp>
+        <p:nvSpPr>
+          <p:cNvPr id="12" name="TextBox 11"/>
+          <p:cNvSpPr txBox="1"/>
+          <p:nvPr/>
+        </p:nvSpPr>
+        <p:spPr>
+          <a:xfrm>
+            <a:off x="475488" y="1847088"/>
+            <a:ext cx="5413248" cy="1947672"/>
+          </a:xfrm>
+          <a:prstGeom prst="rect">
+            <a:avLst/>
+          </a:prstGeom>
+          <a:noFill/>
+        </p:spPr>
+        <p:txBody>
+          <a:bodyPr wrap="square">
+            <a:spAutoFit/>
+          </a:bodyPr>
+          <a:lstStyle/>
+          <a:p>
+            <a:pPr algn="l"/>
+            <a:r>
+              <a:rPr sz="950" b="0" i="0">
+                <a:solidFill>
+                  <a:srgbClr val="93C5FD"/>
+                </a:solidFill>
+              </a:rPr>
+              <a:t># Knox에 내 서버 수신 URL 등록
+res = requests.post(
+    f"{BASE}/messenger/bot/v1/webhook",
+    headers={**headers, "x-device-id": device_id},
+    json={
+        "webhookUrl": "http://10.246.9.74/message",
+        "eventType": ["MESSAGE"],
+    },
+)
+print(res.json())   # {"result": "success"}</a:t>
+            </a:r>
+          </a:p>
+        </p:txBody>
+      </p:sp>
+      <p:sp>
+        <p:nvSpPr>
+          <p:cNvPr id="13" name="Rectangle 12"/>
+          <p:cNvSpPr/>
+          <p:nvPr/>
+        </p:nvSpPr>
+        <p:spPr>
+          <a:xfrm>
+            <a:off x="365760" y="3913632"/>
+            <a:ext cx="5577840" cy="292608"/>
+          </a:xfrm>
+          <a:prstGeom prst="rect">
+            <a:avLst/>
+          </a:prstGeom>
+          <a:solidFill>
+            <a:srgbClr val="2A422A"/>
+          </a:solidFill>
+          <a:ln>
+            <a:noFill/>
+          </a:ln>
+        </p:spPr>
+        <p:style>
+          <a:lnRef idx="1">
+            <a:schemeClr val="accent1"/>
+          </a:lnRef>
+          <a:fillRef idx="3">
+            <a:schemeClr val="accent1"/>
+          </a:fillRef>
+          <a:effectRef idx="2">
+            <a:schemeClr val="accent1"/>
+          </a:effectRef>
+          <a:fontRef idx="minor">
+            <a:schemeClr val="lt1"/>
+          </a:fontRef>
+        </p:style>
+        <p:txBody>
+          <a:bodyPr rtlCol="0" anchor="ctr"/>
+          <a:lstStyle/>
+          <a:p>
+            <a:pPr algn="ctr"/>
+          </a:p>
+        </p:txBody>
+      </p:sp>
+      <p:sp>
+        <p:nvSpPr>
+          <p:cNvPr id="14" name="TextBox 13"/>
+          <p:cNvSpPr txBox="1"/>
+          <p:nvPr/>
+        </p:nvSpPr>
+        <p:spPr>
+          <a:xfrm>
+            <a:off x="365760" y="3913632"/>
+            <a:ext cx="5577840" cy="292608"/>
+          </a:xfrm>
+          <a:prstGeom prst="rect">
+            <a:avLst/>
+          </a:prstGeom>
+          <a:noFill/>
+        </p:spPr>
+        <p:txBody>
+          <a:bodyPr wrap="square">
+            <a:spAutoFit/>
+          </a:bodyPr>
+          <a:lstStyle/>
+          <a:p>
+            <a:pPr algn="l"/>
+            <a:r>
+              <a:rPr sz="1100" b="1" i="0">
+                <a:solidFill>
+                  <a:srgbClr val="86EFAC"/>
+                </a:solidFill>
+              </a:rPr>
+              <a:t>  수신 Payload 구조 (Knox → 내 서버)</a:t>
+            </a:r>
+          </a:p>
+        </p:txBody>
+      </p:sp>
+      <p:sp>
+        <p:nvSpPr>
+          <p:cNvPr id="15" name="Rectangle 14"/>
+          <p:cNvSpPr/>
+          <p:nvPr/>
+        </p:nvSpPr>
+        <p:spPr>
+          <a:xfrm>
+            <a:off x="365760" y="4206240"/>
+            <a:ext cx="5577840" cy="1755648"/>
+          </a:xfrm>
+          <a:prstGeom prst="rect">
+            <a:avLst/>
+          </a:prstGeom>
+          <a:solidFill>
+            <a:srgbClr val="1E293B"/>
+          </a:solidFill>
+          <a:ln>
+            <a:noFill/>
+          </a:ln>
+        </p:spPr>
+        <p:style>
+          <a:lnRef idx="1">
+            <a:schemeClr val="accent1"/>
+          </a:lnRef>
+          <a:fillRef idx="3">
+            <a:schemeClr val="accent1"/>
+          </a:fillRef>
+          <a:effectRef idx="2">
+            <a:schemeClr val="accent1"/>
+          </a:effectRef>
+          <a:fontRef idx="minor">
+            <a:schemeClr val="lt1"/>
+          </a:fontRef>
+        </p:style>
+        <p:txBody>
+          <a:bodyPr rtlCol="0" anchor="ctr"/>
+          <a:lstStyle/>
+          <a:p>
+            <a:pPr algn="ctr"/>
+          </a:p>
+        </p:txBody>
+      </p:sp>
+      <p:sp>
+        <p:nvSpPr>
+          <p:cNvPr id="16" name="Rectangle 15"/>
+          <p:cNvSpPr/>
+          <p:nvPr/>
+        </p:nvSpPr>
+        <p:spPr>
+          <a:xfrm>
+            <a:off x="365760" y="4206240"/>
+            <a:ext cx="45720" cy="1755648"/>
+          </a:xfrm>
+          <a:prstGeom prst="rect">
+            <a:avLst/>
+          </a:prstGeom>
+          <a:solidFill>
+            <a:srgbClr val="86EFAC"/>
+          </a:solidFill>
+          <a:ln>
+            <a:noFill/>
+          </a:ln>
+        </p:spPr>
+        <p:style>
+          <a:lnRef idx="1">
+            <a:schemeClr val="accent1"/>
+          </a:lnRef>
+          <a:fillRef idx="3">
+            <a:schemeClr val="accent1"/>
+          </a:fillRef>
+          <a:effectRef idx="2">
+            <a:schemeClr val="accent1"/>
+          </a:effectRef>
+          <a:fontRef idx="minor">
+            <a:schemeClr val="lt1"/>
+          </a:fontRef>
+        </p:style>
+        <p:txBody>
+          <a:bodyPr rtlCol="0" anchor="ctr"/>
+          <a:lstStyle/>
+          <a:p>
+            <a:pPr algn="ctr"/>
+          </a:p>
+        </p:txBody>
+      </p:sp>
+      <p:sp>
+        <p:nvSpPr>
+          <p:cNvPr id="17" name="TextBox 16"/>
+          <p:cNvSpPr txBox="1"/>
+          <p:nvPr/>
+        </p:nvSpPr>
+        <p:spPr>
+          <a:xfrm>
+            <a:off x="475488" y="4251960"/>
+            <a:ext cx="5413248" cy="1691640"/>
+          </a:xfrm>
+          <a:prstGeom prst="rect">
+            <a:avLst/>
+          </a:prstGeom>
+          <a:noFill/>
+        </p:spPr>
+        <p:txBody>
+          <a:bodyPr wrap="square">
+            <a:spAutoFit/>
+          </a:bodyPr>
+          <a:lstStyle/>
+          <a:p>
+            <a:pPr algn="l"/>
+            <a:r>
+              <a:rPr sz="950" b="0" i="0">
+                <a:solidFill>
+                  <a:srgbClr val="86EFAC"/>
+                </a:solidFill>
+              </a:rPr>
+              <a:t>// Knox 가 내 서버로 POST 하는 payload 예시
+{
+    "roomId":      "R_abc123",
+    "senderId":    "hong.gildong@samsung.com",
+    "senderName":  "홍길동",
+    "messageType": "TEXT",
+    "message":     "안녕하세요",
+    "timestamp":   1705300000000
+}</a:t>
+            </a:r>
+          </a:p>
+        </p:txBody>
+      </p:sp>
+      <p:sp>
+        <p:nvSpPr>
+          <p:cNvPr id="18" name="Rectangle 17"/>
+          <p:cNvSpPr/>
+          <p:nvPr/>
+        </p:nvSpPr>
+        <p:spPr>
+          <a:xfrm>
+            <a:off x="6336792" y="1508760"/>
+            <a:ext cx="5577840" cy="292608"/>
+          </a:xfrm>
+          <a:prstGeom prst="rect">
+            <a:avLst/>
+          </a:prstGeom>
+          <a:solidFill>
+            <a:srgbClr val="14536E"/>
+          </a:solidFill>
+          <a:ln>
+            <a:noFill/>
+          </a:ln>
+        </p:spPr>
+        <p:style>
+          <a:lnRef idx="1">
+            <a:schemeClr val="accent1"/>
+          </a:lnRef>
+          <a:fillRef idx="3">
+            <a:schemeClr val="accent1"/>
+          </a:fillRef>
+          <a:effectRef idx="2">
+            <a:schemeClr val="accent1"/>
+          </a:effectRef>
+          <a:fontRef idx="minor">
+            <a:schemeClr val="lt1"/>
+          </a:fontRef>
+        </p:style>
+        <p:txBody>
+          <a:bodyPr rtlCol="0" anchor="ctr"/>
+          <a:lstStyle/>
+          <a:p>
+            <a:pPr algn="ctr"/>
+          </a:p>
+        </p:txBody>
+      </p:sp>
+      <p:sp>
+        <p:nvSpPr>
+          <p:cNvPr id="19" name="TextBox 18"/>
+          <p:cNvSpPr txBox="1"/>
+          <p:nvPr/>
+        </p:nvSpPr>
+        <p:spPr>
+          <a:xfrm>
+            <a:off x="6336792" y="1508760"/>
+            <a:ext cx="5577840" cy="292608"/>
+          </a:xfrm>
+          <a:prstGeom prst="rect">
+            <a:avLst/>
+          </a:prstGeom>
+          <a:noFill/>
+        </p:spPr>
+        <p:txBody>
+          <a:bodyPr wrap="square">
+            <a:spAutoFit/>
+          </a:bodyPr>
+          <a:lstStyle/>
+          <a:p>
+            <a:pPr algn="l"/>
+            <a:r>
+              <a:rPr sz="1100" b="1" i="0">
+                <a:solidFill>
+                  <a:srgbClr val="FFFFFF"/>
+                </a:solidFill>
+              </a:rPr>
+              <a:t>  ② FastAPI 수신 핸들러</a:t>
+            </a:r>
+          </a:p>
+        </p:txBody>
+      </p:sp>
+      <p:sp>
+        <p:nvSpPr>
+          <p:cNvPr id="20" name="Rectangle 19"/>
+          <p:cNvSpPr/>
+          <p:nvPr/>
+        </p:nvSpPr>
+        <p:spPr>
+          <a:xfrm>
+            <a:off x="6336792" y="1801368"/>
+            <a:ext cx="5577840" cy="3520440"/>
+          </a:xfrm>
+          <a:prstGeom prst="rect">
+            <a:avLst/>
+          </a:prstGeom>
+          <a:solidFill>
+            <a:srgbClr val="1E293B"/>
+          </a:solidFill>
+          <a:ln>
+            <a:noFill/>
+          </a:ln>
+        </p:spPr>
+        <p:style>
+          <a:lnRef idx="1">
+            <a:schemeClr val="accent1"/>
+          </a:lnRef>
+          <a:fillRef idx="3">
+            <a:schemeClr val="accent1"/>
+          </a:fillRef>
+          <a:effectRef idx="2">
+            <a:schemeClr val="accent1"/>
+          </a:effectRef>
+          <a:fontRef idx="minor">
+            <a:schemeClr val="lt1"/>
+          </a:fontRef>
+        </p:style>
+        <p:txBody>
+          <a:bodyPr rtlCol="0" anchor="ctr"/>
+          <a:lstStyle/>
+          <a:p>
+            <a:pPr algn="ctr"/>
+          </a:p>
+        </p:txBody>
+      </p:sp>
+      <p:sp>
+        <p:nvSpPr>
+          <p:cNvPr id="21" name="Rectangle 20"/>
+          <p:cNvSpPr/>
+          <p:nvPr/>
+        </p:nvSpPr>
+        <p:spPr>
+          <a:xfrm>
+            <a:off x="6336792" y="1801368"/>
+            <a:ext cx="45720" cy="3520440"/>
+          </a:xfrm>
+          <a:prstGeom prst="rect">
+            <a:avLst/>
+          </a:prstGeom>
+          <a:solidFill>
+            <a:srgbClr val="60A5FA"/>
+          </a:solidFill>
+          <a:ln>
+            <a:noFill/>
+          </a:ln>
+        </p:spPr>
+        <p:style>
+          <a:lnRef idx="1">
+            <a:schemeClr val="accent1"/>
+          </a:lnRef>
+          <a:fillRef idx="3">
+            <a:schemeClr val="accent1"/>
+          </a:fillRef>
+          <a:effectRef idx="2">
+            <a:schemeClr val="accent1"/>
+          </a:effectRef>
+          <a:fontRef idx="minor">
+            <a:schemeClr val="lt1"/>
+          </a:fontRef>
+        </p:style>
+        <p:txBody>
+          <a:bodyPr rtlCol="0" anchor="ctr"/>
+          <a:lstStyle/>
+          <a:p>
+            <a:pPr algn="ctr"/>
+          </a:p>
+        </p:txBody>
+      </p:sp>
+      <p:sp>
+        <p:nvSpPr>
+          <p:cNvPr id="22" name="TextBox 21"/>
+          <p:cNvSpPr txBox="1"/>
+          <p:nvPr/>
+        </p:nvSpPr>
+        <p:spPr>
+          <a:xfrm>
+            <a:off x="6446520" y="1847088"/>
+            <a:ext cx="5413248" cy="3456432"/>
+          </a:xfrm>
+          <a:prstGeom prst="rect">
+            <a:avLst/>
+          </a:prstGeom>
+          <a:noFill/>
+        </p:spPr>
+        <p:txBody>
+          <a:bodyPr wrap="square">
+            <a:spAutoFit/>
+          </a:bodyPr>
+          <a:lstStyle/>
+          <a:p>
+            <a:pPr algn="l"/>
+            <a:r>
+              <a:rPr sz="950" b="0" i="0">
+                <a:solidFill>
+                  <a:srgbClr val="93C5FD"/>
+                </a:solidFill>
+              </a:rPr>
+              <a:t>from fastapi import FastAPI, Request
+app = FastAPI()
+@app.post("/message")
+async def receive_message(request: Request):
+    body      = await request.json()
+    room_id   = body.get("roomId")
+    sender    = body.get("senderId")
+    msg_type  = body.get("messageType")  # TEXT/FILE/CARD
+    message   = body.get("message", "")
+    print(f"[{sender}] {message}")
+    # 자동 응답 예시
+    if message == "결과":
+        await send_reply(room_id, "분석 결과: ...")
+    return {"result": "ok"}</a:t>
+            </a:r>
+          </a:p>
+        </p:txBody>
+      </p:sp>
+      <p:sp>
+        <p:nvSpPr>
+          <p:cNvPr id="23" name="Rectangle 22"/>
+          <p:cNvSpPr/>
+          <p:nvPr/>
+        </p:nvSpPr>
+        <p:spPr>
+          <a:xfrm>
+            <a:off x="6336792" y="5440680"/>
+            <a:ext cx="5577840" cy="457200"/>
+          </a:xfrm>
+          <a:prstGeom prst="rect">
+            <a:avLst/>
+          </a:prstGeom>
+          <a:solidFill>
+            <a:srgbClr val="1E293B"/>
+          </a:solidFill>
+          <a:ln>
+            <a:noFill/>
+          </a:ln>
+        </p:spPr>
+        <p:style>
+          <a:lnRef idx="1">
+            <a:schemeClr val="accent1"/>
+          </a:lnRef>
+          <a:fillRef idx="3">
+            <a:schemeClr val="accent1"/>
+          </a:fillRef>
+          <a:effectRef idx="2">
+            <a:schemeClr val="accent1"/>
+          </a:effectRef>
+          <a:fontRef idx="minor">
+            <a:schemeClr val="lt1"/>
+          </a:fontRef>
+        </p:style>
+        <p:txBody>
+          <a:bodyPr rtlCol="0" anchor="ctr"/>
+          <a:lstStyle/>
+          <a:p>
+            <a:pPr algn="ctr"/>
+          </a:p>
+        </p:txBody>
+      </p:sp>
+      <p:sp>
+        <p:nvSpPr>
+          <p:cNvPr id="24" name="Rectangle 23"/>
+          <p:cNvSpPr/>
+          <p:nvPr/>
+        </p:nvSpPr>
+        <p:spPr>
+          <a:xfrm>
+            <a:off x="6336792" y="5440680"/>
+            <a:ext cx="54864" cy="457200"/>
+          </a:xfrm>
+          <a:prstGeom prst="rect">
+            <a:avLst/>
+          </a:prstGeom>
+          <a:solidFill>
+            <a:srgbClr val="F59E0B"/>
+          </a:solidFill>
+          <a:ln>
+            <a:noFill/>
+          </a:ln>
+        </p:spPr>
+        <p:style>
+          <a:lnRef idx="1">
+            <a:schemeClr val="accent1"/>
+          </a:lnRef>
+          <a:fillRef idx="3">
+            <a:schemeClr val="accent1"/>
+          </a:fillRef>
+          <a:effectRef idx="2">
+            <a:schemeClr val="accent1"/>
+          </a:effectRef>
+          <a:fontRef idx="minor">
+            <a:schemeClr val="lt1"/>
+          </a:fontRef>
+        </p:style>
+        <p:txBody>
+          <a:bodyPr rtlCol="0" anchor="ctr"/>
+          <a:lstStyle/>
+          <a:p>
+            <a:pPr algn="ctr"/>
+          </a:p>
+        </p:txBody>
+      </p:sp>
+      <p:sp>
+        <p:nvSpPr>
+          <p:cNvPr id="25" name="TextBox 24"/>
+          <p:cNvSpPr txBox="1"/>
+          <p:nvPr/>
+        </p:nvSpPr>
+        <p:spPr>
+          <a:xfrm>
+            <a:off x="6473952" y="5495544"/>
+            <a:ext cx="5394960" cy="365760"/>
+          </a:xfrm>
+          <a:prstGeom prst="rect">
+            <a:avLst/>
+          </a:prstGeom>
+          <a:noFill/>
+        </p:spPr>
+        <p:txBody>
+          <a:bodyPr wrap="square">
+            <a:spAutoFit/>
+          </a:bodyPr>
+          <a:lstStyle/>
+          <a:p>
+            <a:pPr algn="l"/>
+            <a:r>
+              <a:rPr sz="1100" b="0" i="0">
+                <a:solidFill>
+                  <a:srgbClr val="FFFFFF"/>
+                </a:solidFill>
+              </a:rPr>
+              <a:t>⚠  Knox 발신 서버 IP(방화벽 수신 허용) 에서만 POST가 오므로  IP 화이트리스트 검증 권장</a:t>
+            </a:r>
+          </a:p>
+        </p:txBody>
+      </p:sp>
+    </p:spTree>
+  </p:cSld>
+  <p:clrMapOvr>
+    <a:masterClrMapping/>
+  </p:clrMapOvr>
+</p:sld>
+</file>
+
+<file path=ppt/slides/slide11.xml><?xml version="1.0" encoding="utf-8"?>
 <p:sld xmlns:a="http://schemas.openxmlformats.org/drawingml/2006/main" xmlns:p="http://schemas.openxmlformats.org/presentationml/2006/main" xmlns:r="http://schemas.openxmlformats.org/officeDocument/2006/relationships">
   <p:cSld>
     <p:spTree>

--- a/knox_chatbot_가이드.pptx
+++ b/knox_chatbot_가이드.pptx
@@ -16,6 +16,7 @@
     <p:sldId id="264" r:id="rId15"/>
     <p:sldId id="265" r:id="rId16"/>
     <p:sldId id="266" r:id="rId17"/>
+    <p:sldId id="267" r:id="rId18"/>
   </p:sldIdLst>
   <p:sldSz cx="12188952" cy="6858000" type="screen4x3"/>
   <p:notesSz cx="6858000" cy="9144000"/>
@@ -4440,6 +4441,1410 @@
 </file>
 
 <file path=ppt/slides/slide11.xml><?xml version="1.0" encoding="utf-8"?>
+<p:sld xmlns:a="http://schemas.openxmlformats.org/drawingml/2006/main" xmlns:p="http://schemas.openxmlformats.org/presentationml/2006/main" xmlns:r="http://schemas.openxmlformats.org/officeDocument/2006/relationships">
+  <p:cSld>
+    <p:spTree>
+      <p:nvGrpSpPr>
+        <p:cNvPr id="1" name=""/>
+        <p:cNvGrpSpPr/>
+        <p:nvPr/>
+      </p:nvGrpSpPr>
+      <p:grpSpPr/>
+      <p:sp>
+        <p:nvSpPr>
+          <p:cNvPr id="2" name="Rectangle 1"/>
+          <p:cNvSpPr/>
+          <p:nvPr/>
+        </p:nvSpPr>
+        <p:spPr>
+          <a:xfrm>
+            <a:off x="0" y="0"/>
+            <a:ext cx="12188952" cy="6858000"/>
+          </a:xfrm>
+          <a:prstGeom prst="rect">
+            <a:avLst/>
+          </a:prstGeom>
+          <a:solidFill>
+            <a:srgbClr val="0F172A"/>
+          </a:solidFill>
+          <a:ln>
+            <a:noFill/>
+          </a:ln>
+        </p:spPr>
+        <p:style>
+          <a:lnRef idx="1">
+            <a:schemeClr val="accent1"/>
+          </a:lnRef>
+          <a:fillRef idx="3">
+            <a:schemeClr val="accent1"/>
+          </a:fillRef>
+          <a:effectRef idx="2">
+            <a:schemeClr val="accent1"/>
+          </a:effectRef>
+          <a:fontRef idx="minor">
+            <a:schemeClr val="lt1"/>
+          </a:fontRef>
+        </p:style>
+        <p:txBody>
+          <a:bodyPr rtlCol="0" anchor="ctr"/>
+          <a:lstStyle/>
+          <a:p>
+            <a:pPr algn="ctr"/>
+          </a:p>
+        </p:txBody>
+      </p:sp>
+      <p:sp>
+        <p:nvSpPr>
+          <p:cNvPr id="3" name="Rectangle 2"/>
+          <p:cNvSpPr/>
+          <p:nvPr/>
+        </p:nvSpPr>
+        <p:spPr>
+          <a:xfrm>
+            <a:off x="0" y="0"/>
+            <a:ext cx="12188952" cy="91440"/>
+          </a:xfrm>
+          <a:prstGeom prst="rect">
+            <a:avLst/>
+          </a:prstGeom>
+          <a:solidFill>
+            <a:srgbClr val="38BDF8"/>
+          </a:solidFill>
+          <a:ln>
+            <a:noFill/>
+          </a:ln>
+        </p:spPr>
+        <p:style>
+          <a:lnRef idx="1">
+            <a:schemeClr val="accent1"/>
+          </a:lnRef>
+          <a:fillRef idx="3">
+            <a:schemeClr val="accent1"/>
+          </a:fillRef>
+          <a:effectRef idx="2">
+            <a:schemeClr val="accent1"/>
+          </a:effectRef>
+          <a:fontRef idx="minor">
+            <a:schemeClr val="lt1"/>
+          </a:fontRef>
+        </p:style>
+        <p:txBody>
+          <a:bodyPr rtlCol="0" anchor="ctr"/>
+          <a:lstStyle/>
+          <a:p>
+            <a:pPr algn="ctr"/>
+          </a:p>
+        </p:txBody>
+      </p:sp>
+      <p:sp>
+        <p:nvSpPr>
+          <p:cNvPr id="4" name="TextBox 3"/>
+          <p:cNvSpPr txBox="1"/>
+          <p:nvPr/>
+        </p:nvSpPr>
+        <p:spPr>
+          <a:xfrm>
+            <a:off x="457200" y="164592"/>
+            <a:ext cx="2743200" cy="457200"/>
+          </a:xfrm>
+          <a:prstGeom prst="rect">
+            <a:avLst/>
+          </a:prstGeom>
+          <a:noFill/>
+        </p:spPr>
+        <p:txBody>
+          <a:bodyPr wrap="square">
+            <a:spAutoFit/>
+          </a:bodyPr>
+          <a:lstStyle/>
+          <a:p>
+            <a:pPr algn="l"/>
+            <a:r>
+              <a:rPr sz="1200" b="1" i="0">
+                <a:solidFill>
+                  <a:srgbClr val="38BDF8"/>
+                </a:solidFill>
+              </a:rPr>
+              <a:t>STEP 04</a:t>
+            </a:r>
+          </a:p>
+        </p:txBody>
+      </p:sp>
+      <p:sp>
+        <p:nvSpPr>
+          <p:cNvPr id="5" name="TextBox 4"/>
+          <p:cNvSpPr txBox="1"/>
+          <p:nvPr/>
+        </p:nvSpPr>
+        <p:spPr>
+          <a:xfrm>
+            <a:off x="457200" y="502920"/>
+            <a:ext cx="10972800" cy="685800"/>
+          </a:xfrm>
+          <a:prstGeom prst="rect">
+            <a:avLst/>
+          </a:prstGeom>
+          <a:noFill/>
+        </p:spPr>
+        <p:txBody>
+          <a:bodyPr wrap="square">
+            <a:spAutoFit/>
+          </a:bodyPr>
+          <a:lstStyle/>
+          <a:p>
+            <a:pPr algn="l"/>
+            <a:r>
+              <a:rPr sz="2600" b="1" i="0">
+                <a:solidFill>
+                  <a:srgbClr val="FFFFFF"/>
+                </a:solidFill>
+              </a:rPr>
+              <a:t>보안 — 암호화 &amp; 토큰 관리</a:t>
+            </a:r>
+          </a:p>
+        </p:txBody>
+      </p:sp>
+      <p:sp>
+        <p:nvSpPr>
+          <p:cNvPr id="6" name="TextBox 5"/>
+          <p:cNvSpPr txBox="1"/>
+          <p:nvPr/>
+        </p:nvSpPr>
+        <p:spPr>
+          <a:xfrm>
+            <a:off x="457200" y="1078992"/>
+            <a:ext cx="10972800" cy="411480"/>
+          </a:xfrm>
+          <a:prstGeom prst="rect">
+            <a:avLst/>
+          </a:prstGeom>
+          <a:noFill/>
+        </p:spPr>
+        <p:txBody>
+          <a:bodyPr wrap="square">
+            <a:spAutoFit/>
+          </a:bodyPr>
+          <a:lstStyle/>
+          <a:p>
+            <a:pPr algn="l"/>
+            <a:r>
+              <a:rPr sz="1300" b="0" i="1">
+                <a:solidFill>
+                  <a:srgbClr val="60A5FA"/>
+                </a:solidFill>
+              </a:rPr>
+              <a:t>전송 암호화(HTTPS) · Webhook 서명 검증 · 환경변수로 토큰 분리</a:t>
+            </a:r>
+          </a:p>
+        </p:txBody>
+      </p:sp>
+      <p:sp>
+        <p:nvSpPr>
+          <p:cNvPr id="7" name="Rectangle 6"/>
+          <p:cNvSpPr/>
+          <p:nvPr/>
+        </p:nvSpPr>
+        <p:spPr>
+          <a:xfrm>
+            <a:off x="365760" y="1371600"/>
+            <a:ext cx="11457432" cy="19050"/>
+          </a:xfrm>
+          <a:prstGeom prst="rect">
+            <a:avLst/>
+          </a:prstGeom>
+          <a:solidFill>
+            <a:srgbClr val="38BDF8"/>
+          </a:solidFill>
+          <a:ln>
+            <a:noFill/>
+          </a:ln>
+        </p:spPr>
+        <p:style>
+          <a:lnRef idx="1">
+            <a:schemeClr val="accent1"/>
+          </a:lnRef>
+          <a:fillRef idx="3">
+            <a:schemeClr val="accent1"/>
+          </a:fillRef>
+          <a:effectRef idx="2">
+            <a:schemeClr val="accent1"/>
+          </a:effectRef>
+          <a:fontRef idx="minor">
+            <a:schemeClr val="lt1"/>
+          </a:fontRef>
+        </p:style>
+        <p:txBody>
+          <a:bodyPr rtlCol="0" anchor="ctr"/>
+          <a:lstStyle/>
+          <a:p>
+            <a:pPr algn="ctr"/>
+          </a:p>
+        </p:txBody>
+      </p:sp>
+      <p:sp>
+        <p:nvSpPr>
+          <p:cNvPr id="8" name="Rectangle 7"/>
+          <p:cNvSpPr/>
+          <p:nvPr/>
+        </p:nvSpPr>
+        <p:spPr>
+          <a:xfrm>
+            <a:off x="365760" y="1508760"/>
+            <a:ext cx="5577840" cy="292608"/>
+          </a:xfrm>
+          <a:prstGeom prst="rect">
+            <a:avLst/>
+          </a:prstGeom>
+          <a:solidFill>
+            <a:srgbClr val="0F172A"/>
+          </a:solidFill>
+          <a:ln>
+            <a:noFill/>
+          </a:ln>
+        </p:spPr>
+        <p:style>
+          <a:lnRef idx="1">
+            <a:schemeClr val="accent1"/>
+          </a:lnRef>
+          <a:fillRef idx="3">
+            <a:schemeClr val="accent1"/>
+          </a:fillRef>
+          <a:effectRef idx="2">
+            <a:schemeClr val="accent1"/>
+          </a:effectRef>
+          <a:fontRef idx="minor">
+            <a:schemeClr val="lt1"/>
+          </a:fontRef>
+        </p:style>
+        <p:txBody>
+          <a:bodyPr rtlCol="0" anchor="ctr"/>
+          <a:lstStyle/>
+          <a:p>
+            <a:pPr algn="ctr"/>
+          </a:p>
+        </p:txBody>
+      </p:sp>
+      <p:sp>
+        <p:nvSpPr>
+          <p:cNvPr id="9" name="TextBox 8"/>
+          <p:cNvSpPr txBox="1"/>
+          <p:nvPr/>
+        </p:nvSpPr>
+        <p:spPr>
+          <a:xfrm>
+            <a:off x="365760" y="1508760"/>
+            <a:ext cx="5577840" cy="292608"/>
+          </a:xfrm>
+          <a:prstGeom prst="rect">
+            <a:avLst/>
+          </a:prstGeom>
+          <a:noFill/>
+        </p:spPr>
+        <p:txBody>
+          <a:bodyPr wrap="square">
+            <a:spAutoFit/>
+          </a:bodyPr>
+          <a:lstStyle/>
+          <a:p>
+            <a:pPr algn="l"/>
+            <a:r>
+              <a:rPr sz="1100" b="1" i="0">
+                <a:solidFill>
+                  <a:srgbClr val="FFFFFF"/>
+                </a:solidFill>
+              </a:rPr>
+              <a:t>  🔒  전송 암호화 (HTTPS / TLS)</a:t>
+            </a:r>
+          </a:p>
+        </p:txBody>
+      </p:sp>
+      <p:sp>
+        <p:nvSpPr>
+          <p:cNvPr id="10" name="Rectangle 9"/>
+          <p:cNvSpPr/>
+          <p:nvPr/>
+        </p:nvSpPr>
+        <p:spPr>
+          <a:xfrm>
+            <a:off x="365760" y="1801368"/>
+            <a:ext cx="5577840" cy="932688"/>
+          </a:xfrm>
+          <a:prstGeom prst="rect">
+            <a:avLst/>
+          </a:prstGeom>
+          <a:solidFill>
+            <a:srgbClr val="0D1E38"/>
+          </a:solidFill>
+          <a:ln>
+            <a:noFill/>
+          </a:ln>
+        </p:spPr>
+        <p:style>
+          <a:lnRef idx="1">
+            <a:schemeClr val="accent1"/>
+          </a:lnRef>
+          <a:fillRef idx="3">
+            <a:schemeClr val="accent1"/>
+          </a:fillRef>
+          <a:effectRef idx="2">
+            <a:schemeClr val="accent1"/>
+          </a:effectRef>
+          <a:fontRef idx="minor">
+            <a:schemeClr val="lt1"/>
+          </a:fontRef>
+        </p:style>
+        <p:txBody>
+          <a:bodyPr rtlCol="0" anchor="ctr"/>
+          <a:lstStyle/>
+          <a:p>
+            <a:pPr algn="ctr"/>
+          </a:p>
+        </p:txBody>
+      </p:sp>
+      <p:sp>
+        <p:nvSpPr>
+          <p:cNvPr id="11" name="Rectangle 10"/>
+          <p:cNvSpPr/>
+          <p:nvPr/>
+        </p:nvSpPr>
+        <p:spPr>
+          <a:xfrm>
+            <a:off x="365760" y="1801368"/>
+            <a:ext cx="45720" cy="932688"/>
+          </a:xfrm>
+          <a:prstGeom prst="rect">
+            <a:avLst/>
+          </a:prstGeom>
+          <a:solidFill>
+            <a:srgbClr val="10B981"/>
+          </a:solidFill>
+          <a:ln>
+            <a:noFill/>
+          </a:ln>
+        </p:spPr>
+        <p:style>
+          <a:lnRef idx="1">
+            <a:schemeClr val="accent1"/>
+          </a:lnRef>
+          <a:fillRef idx="3">
+            <a:schemeClr val="accent1"/>
+          </a:fillRef>
+          <a:effectRef idx="2">
+            <a:schemeClr val="accent1"/>
+          </a:effectRef>
+          <a:fontRef idx="minor">
+            <a:schemeClr val="lt1"/>
+          </a:fontRef>
+        </p:style>
+        <p:txBody>
+          <a:bodyPr rtlCol="0" anchor="ctr"/>
+          <a:lstStyle/>
+          <a:p>
+            <a:pPr algn="ctr"/>
+          </a:p>
+        </p:txBody>
+      </p:sp>
+      <p:sp>
+        <p:nvSpPr>
+          <p:cNvPr id="12" name="TextBox 11"/>
+          <p:cNvSpPr txBox="1"/>
+          <p:nvPr/>
+        </p:nvSpPr>
+        <p:spPr>
+          <a:xfrm>
+            <a:off x="475488" y="1856231"/>
+            <a:ext cx="5413248" cy="201168"/>
+          </a:xfrm>
+          <a:prstGeom prst="rect">
+            <a:avLst/>
+          </a:prstGeom>
+          <a:noFill/>
+        </p:spPr>
+        <p:txBody>
+          <a:bodyPr wrap="square">
+            <a:spAutoFit/>
+          </a:bodyPr>
+          <a:lstStyle/>
+          <a:p>
+            <a:pPr algn="l"/>
+            <a:r>
+              <a:rPr sz="1000" b="0" i="0">
+                <a:solidFill>
+                  <a:srgbClr val="60A5FA"/>
+                </a:solidFill>
+              </a:rPr>
+              <a:t>• Knox API Base URL 은 https:// — TLS 1.2+ 자동 적용</a:t>
+            </a:r>
+          </a:p>
+        </p:txBody>
+      </p:sp>
+      <p:sp>
+        <p:nvSpPr>
+          <p:cNvPr id="13" name="TextBox 12"/>
+          <p:cNvSpPr txBox="1"/>
+          <p:nvPr/>
+        </p:nvSpPr>
+        <p:spPr>
+          <a:xfrm>
+            <a:off x="475488" y="2066543"/>
+            <a:ext cx="5413248" cy="201168"/>
+          </a:xfrm>
+          <a:prstGeom prst="rect">
+            <a:avLst/>
+          </a:prstGeom>
+          <a:noFill/>
+        </p:spPr>
+        <p:txBody>
+          <a:bodyPr wrap="square">
+            <a:spAutoFit/>
+          </a:bodyPr>
+          <a:lstStyle/>
+          <a:p>
+            <a:pPr algn="l"/>
+            <a:r>
+              <a:rPr sz="1000" b="0" i="0">
+                <a:solidFill>
+                  <a:srgbClr val="60A5FA"/>
+                </a:solidFill>
+              </a:rPr>
+              <a:t>• Port 443 사용 시 패킷 내용은 암호화된 상태로 전달</a:t>
+            </a:r>
+          </a:p>
+        </p:txBody>
+      </p:sp>
+      <p:sp>
+        <p:nvSpPr>
+          <p:cNvPr id="14" name="TextBox 13"/>
+          <p:cNvSpPr txBox="1"/>
+          <p:nvPr/>
+        </p:nvSpPr>
+        <p:spPr>
+          <a:xfrm>
+            <a:off x="475488" y="2276855"/>
+            <a:ext cx="5413248" cy="201168"/>
+          </a:xfrm>
+          <a:prstGeom prst="rect">
+            <a:avLst/>
+          </a:prstGeom>
+          <a:noFill/>
+        </p:spPr>
+        <p:txBody>
+          <a:bodyPr wrap="square">
+            <a:spAutoFit/>
+          </a:bodyPr>
+          <a:lstStyle/>
+          <a:p>
+            <a:pPr algn="l"/>
+            <a:r>
+              <a:rPr sz="1000" b="0" i="0">
+                <a:solidFill>
+                  <a:srgbClr val="60A5FA"/>
+                </a:solidFill>
+              </a:rPr>
+              <a:t>• requests 는 기본으로 SSL 인증서를 검증합니다</a:t>
+            </a:r>
+          </a:p>
+        </p:txBody>
+      </p:sp>
+      <p:sp>
+        <p:nvSpPr>
+          <p:cNvPr id="15" name="TextBox 14"/>
+          <p:cNvSpPr txBox="1"/>
+          <p:nvPr/>
+        </p:nvSpPr>
+        <p:spPr>
+          <a:xfrm>
+            <a:off x="475488" y="2487167"/>
+            <a:ext cx="5413248" cy="201168"/>
+          </a:xfrm>
+          <a:prstGeom prst="rect">
+            <a:avLst/>
+          </a:prstGeom>
+          <a:noFill/>
+        </p:spPr>
+        <p:txBody>
+          <a:bodyPr wrap="square">
+            <a:spAutoFit/>
+          </a:bodyPr>
+          <a:lstStyle/>
+          <a:p>
+            <a:pPr algn="l"/>
+            <a:r>
+              <a:rPr sz="1000" b="0" i="0">
+                <a:solidFill>
+                  <a:srgbClr val="64748B"/>
+                </a:solidFill>
+              </a:rPr>
+              <a:t>  (사내 프록시 환경: verify=False 대신 CA Bundle 권장)</a:t>
+            </a:r>
+          </a:p>
+        </p:txBody>
+      </p:sp>
+      <p:sp>
+        <p:nvSpPr>
+          <p:cNvPr id="16" name="Rectangle 15"/>
+          <p:cNvSpPr/>
+          <p:nvPr/>
+        </p:nvSpPr>
+        <p:spPr>
+          <a:xfrm>
+            <a:off x="365760" y="2834640"/>
+            <a:ext cx="5577840" cy="292608"/>
+          </a:xfrm>
+          <a:prstGeom prst="rect">
+            <a:avLst/>
+          </a:prstGeom>
+          <a:solidFill>
+            <a:srgbClr val="2A426E"/>
+          </a:solidFill>
+          <a:ln>
+            <a:noFill/>
+          </a:ln>
+        </p:spPr>
+        <p:style>
+          <a:lnRef idx="1">
+            <a:schemeClr val="accent1"/>
+          </a:lnRef>
+          <a:fillRef idx="3">
+            <a:schemeClr val="accent1"/>
+          </a:fillRef>
+          <a:effectRef idx="2">
+            <a:schemeClr val="accent1"/>
+          </a:effectRef>
+          <a:fontRef idx="minor">
+            <a:schemeClr val="lt1"/>
+          </a:fontRef>
+        </p:style>
+        <p:txBody>
+          <a:bodyPr rtlCol="0" anchor="ctr"/>
+          <a:lstStyle/>
+          <a:p>
+            <a:pPr algn="ctr"/>
+          </a:p>
+        </p:txBody>
+      </p:sp>
+      <p:sp>
+        <p:nvSpPr>
+          <p:cNvPr id="17" name="TextBox 16"/>
+          <p:cNvSpPr txBox="1"/>
+          <p:nvPr/>
+        </p:nvSpPr>
+        <p:spPr>
+          <a:xfrm>
+            <a:off x="365760" y="2834640"/>
+            <a:ext cx="5577840" cy="292608"/>
+          </a:xfrm>
+          <a:prstGeom prst="rect">
+            <a:avLst/>
+          </a:prstGeom>
+          <a:noFill/>
+        </p:spPr>
+        <p:txBody>
+          <a:bodyPr wrap="square">
+            <a:spAutoFit/>
+          </a:bodyPr>
+          <a:lstStyle/>
+          <a:p>
+            <a:pPr algn="l"/>
+            <a:r>
+              <a:rPr sz="1100" b="1" i="0">
+                <a:solidFill>
+                  <a:srgbClr val="FFFFFF"/>
+                </a:solidFill>
+              </a:rPr>
+              <a:t>  🛡  Webhook 서명 검증 (HMAC-SHA256)</a:t>
+            </a:r>
+          </a:p>
+        </p:txBody>
+      </p:sp>
+      <p:sp>
+        <p:nvSpPr>
+          <p:cNvPr id="18" name="Rectangle 17"/>
+          <p:cNvSpPr/>
+          <p:nvPr/>
+        </p:nvSpPr>
+        <p:spPr>
+          <a:xfrm>
+            <a:off x="365760" y="3127248"/>
+            <a:ext cx="5577840" cy="3035808"/>
+          </a:xfrm>
+          <a:prstGeom prst="rect">
+            <a:avLst/>
+          </a:prstGeom>
+          <a:solidFill>
+            <a:srgbClr val="1E293B"/>
+          </a:solidFill>
+          <a:ln>
+            <a:noFill/>
+          </a:ln>
+        </p:spPr>
+        <p:style>
+          <a:lnRef idx="1">
+            <a:schemeClr val="accent1"/>
+          </a:lnRef>
+          <a:fillRef idx="3">
+            <a:schemeClr val="accent1"/>
+          </a:fillRef>
+          <a:effectRef idx="2">
+            <a:schemeClr val="accent1"/>
+          </a:effectRef>
+          <a:fontRef idx="minor">
+            <a:schemeClr val="lt1"/>
+          </a:fontRef>
+        </p:style>
+        <p:txBody>
+          <a:bodyPr rtlCol="0" anchor="ctr"/>
+          <a:lstStyle/>
+          <a:p>
+            <a:pPr algn="ctr"/>
+          </a:p>
+        </p:txBody>
+      </p:sp>
+      <p:sp>
+        <p:nvSpPr>
+          <p:cNvPr id="19" name="Rectangle 18"/>
+          <p:cNvSpPr/>
+          <p:nvPr/>
+        </p:nvSpPr>
+        <p:spPr>
+          <a:xfrm>
+            <a:off x="365760" y="3127248"/>
+            <a:ext cx="45720" cy="3035808"/>
+          </a:xfrm>
+          <a:prstGeom prst="rect">
+            <a:avLst/>
+          </a:prstGeom>
+          <a:solidFill>
+            <a:srgbClr val="10B981"/>
+          </a:solidFill>
+          <a:ln>
+            <a:noFill/>
+          </a:ln>
+        </p:spPr>
+        <p:style>
+          <a:lnRef idx="1">
+            <a:schemeClr val="accent1"/>
+          </a:lnRef>
+          <a:fillRef idx="3">
+            <a:schemeClr val="accent1"/>
+          </a:fillRef>
+          <a:effectRef idx="2">
+            <a:schemeClr val="accent1"/>
+          </a:effectRef>
+          <a:fontRef idx="minor">
+            <a:schemeClr val="lt1"/>
+          </a:fontRef>
+        </p:style>
+        <p:txBody>
+          <a:bodyPr rtlCol="0" anchor="ctr"/>
+          <a:lstStyle/>
+          <a:p>
+            <a:pPr algn="ctr"/>
+          </a:p>
+        </p:txBody>
+      </p:sp>
+      <p:sp>
+        <p:nvSpPr>
+          <p:cNvPr id="20" name="TextBox 19"/>
+          <p:cNvSpPr txBox="1"/>
+          <p:nvPr/>
+        </p:nvSpPr>
+        <p:spPr>
+          <a:xfrm>
+            <a:off x="475488" y="3172968"/>
+            <a:ext cx="5413248" cy="2971800"/>
+          </a:xfrm>
+          <a:prstGeom prst="rect">
+            <a:avLst/>
+          </a:prstGeom>
+          <a:noFill/>
+        </p:spPr>
+        <p:txBody>
+          <a:bodyPr wrap="square">
+            <a:spAutoFit/>
+          </a:bodyPr>
+          <a:lstStyle/>
+          <a:p>
+            <a:pPr algn="l"/>
+            <a:r>
+              <a:rPr sz="950" b="0" i="0">
+                <a:solidFill>
+                  <a:srgbClr val="93C5FD"/>
+                </a:solidFill>
+              </a:rPr>
+              <a:t>import hmac, hashlib, json
+from fastapi import HTTPException
+SECRET = os.environ["KNOX_WEBHOOK_SECRET"]
+@app.post("/message")
+async def receive_message(request: Request):
+    body_bytes = await request.body()
+    sig = request.headers.get("X-Knox-Signature", "")
+    expected = hmac.new(
+        SECRET.encode(), body_bytes, hashlib.sha256
+    ).hexdigest()
+    if not hmac.compare_digest(sig, expected):
+        raise HTTPException(401, "Invalid signature")
+    body = json.loads(body_bytes)
+    ...</a:t>
+            </a:r>
+          </a:p>
+        </p:txBody>
+      </p:sp>
+      <p:sp>
+        <p:nvSpPr>
+          <p:cNvPr id="21" name="Rectangle 20"/>
+          <p:cNvSpPr/>
+          <p:nvPr/>
+        </p:nvSpPr>
+        <p:spPr>
+          <a:xfrm>
+            <a:off x="6336792" y="1508760"/>
+            <a:ext cx="5577840" cy="292608"/>
+          </a:xfrm>
+          <a:prstGeom prst="rect">
+            <a:avLst/>
+          </a:prstGeom>
+          <a:solidFill>
+            <a:srgbClr val="4A2710"/>
+          </a:solidFill>
+          <a:ln>
+            <a:noFill/>
+          </a:ln>
+        </p:spPr>
+        <p:style>
+          <a:lnRef idx="1">
+            <a:schemeClr val="accent1"/>
+          </a:lnRef>
+          <a:fillRef idx="3">
+            <a:schemeClr val="accent1"/>
+          </a:fillRef>
+          <a:effectRef idx="2">
+            <a:schemeClr val="accent1"/>
+          </a:effectRef>
+          <a:fontRef idx="minor">
+            <a:schemeClr val="lt1"/>
+          </a:fontRef>
+        </p:style>
+        <p:txBody>
+          <a:bodyPr rtlCol="0" anchor="ctr"/>
+          <a:lstStyle/>
+          <a:p>
+            <a:pPr algn="ctr"/>
+          </a:p>
+        </p:txBody>
+      </p:sp>
+      <p:sp>
+        <p:nvSpPr>
+          <p:cNvPr id="22" name="TextBox 21"/>
+          <p:cNvSpPr txBox="1"/>
+          <p:nvPr/>
+        </p:nvSpPr>
+        <p:spPr>
+          <a:xfrm>
+            <a:off x="6336792" y="1508760"/>
+            <a:ext cx="5577840" cy="292608"/>
+          </a:xfrm>
+          <a:prstGeom prst="rect">
+            <a:avLst/>
+          </a:prstGeom>
+          <a:noFill/>
+        </p:spPr>
+        <p:txBody>
+          <a:bodyPr wrap="square">
+            <a:spAutoFit/>
+          </a:bodyPr>
+          <a:lstStyle/>
+          <a:p>
+            <a:pPr algn="l"/>
+            <a:r>
+              <a:rPr sz="1100" b="1" i="0">
+                <a:solidFill>
+                  <a:srgbClr val="FFFFFF"/>
+                </a:solidFill>
+              </a:rPr>
+              <a:t>  📁  .env 파일 (토큰·시크릿 분리)</a:t>
+            </a:r>
+          </a:p>
+        </p:txBody>
+      </p:sp>
+      <p:sp>
+        <p:nvSpPr>
+          <p:cNvPr id="23" name="Rectangle 22"/>
+          <p:cNvSpPr/>
+          <p:nvPr/>
+        </p:nvSpPr>
+        <p:spPr>
+          <a:xfrm>
+            <a:off x="6336792" y="1801368"/>
+            <a:ext cx="5577840" cy="868680"/>
+          </a:xfrm>
+          <a:prstGeom prst="rect">
+            <a:avLst/>
+          </a:prstGeom>
+          <a:solidFill>
+            <a:srgbClr val="1E293B"/>
+          </a:solidFill>
+          <a:ln>
+            <a:noFill/>
+          </a:ln>
+        </p:spPr>
+        <p:style>
+          <a:lnRef idx="1">
+            <a:schemeClr val="accent1"/>
+          </a:lnRef>
+          <a:fillRef idx="3">
+            <a:schemeClr val="accent1"/>
+          </a:fillRef>
+          <a:effectRef idx="2">
+            <a:schemeClr val="accent1"/>
+          </a:effectRef>
+          <a:fontRef idx="minor">
+            <a:schemeClr val="lt1"/>
+          </a:fontRef>
+        </p:style>
+        <p:txBody>
+          <a:bodyPr rtlCol="0" anchor="ctr"/>
+          <a:lstStyle/>
+          <a:p>
+            <a:pPr algn="ctr"/>
+          </a:p>
+        </p:txBody>
+      </p:sp>
+      <p:sp>
+        <p:nvSpPr>
+          <p:cNvPr id="24" name="Rectangle 23"/>
+          <p:cNvSpPr/>
+          <p:nvPr/>
+        </p:nvSpPr>
+        <p:spPr>
+          <a:xfrm>
+            <a:off x="6336792" y="1801368"/>
+            <a:ext cx="45720" cy="868680"/>
+          </a:xfrm>
+          <a:prstGeom prst="rect">
+            <a:avLst/>
+          </a:prstGeom>
+          <a:solidFill>
+            <a:srgbClr val="F59E0B"/>
+          </a:solidFill>
+          <a:ln>
+            <a:noFill/>
+          </a:ln>
+        </p:spPr>
+        <p:style>
+          <a:lnRef idx="1">
+            <a:schemeClr val="accent1"/>
+          </a:lnRef>
+          <a:fillRef idx="3">
+            <a:schemeClr val="accent1"/>
+          </a:fillRef>
+          <a:effectRef idx="2">
+            <a:schemeClr val="accent1"/>
+          </a:effectRef>
+          <a:fontRef idx="minor">
+            <a:schemeClr val="lt1"/>
+          </a:fontRef>
+        </p:style>
+        <p:txBody>
+          <a:bodyPr rtlCol="0" anchor="ctr"/>
+          <a:lstStyle/>
+          <a:p>
+            <a:pPr algn="ctr"/>
+          </a:p>
+        </p:txBody>
+      </p:sp>
+      <p:sp>
+        <p:nvSpPr>
+          <p:cNvPr id="25" name="TextBox 24"/>
+          <p:cNvSpPr txBox="1"/>
+          <p:nvPr/>
+        </p:nvSpPr>
+        <p:spPr>
+          <a:xfrm>
+            <a:off x="6446520" y="1847088"/>
+            <a:ext cx="5413248" cy="804672"/>
+          </a:xfrm>
+          <a:prstGeom prst="rect">
+            <a:avLst/>
+          </a:prstGeom>
+          <a:noFill/>
+        </p:spPr>
+        <p:txBody>
+          <a:bodyPr wrap="square">
+            <a:spAutoFit/>
+          </a:bodyPr>
+          <a:lstStyle/>
+          <a:p>
+            <a:pPr algn="l"/>
+            <a:r>
+              <a:rPr sz="950" b="0" i="0">
+                <a:solidFill>
+                  <a:srgbClr val="FBCF89"/>
+                </a:solidFill>
+              </a:rPr>
+              <a:t># .env  (절대 git 커밋 금지 — .gitignore 에 추가)
+KNOX_ACCESS_TOKEN=eyJhbGciOiJSUzI1NiJ9...
+KNOX_SYSTEM_ID=KCC10BOT01508
+KNOX_WEBHOOK_SECRET=your_shared_secret
+</a:t>
+            </a:r>
+          </a:p>
+        </p:txBody>
+      </p:sp>
+      <p:sp>
+        <p:nvSpPr>
+          <p:cNvPr id="26" name="Rectangle 25"/>
+          <p:cNvSpPr/>
+          <p:nvPr/>
+        </p:nvSpPr>
+        <p:spPr>
+          <a:xfrm>
+            <a:off x="6336792" y="2770632"/>
+            <a:ext cx="5577840" cy="292608"/>
+          </a:xfrm>
+          <a:prstGeom prst="rect">
+            <a:avLst/>
+          </a:prstGeom>
+          <a:solidFill>
+            <a:srgbClr val="2A426E"/>
+          </a:solidFill>
+          <a:ln>
+            <a:noFill/>
+          </a:ln>
+        </p:spPr>
+        <p:style>
+          <a:lnRef idx="1">
+            <a:schemeClr val="accent1"/>
+          </a:lnRef>
+          <a:fillRef idx="3">
+            <a:schemeClr val="accent1"/>
+          </a:fillRef>
+          <a:effectRef idx="2">
+            <a:schemeClr val="accent1"/>
+          </a:effectRef>
+          <a:fontRef idx="minor">
+            <a:schemeClr val="lt1"/>
+          </a:fontRef>
+        </p:style>
+        <p:txBody>
+          <a:bodyPr rtlCol="0" anchor="ctr"/>
+          <a:lstStyle/>
+          <a:p>
+            <a:pPr algn="ctr"/>
+          </a:p>
+        </p:txBody>
+      </p:sp>
+      <p:sp>
+        <p:nvSpPr>
+          <p:cNvPr id="27" name="TextBox 26"/>
+          <p:cNvSpPr txBox="1"/>
+          <p:nvPr/>
+        </p:nvSpPr>
+        <p:spPr>
+          <a:xfrm>
+            <a:off x="6336792" y="2770632"/>
+            <a:ext cx="5577840" cy="292608"/>
+          </a:xfrm>
+          <a:prstGeom prst="rect">
+            <a:avLst/>
+          </a:prstGeom>
+          <a:noFill/>
+        </p:spPr>
+        <p:txBody>
+          <a:bodyPr wrap="square">
+            <a:spAutoFit/>
+          </a:bodyPr>
+          <a:lstStyle/>
+          <a:p>
+            <a:pPr algn="l"/>
+            <a:r>
+              <a:rPr sz="1100" b="1" i="0">
+                <a:solidFill>
+                  <a:srgbClr val="FFFFFF"/>
+                </a:solidFill>
+              </a:rPr>
+              <a:t>  🐍  Python 코드에서 환경변수 사용</a:t>
+            </a:r>
+          </a:p>
+        </p:txBody>
+      </p:sp>
+      <p:sp>
+        <p:nvSpPr>
+          <p:cNvPr id="28" name="Rectangle 27"/>
+          <p:cNvSpPr/>
+          <p:nvPr/>
+        </p:nvSpPr>
+        <p:spPr>
+          <a:xfrm>
+            <a:off x="6336792" y="3063240"/>
+            <a:ext cx="5577840" cy="2212848"/>
+          </a:xfrm>
+          <a:prstGeom prst="rect">
+            <a:avLst/>
+          </a:prstGeom>
+          <a:solidFill>
+            <a:srgbClr val="1E293B"/>
+          </a:solidFill>
+          <a:ln>
+            <a:noFill/>
+          </a:ln>
+        </p:spPr>
+        <p:style>
+          <a:lnRef idx="1">
+            <a:schemeClr val="accent1"/>
+          </a:lnRef>
+          <a:fillRef idx="3">
+            <a:schemeClr val="accent1"/>
+          </a:fillRef>
+          <a:effectRef idx="2">
+            <a:schemeClr val="accent1"/>
+          </a:effectRef>
+          <a:fontRef idx="minor">
+            <a:schemeClr val="lt1"/>
+          </a:fontRef>
+        </p:style>
+        <p:txBody>
+          <a:bodyPr rtlCol="0" anchor="ctr"/>
+          <a:lstStyle/>
+          <a:p>
+            <a:pPr algn="ctr"/>
+          </a:p>
+        </p:txBody>
+      </p:sp>
+      <p:sp>
+        <p:nvSpPr>
+          <p:cNvPr id="29" name="Rectangle 28"/>
+          <p:cNvSpPr/>
+          <p:nvPr/>
+        </p:nvSpPr>
+        <p:spPr>
+          <a:xfrm>
+            <a:off x="6336792" y="3063240"/>
+            <a:ext cx="45720" cy="2212848"/>
+          </a:xfrm>
+          <a:prstGeom prst="rect">
+            <a:avLst/>
+          </a:prstGeom>
+          <a:solidFill>
+            <a:srgbClr val="38BDF8"/>
+          </a:solidFill>
+          <a:ln>
+            <a:noFill/>
+          </a:ln>
+        </p:spPr>
+        <p:style>
+          <a:lnRef idx="1">
+            <a:schemeClr val="accent1"/>
+          </a:lnRef>
+          <a:fillRef idx="3">
+            <a:schemeClr val="accent1"/>
+          </a:fillRef>
+          <a:effectRef idx="2">
+            <a:schemeClr val="accent1"/>
+          </a:effectRef>
+          <a:fontRef idx="minor">
+            <a:schemeClr val="lt1"/>
+          </a:fontRef>
+        </p:style>
+        <p:txBody>
+          <a:bodyPr rtlCol="0" anchor="ctr"/>
+          <a:lstStyle/>
+          <a:p>
+            <a:pPr algn="ctr"/>
+          </a:p>
+        </p:txBody>
+      </p:sp>
+      <p:sp>
+        <p:nvSpPr>
+          <p:cNvPr id="30" name="TextBox 29"/>
+          <p:cNvSpPr txBox="1"/>
+          <p:nvPr/>
+        </p:nvSpPr>
+        <p:spPr>
+          <a:xfrm>
+            <a:off x="6446520" y="3108960"/>
+            <a:ext cx="5413248" cy="2148840"/>
+          </a:xfrm>
+          <a:prstGeom prst="rect">
+            <a:avLst/>
+          </a:prstGeom>
+          <a:noFill/>
+        </p:spPr>
+        <p:txBody>
+          <a:bodyPr wrap="square">
+            <a:spAutoFit/>
+          </a:bodyPr>
+          <a:lstStyle/>
+          <a:p>
+            <a:pPr algn="l"/>
+            <a:r>
+              <a:rPr sz="950" b="0" i="0">
+                <a:solidFill>
+                  <a:srgbClr val="93C5FD"/>
+                </a:solidFill>
+              </a:rPr>
+              <a:t>import os
+from dotenv import load_dotenv
+load_dotenv()   # .env 파일 로드
+BASE = "https://openapi.stage.samsung.net"
+headers = {
+    "Authorization": f"Bearer {os.environ['KNOX_ACCESS_TOKEN']}",
+    "x-system-id":   os.environ["KNOX_SYSTEM_ID"],
+    "Content-Type":  "application/json",
+}</a:t>
+            </a:r>
+          </a:p>
+        </p:txBody>
+      </p:sp>
+      <p:sp>
+        <p:nvSpPr>
+          <p:cNvPr id="31" name="Rectangle 30"/>
+          <p:cNvSpPr/>
+          <p:nvPr/>
+        </p:nvSpPr>
+        <p:spPr>
+          <a:xfrm>
+            <a:off x="6336792" y="5376672"/>
+            <a:ext cx="5577840" cy="457200"/>
+          </a:xfrm>
+          <a:prstGeom prst="rect">
+            <a:avLst/>
+          </a:prstGeom>
+          <a:solidFill>
+            <a:srgbClr val="1E293B"/>
+          </a:solidFill>
+          <a:ln>
+            <a:noFill/>
+          </a:ln>
+        </p:spPr>
+        <p:style>
+          <a:lnRef idx="1">
+            <a:schemeClr val="accent1"/>
+          </a:lnRef>
+          <a:fillRef idx="3">
+            <a:schemeClr val="accent1"/>
+          </a:fillRef>
+          <a:effectRef idx="2">
+            <a:schemeClr val="accent1"/>
+          </a:effectRef>
+          <a:fontRef idx="minor">
+            <a:schemeClr val="lt1"/>
+          </a:fontRef>
+        </p:style>
+        <p:txBody>
+          <a:bodyPr rtlCol="0" anchor="ctr"/>
+          <a:lstStyle/>
+          <a:p>
+            <a:pPr algn="ctr"/>
+          </a:p>
+        </p:txBody>
+      </p:sp>
+      <p:sp>
+        <p:nvSpPr>
+          <p:cNvPr id="32" name="Rectangle 31"/>
+          <p:cNvSpPr/>
+          <p:nvPr/>
+        </p:nvSpPr>
+        <p:spPr>
+          <a:xfrm>
+            <a:off x="6336792" y="5376672"/>
+            <a:ext cx="54864" cy="457200"/>
+          </a:xfrm>
+          <a:prstGeom prst="rect">
+            <a:avLst/>
+          </a:prstGeom>
+          <a:solidFill>
+            <a:srgbClr val="F59E0B"/>
+          </a:solidFill>
+          <a:ln>
+            <a:noFill/>
+          </a:ln>
+        </p:spPr>
+        <p:style>
+          <a:lnRef idx="1">
+            <a:schemeClr val="accent1"/>
+          </a:lnRef>
+          <a:fillRef idx="3">
+            <a:schemeClr val="accent1"/>
+          </a:fillRef>
+          <a:effectRef idx="2">
+            <a:schemeClr val="accent1"/>
+          </a:effectRef>
+          <a:fontRef idx="minor">
+            <a:schemeClr val="lt1"/>
+          </a:fontRef>
+        </p:style>
+        <p:txBody>
+          <a:bodyPr rtlCol="0" anchor="ctr"/>
+          <a:lstStyle/>
+          <a:p>
+            <a:pPr algn="ctr"/>
+          </a:p>
+        </p:txBody>
+      </p:sp>
+      <p:sp>
+        <p:nvSpPr>
+          <p:cNvPr id="33" name="TextBox 32"/>
+          <p:cNvSpPr txBox="1"/>
+          <p:nvPr/>
+        </p:nvSpPr>
+        <p:spPr>
+          <a:xfrm>
+            <a:off x="6473952" y="5431536"/>
+            <a:ext cx="5394960" cy="365760"/>
+          </a:xfrm>
+          <a:prstGeom prst="rect">
+            <a:avLst/>
+          </a:prstGeom>
+          <a:noFill/>
+        </p:spPr>
+        <p:txBody>
+          <a:bodyPr wrap="square">
+            <a:spAutoFit/>
+          </a:bodyPr>
+          <a:lstStyle/>
+          <a:p>
+            <a:pPr algn="l"/>
+            <a:r>
+              <a:rPr sz="1100" b="0" i="0">
+                <a:solidFill>
+                  <a:srgbClr val="FFFFFF"/>
+                </a:solidFill>
+              </a:rPr>
+              <a:t>📌 pip install python-dotenv  |  .gitignore 에  .env  반드시 추가</a:t>
+            </a:r>
+          </a:p>
+        </p:txBody>
+      </p:sp>
+      <p:sp>
+        <p:nvSpPr>
+          <p:cNvPr id="34" name="Rectangle 33"/>
+          <p:cNvSpPr/>
+          <p:nvPr/>
+        </p:nvSpPr>
+        <p:spPr>
+          <a:xfrm>
+            <a:off x="6336792" y="5925312"/>
+            <a:ext cx="5577840" cy="457200"/>
+          </a:xfrm>
+          <a:prstGeom prst="rect">
+            <a:avLst/>
+          </a:prstGeom>
+          <a:solidFill>
+            <a:srgbClr val="1E293B"/>
+          </a:solidFill>
+          <a:ln>
+            <a:noFill/>
+          </a:ln>
+        </p:spPr>
+        <p:style>
+          <a:lnRef idx="1">
+            <a:schemeClr val="accent1"/>
+          </a:lnRef>
+          <a:fillRef idx="3">
+            <a:schemeClr val="accent1"/>
+          </a:fillRef>
+          <a:effectRef idx="2">
+            <a:schemeClr val="accent1"/>
+          </a:effectRef>
+          <a:fontRef idx="minor">
+            <a:schemeClr val="lt1"/>
+          </a:fontRef>
+        </p:style>
+        <p:txBody>
+          <a:bodyPr rtlCol="0" anchor="ctr"/>
+          <a:lstStyle/>
+          <a:p>
+            <a:pPr algn="ctr"/>
+          </a:p>
+        </p:txBody>
+      </p:sp>
+      <p:sp>
+        <p:nvSpPr>
+          <p:cNvPr id="35" name="Rectangle 34"/>
+          <p:cNvSpPr/>
+          <p:nvPr/>
+        </p:nvSpPr>
+        <p:spPr>
+          <a:xfrm>
+            <a:off x="6336792" y="5925312"/>
+            <a:ext cx="54864" cy="457200"/>
+          </a:xfrm>
+          <a:prstGeom prst="rect">
+            <a:avLst/>
+          </a:prstGeom>
+          <a:solidFill>
+            <a:srgbClr val="64748B"/>
+          </a:solidFill>
+          <a:ln>
+            <a:noFill/>
+          </a:ln>
+        </p:spPr>
+        <p:style>
+          <a:lnRef idx="1">
+            <a:schemeClr val="accent1"/>
+          </a:lnRef>
+          <a:fillRef idx="3">
+            <a:schemeClr val="accent1"/>
+          </a:fillRef>
+          <a:effectRef idx="2">
+            <a:schemeClr val="accent1"/>
+          </a:effectRef>
+          <a:fontRef idx="minor">
+            <a:schemeClr val="lt1"/>
+          </a:fontRef>
+        </p:style>
+        <p:txBody>
+          <a:bodyPr rtlCol="0" anchor="ctr"/>
+          <a:lstStyle/>
+          <a:p>
+            <a:pPr algn="ctr"/>
+          </a:p>
+        </p:txBody>
+      </p:sp>
+      <p:sp>
+        <p:nvSpPr>
+          <p:cNvPr id="36" name="TextBox 35"/>
+          <p:cNvSpPr txBox="1"/>
+          <p:nvPr/>
+        </p:nvSpPr>
+        <p:spPr>
+          <a:xfrm>
+            <a:off x="6473952" y="5980176"/>
+            <a:ext cx="5394960" cy="365760"/>
+          </a:xfrm>
+          <a:prstGeom prst="rect">
+            <a:avLst/>
+          </a:prstGeom>
+          <a:noFill/>
+        </p:spPr>
+        <p:txBody>
+          <a:bodyPr wrap="square">
+            <a:spAutoFit/>
+          </a:bodyPr>
+          <a:lstStyle/>
+          <a:p>
+            <a:pPr algn="l"/>
+            <a:r>
+              <a:rPr sz="1100" b="0" i="0">
+                <a:solidFill>
+                  <a:srgbClr val="FFFFFF"/>
+                </a:solidFill>
+              </a:rPr>
+              <a:t>⚠  Access Token 유효기간 확인 후 만료 전 갱신 필요 (Knox Portal에서 재발급)</a:t>
+            </a:r>
+          </a:p>
+        </p:txBody>
+      </p:sp>
+    </p:spTree>
+  </p:cSld>
+  <p:clrMapOvr>
+    <a:masterClrMapping/>
+  </p:clrMapOvr>
+</p:sld>
+</file>
+
+<file path=ppt/slides/slide12.xml><?xml version="1.0" encoding="utf-8"?>
 <p:sld xmlns:a="http://schemas.openxmlformats.org/drawingml/2006/main" xmlns:p="http://schemas.openxmlformats.org/presentationml/2006/main" xmlns:r="http://schemas.openxmlformats.org/officeDocument/2006/relationships">
   <p:cSld>
     <p:spTree>
